--- a/docs/Eco-Loop_Idea_Submission.pptx
+++ b/docs/Eco-Loop_Idea_Submission.pptx
@@ -5,15 +5,15 @@
     <p:sldMasterId id="2147483648" r:id="rId1"/>
   </p:sldMasterIdLst>
   <p:notesMasterIdLst>
-    <p:notesMasterId r:id="rId9"/>
+    <p:notesMasterId r:id="rId8"/>
   </p:notesMasterIdLst>
   <p:sldIdLst>
-    <p:sldId id="298" r:id="rId3"/>
-    <p:sldId id="281" r:id="rId4"/>
-    <p:sldId id="290" r:id="rId5"/>
-    <p:sldId id="293" r:id="rId6"/>
-    <p:sldId id="299" r:id="rId7"/>
-    <p:sldId id="296" r:id="rId8"/>
+    <p:sldId id="298" r:id="rId2"/>
+    <p:sldId id="281" r:id="rId3"/>
+    <p:sldId id="290" r:id="rId4"/>
+    <p:sldId id="293" r:id="rId5"/>
+    <p:sldId id="299" r:id="rId6"/>
+    <p:sldId id="296" r:id="rId7"/>
   </p:sldIdLst>
   <p:sldSz cx="12192000" cy="6858000"/>
   <p:notesSz cx="6858000" cy="9144000"/>
@@ -261,7 +261,7 @@
             <a:fld id="{C4D5ADD5-2BBC-4A94-8F86-D9013941F742}" type="datetimeFigureOut">
               <a:rPr lang="en-US"/>
               <a:pPr/>
-              <a:t>7/24/2026</a:t>
+              <a:t>7/26/2026</a:t>
             </a:fld>
             <a:endParaRPr lang="en-US"/>
           </a:p>
@@ -579,6 +579,125 @@
 </p:notesMaster>
 </file>
 
+<file path=ppt/notesSlides/notesSlide1.xml><?xml version="1.0" encoding="utf-8"?>
+<p:notes xmlns:a="http://schemas.openxmlformats.org/drawingml/2006/main" xmlns:r="http://schemas.openxmlformats.org/officeDocument/2006/relationships" xmlns:p="http://schemas.openxmlformats.org/presentationml/2006/main">
+  <p:cSld>
+    <p:spTree>
+      <p:nvGrpSpPr>
+        <p:cNvPr id="1" name=""/>
+        <p:cNvGrpSpPr/>
+        <p:nvPr/>
+      </p:nvGrpSpPr>
+      <p:grpSpPr>
+        <a:xfrm>
+          <a:off x="0" y="0"/>
+          <a:ext cx="0" cy="0"/>
+          <a:chOff x="0" y="0"/>
+          <a:chExt cx="0" cy="0"/>
+        </a:xfrm>
+      </p:grpSpPr>
+      <p:sp>
+        <p:nvSpPr>
+          <p:cNvPr id="16385" name="Slide Image Placeholder 1"/>
+          <p:cNvSpPr>
+            <a:spLocks noGrp="1" noRot="1" noChangeAspect="1"/>
+          </p:cNvSpPr>
+          <p:nvPr>
+            <p:ph type="sldImg"/>
+          </p:nvPr>
+        </p:nvSpPr>
+        <p:spPr bwMode="auto">
+          <a:xfrm>
+            <a:off x="381000" y="685800"/>
+            <a:ext cx="6096000" cy="3429000"/>
+          </a:xfrm>
+          <a:noFill/>
+          <a:ln>
+            <a:solidFill>
+              <a:srgbClr val="000000"/>
+            </a:solidFill>
+            <a:miter lim="800000"/>
+            <a:headEnd/>
+            <a:tailEnd/>
+          </a:ln>
+        </p:spPr>
+      </p:sp>
+      <p:sp>
+        <p:nvSpPr>
+          <p:cNvPr id="16386" name="Notes Placeholder 2"/>
+          <p:cNvSpPr>
+            <a:spLocks noGrp="1"/>
+          </p:cNvSpPr>
+          <p:nvPr>
+            <p:ph type="body" idx="1"/>
+          </p:nvPr>
+        </p:nvSpPr>
+        <p:spPr bwMode="auto">
+          <a:noFill/>
+        </p:spPr>
+        <p:txBody>
+          <a:bodyPr wrap="square" numCol="1" anchor="t" anchorCtr="0" compatLnSpc="1">
+            <a:prstTxWarp prst="textNoShape">
+              <a:avLst/>
+            </a:prstTxWarp>
+          </a:bodyPr>
+          <a:lstStyle/>
+          <a:p>
+            <a:pPr eaLnBrk="1" hangingPunct="1">
+              <a:spcBef>
+                <a:spcPct val="0"/>
+              </a:spcBef>
+            </a:pPr>
+            <a:endParaRPr lang="en-US">
+              <a:ea typeface="ＭＳ Ｐゴシック" pitchFamily="1" charset="-128"/>
+            </a:endParaRPr>
+          </a:p>
+        </p:txBody>
+      </p:sp>
+      <p:sp>
+        <p:nvSpPr>
+          <p:cNvPr id="16387" name="Slide Number Placeholder 3"/>
+          <p:cNvSpPr>
+            <a:spLocks noGrp="1"/>
+          </p:cNvSpPr>
+          <p:nvPr>
+            <p:ph type="sldNum" sz="quarter" idx="5"/>
+          </p:nvPr>
+        </p:nvSpPr>
+        <p:spPr bwMode="auto">
+          <a:noFill/>
+          <a:ln>
+            <a:miter lim="800000"/>
+            <a:headEnd/>
+            <a:tailEnd/>
+          </a:ln>
+        </p:spPr>
+        <p:txBody>
+          <a:bodyPr/>
+          <a:lstStyle/>
+          <a:p>
+            <a:fld id="{65F62A7E-A2F8-438F-9CF8-47DE63F471B4}" type="slidenum">
+              <a:rPr lang="en-US"/>
+              <a:pPr/>
+              <a:t>2</a:t>
+            </a:fld>
+            <a:endParaRPr lang="en-US"/>
+          </a:p>
+        </p:txBody>
+      </p:sp>
+    </p:spTree>
+    <p:extLst>
+      <p:ext uri="{BB962C8B-B14F-4D97-AF65-F5344CB8AC3E}">
+        <p14:creationId xmlns:p14="http://schemas.microsoft.com/office/powerpoint/2010/main" val="2904073229"/>
+      </p:ext>
+    </p:extLst>
+  </p:cSld>
+  <p:clrMapOvr>
+    <a:masterClrMapping/>
+  </p:clrMapOvr>
+</p:notes>
+</file>
+
 <file path=ppt/notesSlides/notesSlide2.xml><?xml version="1.0" encoding="utf-8"?>
 <p:notes xmlns:a="http://schemas.openxmlformats.org/drawingml/2006/main" xmlns:r="http://schemas.openxmlformats.org/officeDocument/2006/relationships" xmlns:p="http://schemas.openxmlformats.org/presentationml/2006/main">
   <p:cSld>
@@ -598,7 +717,7 @@
       </p:grpSpPr>
       <p:sp>
         <p:nvSpPr>
-          <p:cNvPr id="16385" name="Slide Image Placeholder 1"/>
+          <p:cNvPr id="18433" name="Slide Image Placeholder 1"/>
           <p:cNvSpPr>
             <a:spLocks noGrp="1" noRot="1" noChangeAspect="1"/>
           </p:cNvSpPr>
@@ -624,7 +743,7 @@
       </p:sp>
       <p:sp>
         <p:nvSpPr>
-          <p:cNvPr id="16386" name="Notes Placeholder 2"/>
+          <p:cNvPr id="18434" name="Notes Placeholder 2"/>
           <p:cNvSpPr>
             <a:spLocks noGrp="1"/>
           </p:cNvSpPr>
@@ -656,7 +775,7 @@
       </p:sp>
       <p:sp>
         <p:nvSpPr>
-          <p:cNvPr id="16387" name="Slide Number Placeholder 3"/>
+          <p:cNvPr id="18435" name="Slide Number Placeholder 3"/>
           <p:cNvSpPr>
             <a:spLocks noGrp="1"/>
           </p:cNvSpPr>
@@ -676,7 +795,7 @@
           <a:bodyPr/>
           <a:lstStyle/>
           <a:p>
-            <a:fld id="{65F62A7E-A2F8-438F-9CF8-47DE63F471B4}" type="slidenum">
+            <a:fld id="{0CA7B74D-3791-4AC6-8451-F10DBCCCDD9A}" type="slidenum">
               <a:rPr lang="en-US"/>
               <a:pPr/>
               <a:t>3</a:t>
@@ -688,7 +807,7 @@
     </p:spTree>
     <p:extLst>
       <p:ext uri="{BB962C8B-B14F-4D97-AF65-F5344CB8AC3E}">
-        <p14:creationId xmlns:p14="http://schemas.microsoft.com/office/powerpoint/2010/main" val="2904073229"/>
+        <p14:creationId xmlns:p14="http://schemas.microsoft.com/office/powerpoint/2010/main" val="2335206292"/>
       </p:ext>
     </p:extLst>
   </p:cSld>
@@ -795,19 +914,78 @@
           <a:bodyPr/>
           <a:lstStyle/>
           <a:p>
+            <a:pPr marL="0" marR="0" lvl="0" indent="0" algn="r" defTabSz="457200" rtl="0" eaLnBrk="1" fontAlgn="base" latinLnBrk="0" hangingPunct="1">
+              <a:lnSpc>
+                <a:spcPct val="100000"/>
+              </a:lnSpc>
+              <a:spcBef>
+                <a:spcPct val="0"/>
+              </a:spcBef>
+              <a:spcAft>
+                <a:spcPct val="0"/>
+              </a:spcAft>
+              <a:buClrTx/>
+              <a:buSzTx/>
+              <a:buFontTx/>
+              <a:buNone/>
+              <a:tabLst/>
+              <a:defRPr/>
+            </a:pPr>
             <a:fld id="{0CA7B74D-3791-4AC6-8451-F10DBCCCDD9A}" type="slidenum">
-              <a:rPr lang="en-US"/>
-              <a:pPr/>
+              <a:rPr kumimoji="0" lang="en-US" sz="1200" b="0" i="0" u="none" strike="noStrike" kern="1200" cap="none" spc="0" normalizeH="0" baseline="0" noProof="0">
+                <a:ln>
+                  <a:noFill/>
+                </a:ln>
+                <a:solidFill>
+                  <a:prstClr val="black"/>
+                </a:solidFill>
+                <a:effectLst/>
+                <a:uLnTx/>
+                <a:uFillTx/>
+                <a:latin typeface="Calibri" pitchFamily="34" charset="0"/>
+                <a:ea typeface="ＭＳ Ｐゴシック" pitchFamily="1" charset="-128"/>
+                <a:cs typeface="+mn-cs"/>
+              </a:rPr>
+              <a:pPr marL="0" marR="0" lvl="0" indent="0" algn="r" defTabSz="457200" rtl="0" eaLnBrk="1" fontAlgn="base" latinLnBrk="0" hangingPunct="1">
+                <a:lnSpc>
+                  <a:spcPct val="100000"/>
+                </a:lnSpc>
+                <a:spcBef>
+                  <a:spcPct val="0"/>
+                </a:spcBef>
+                <a:spcAft>
+                  <a:spcPct val="0"/>
+                </a:spcAft>
+                <a:buClrTx/>
+                <a:buSzTx/>
+                <a:buFontTx/>
+                <a:buNone/>
+                <a:tabLst/>
+                <a:defRPr/>
+              </a:pPr>
               <a:t>4</a:t>
             </a:fld>
-            <a:endParaRPr lang="en-US"/>
+            <a:endParaRPr kumimoji="0" lang="en-US" sz="1200" b="0" i="0" u="none" strike="noStrike" kern="1200" cap="none" spc="0" normalizeH="0" baseline="0" noProof="0">
+              <a:ln>
+                <a:noFill/>
+              </a:ln>
+              <a:solidFill>
+                <a:prstClr val="black"/>
+              </a:solidFill>
+              <a:effectLst/>
+              <a:uLnTx/>
+              <a:uFillTx/>
+              <a:latin typeface="Calibri" pitchFamily="34" charset="0"/>
+              <a:ea typeface="ＭＳ Ｐゴシック" pitchFamily="1" charset="-128"/>
+              <a:cs typeface="+mn-cs"/>
+            </a:endParaRPr>
           </a:p>
         </p:txBody>
       </p:sp>
     </p:spTree>
     <p:extLst>
       <p:ext uri="{BB962C8B-B14F-4D97-AF65-F5344CB8AC3E}">
-        <p14:creationId xmlns:p14="http://schemas.microsoft.com/office/powerpoint/2010/main" val="2335206292"/>
+        <p14:creationId xmlns:p14="http://schemas.microsoft.com/office/powerpoint/2010/main" val="3773505461"/>
       </p:ext>
     </p:extLst>
   </p:cSld>
@@ -822,7 +1000,13 @@
   <p:cSld>
     <p:spTree>
       <p:nvGrpSpPr>
-        <p:cNvPr id="1" name=""/>
+        <p:cNvPr id="1" name="">
+          <a:extLst>
+            <a:ext uri="{FF2B5EF4-FFF2-40B4-BE49-F238E27FC236}">
+              <a16:creationId xmlns:a16="http://schemas.microsoft.com/office/drawing/2014/main" id="{9949F277-D966-5891-8E8E-FE1852E6B425}"/>
+            </a:ext>
+          </a:extLst>
+        </p:cNvPr>
         <p:cNvGrpSpPr/>
         <p:nvPr/>
       </p:nvGrpSpPr>
@@ -836,7 +1020,13 @@
       </p:grpSpPr>
       <p:sp>
         <p:nvSpPr>
-          <p:cNvPr id="18433" name="Slide Image Placeholder 1"/>
+          <p:cNvPr id="18433" name="Slide Image Placeholder 1">
+            <a:extLst>
+              <a:ext uri="{FF2B5EF4-FFF2-40B4-BE49-F238E27FC236}">
+                <a16:creationId xmlns:a16="http://schemas.microsoft.com/office/drawing/2014/main" id="{63166A99-EAE2-2E28-993F-D5871297B24D}"/>
+              </a:ext>
+            </a:extLst>
+          </p:cNvPr>
           <p:cNvSpPr>
             <a:spLocks noGrp="1" noRot="1" noChangeAspect="1"/>
           </p:cNvSpPr>
@@ -862,7 +1052,13 @@
       </p:sp>
       <p:sp>
         <p:nvSpPr>
-          <p:cNvPr id="18434" name="Notes Placeholder 2"/>
+          <p:cNvPr id="18434" name="Notes Placeholder 2">
+            <a:extLst>
+              <a:ext uri="{FF2B5EF4-FFF2-40B4-BE49-F238E27FC236}">
+                <a16:creationId xmlns:a16="http://schemas.microsoft.com/office/drawing/2014/main" id="{4ED88F3D-7791-59C8-716F-0AAD4C669A9A}"/>
+              </a:ext>
+            </a:extLst>
+          </p:cNvPr>
           <p:cNvSpPr>
             <a:spLocks noGrp="1"/>
           </p:cNvSpPr>
@@ -894,7 +1090,13 @@
       </p:sp>
       <p:sp>
         <p:nvSpPr>
-          <p:cNvPr id="18435" name="Slide Number Placeholder 3"/>
+          <p:cNvPr id="18435" name="Slide Number Placeholder 3">
+            <a:extLst>
+              <a:ext uri="{FF2B5EF4-FFF2-40B4-BE49-F238E27FC236}">
+                <a16:creationId xmlns:a16="http://schemas.microsoft.com/office/drawing/2014/main" id="{CC82298B-112C-33CB-5F98-D6F1C4A4C6DE}"/>
+              </a:ext>
+            </a:extLst>
+          </p:cNvPr>
           <p:cNvSpPr>
             <a:spLocks noGrp="1"/>
           </p:cNvSpPr>
@@ -985,7 +1187,7 @@
     </p:spTree>
     <p:extLst>
       <p:ext uri="{BB962C8B-B14F-4D97-AF65-F5344CB8AC3E}">
-        <p14:creationId xmlns:p14="http://schemas.microsoft.com/office/powerpoint/2010/main" val="3773505461"/>
+        <p14:creationId xmlns:p14="http://schemas.microsoft.com/office/powerpoint/2010/main" val="4173051335"/>
       </p:ext>
     </p:extLst>
   </p:cSld>
@@ -1000,13 +1202,7 @@
   <p:cSld>
     <p:spTree>
       <p:nvGrpSpPr>
-        <p:cNvPr id="1" name="">
-          <a:extLst>
-            <a:ext uri="{FF2B5EF4-FFF2-40B4-BE49-F238E27FC236}">
-              <a16:creationId xmlns:a16="http://schemas.microsoft.com/office/drawing/2014/main" id="{9949F277-D966-5891-8E8E-FE1852E6B425}"/>
-            </a:ext>
-          </a:extLst>
-        </p:cNvPr>
+        <p:cNvPr id="1" name=""/>
         <p:cNvGrpSpPr/>
         <p:nvPr/>
       </p:nvGrpSpPr>
@@ -1020,13 +1216,7 @@
       </p:grpSpPr>
       <p:sp>
         <p:nvSpPr>
-          <p:cNvPr id="18433" name="Slide Image Placeholder 1">
-            <a:extLst>
-              <a:ext uri="{FF2B5EF4-FFF2-40B4-BE49-F238E27FC236}">
-                <a16:creationId xmlns:a16="http://schemas.microsoft.com/office/drawing/2014/main" id="{63166A99-EAE2-2E28-993F-D5871297B24D}"/>
-              </a:ext>
-            </a:extLst>
-          </p:cNvPr>
+          <p:cNvPr id="18433" name="Slide Image Placeholder 1"/>
           <p:cNvSpPr>
             <a:spLocks noGrp="1" noRot="1" noChangeAspect="1"/>
           </p:cNvSpPr>
@@ -1052,13 +1242,7 @@
       </p:sp>
       <p:sp>
         <p:nvSpPr>
-          <p:cNvPr id="18434" name="Notes Placeholder 2">
-            <a:extLst>
-              <a:ext uri="{FF2B5EF4-FFF2-40B4-BE49-F238E27FC236}">
-                <a16:creationId xmlns:a16="http://schemas.microsoft.com/office/drawing/2014/main" id="{4ED88F3D-7791-59C8-716F-0AAD4C669A9A}"/>
-              </a:ext>
-            </a:extLst>
-          </p:cNvPr>
+          <p:cNvPr id="18434" name="Notes Placeholder 2"/>
           <p:cNvSpPr>
             <a:spLocks noGrp="1"/>
           </p:cNvSpPr>
@@ -1090,13 +1274,7 @@
       </p:sp>
       <p:sp>
         <p:nvSpPr>
-          <p:cNvPr id="18435" name="Slide Number Placeholder 3">
-            <a:extLst>
-              <a:ext uri="{FF2B5EF4-FFF2-40B4-BE49-F238E27FC236}">
-                <a16:creationId xmlns:a16="http://schemas.microsoft.com/office/drawing/2014/main" id="{CC82298B-112C-33CB-5F98-D6F1C4A4C6DE}"/>
-              </a:ext>
-            </a:extLst>
-          </p:cNvPr>
+          <p:cNvPr id="18435" name="Slide Number Placeholder 3"/>
           <p:cNvSpPr>
             <a:spLocks noGrp="1"/>
           </p:cNvSpPr>
@@ -1187,184 +1365,6 @@
     </p:spTree>
     <p:extLst>
       <p:ext uri="{BB962C8B-B14F-4D97-AF65-F5344CB8AC3E}">
-        <p14:creationId xmlns:p14="http://schemas.microsoft.com/office/powerpoint/2010/main" val="4173051335"/>
-      </p:ext>
-    </p:extLst>
-  </p:cSld>
-  <p:clrMapOvr>
-    <a:masterClrMapping/>
-  </p:clrMapOvr>
-</p:notes>
-</file>
-
-<file path=ppt/notesSlides/notesSlide6.xml><?xml version="1.0" encoding="utf-8"?>
-<p:notes xmlns:a="http://schemas.openxmlformats.org/drawingml/2006/main" xmlns:r="http://schemas.openxmlformats.org/officeDocument/2006/relationships" xmlns:p="http://schemas.openxmlformats.org/presentationml/2006/main">
-  <p:cSld>
-    <p:spTree>
-      <p:nvGrpSpPr>
-        <p:cNvPr id="1" name=""/>
-        <p:cNvGrpSpPr/>
-        <p:nvPr/>
-      </p:nvGrpSpPr>
-      <p:grpSpPr>
-        <a:xfrm>
-          <a:off x="0" y="0"/>
-          <a:ext cx="0" cy="0"/>
-          <a:chOff x="0" y="0"/>
-          <a:chExt cx="0" cy="0"/>
-        </a:xfrm>
-      </p:grpSpPr>
-      <p:sp>
-        <p:nvSpPr>
-          <p:cNvPr id="18433" name="Slide Image Placeholder 1"/>
-          <p:cNvSpPr>
-            <a:spLocks noGrp="1" noRot="1" noChangeAspect="1"/>
-          </p:cNvSpPr>
-          <p:nvPr>
-            <p:ph type="sldImg"/>
-          </p:nvPr>
-        </p:nvSpPr>
-        <p:spPr bwMode="auto">
-          <a:xfrm>
-            <a:off x="381000" y="685800"/>
-            <a:ext cx="6096000" cy="3429000"/>
-          </a:xfrm>
-          <a:noFill/>
-          <a:ln>
-            <a:solidFill>
-              <a:srgbClr val="000000"/>
-            </a:solidFill>
-            <a:miter lim="800000"/>
-            <a:headEnd/>
-            <a:tailEnd/>
-          </a:ln>
-        </p:spPr>
-      </p:sp>
-      <p:sp>
-        <p:nvSpPr>
-          <p:cNvPr id="18434" name="Notes Placeholder 2"/>
-          <p:cNvSpPr>
-            <a:spLocks noGrp="1"/>
-          </p:cNvSpPr>
-          <p:nvPr>
-            <p:ph type="body" idx="1"/>
-          </p:nvPr>
-        </p:nvSpPr>
-        <p:spPr bwMode="auto">
-          <a:noFill/>
-        </p:spPr>
-        <p:txBody>
-          <a:bodyPr wrap="square" numCol="1" anchor="t" anchorCtr="0" compatLnSpc="1">
-            <a:prstTxWarp prst="textNoShape">
-              <a:avLst/>
-            </a:prstTxWarp>
-          </a:bodyPr>
-          <a:lstStyle/>
-          <a:p>
-            <a:pPr eaLnBrk="1" hangingPunct="1">
-              <a:spcBef>
-                <a:spcPct val="0"/>
-              </a:spcBef>
-            </a:pPr>
-            <a:endParaRPr lang="en-US">
-              <a:ea typeface="ＭＳ Ｐゴシック" pitchFamily="1" charset="-128"/>
-            </a:endParaRPr>
-          </a:p>
-        </p:txBody>
-      </p:sp>
-      <p:sp>
-        <p:nvSpPr>
-          <p:cNvPr id="18435" name="Slide Number Placeholder 3"/>
-          <p:cNvSpPr>
-            <a:spLocks noGrp="1"/>
-          </p:cNvSpPr>
-          <p:nvPr>
-            <p:ph type="sldNum" sz="quarter" idx="5"/>
-          </p:nvPr>
-        </p:nvSpPr>
-        <p:spPr bwMode="auto">
-          <a:noFill/>
-          <a:ln>
-            <a:miter lim="800000"/>
-            <a:headEnd/>
-            <a:tailEnd/>
-          </a:ln>
-        </p:spPr>
-        <p:txBody>
-          <a:bodyPr/>
-          <a:lstStyle/>
-          <a:p>
-            <a:pPr marL="0" marR="0" lvl="0" indent="0" algn="r" defTabSz="457200" rtl="0" eaLnBrk="1" fontAlgn="base" latinLnBrk="0" hangingPunct="1">
-              <a:lnSpc>
-                <a:spcPct val="100000"/>
-              </a:lnSpc>
-              <a:spcBef>
-                <a:spcPct val="0"/>
-              </a:spcBef>
-              <a:spcAft>
-                <a:spcPct val="0"/>
-              </a:spcAft>
-              <a:buClrTx/>
-              <a:buSzTx/>
-              <a:buFontTx/>
-              <a:buNone/>
-              <a:tabLst/>
-              <a:defRPr/>
-            </a:pPr>
-            <a:fld id="{0CA7B74D-3791-4AC6-8451-F10DBCCCDD9A}" type="slidenum">
-              <a:rPr kumimoji="0" lang="en-US" sz="1200" b="0" i="0" u="none" strike="noStrike" kern="1200" cap="none" spc="0" normalizeH="0" baseline="0" noProof="0">
-                <a:ln>
-                  <a:noFill/>
-                </a:ln>
-                <a:solidFill>
-                  <a:prstClr val="black"/>
-                </a:solidFill>
-                <a:effectLst/>
-                <a:uLnTx/>
-                <a:uFillTx/>
-                <a:latin typeface="Calibri" pitchFamily="34" charset="0"/>
-                <a:ea typeface="ＭＳ Ｐゴシック" pitchFamily="1" charset="-128"/>
-                <a:cs typeface="+mn-cs"/>
-              </a:rPr>
-              <a:pPr marL="0" marR="0" lvl="0" indent="0" algn="r" defTabSz="457200" rtl="0" eaLnBrk="1" fontAlgn="base" latinLnBrk="0" hangingPunct="1">
-                <a:lnSpc>
-                  <a:spcPct val="100000"/>
-                </a:lnSpc>
-                <a:spcBef>
-                  <a:spcPct val="0"/>
-                </a:spcBef>
-                <a:spcAft>
-                  <a:spcPct val="0"/>
-                </a:spcAft>
-                <a:buClrTx/>
-                <a:buSzTx/>
-                <a:buFontTx/>
-                <a:buNone/>
-                <a:tabLst/>
-                <a:defRPr/>
-              </a:pPr>
-              <a:t>7</a:t>
-            </a:fld>
-            <a:endParaRPr kumimoji="0" lang="en-US" sz="1200" b="0" i="0" u="none" strike="noStrike" kern="1200" cap="none" spc="0" normalizeH="0" baseline="0" noProof="0">
-              <a:ln>
-                <a:noFill/>
-              </a:ln>
-              <a:solidFill>
-                <a:prstClr val="black"/>
-              </a:solidFill>
-              <a:effectLst/>
-              <a:uLnTx/>
-              <a:uFillTx/>
-              <a:latin typeface="Calibri" pitchFamily="34" charset="0"/>
-              <a:ea typeface="ＭＳ Ｐゴシック" pitchFamily="1" charset="-128"/>
-              <a:cs typeface="+mn-cs"/>
-            </a:endParaRPr>
-          </a:p>
-        </p:txBody>
-      </p:sp>
-    </p:spTree>
-    <p:extLst>
-      <p:ext uri="{BB962C8B-B14F-4D97-AF65-F5344CB8AC3E}">
         <p14:creationId xmlns:p14="http://schemas.microsoft.com/office/powerpoint/2010/main" val="1908672725"/>
       </p:ext>
     </p:extLst>
@@ -1558,7 +1558,7 @@
           <a:p>
             <a:fld id="{E60792E3-D524-454C-8AFD-A91972900BCB}" type="datetime1">
               <a:rPr lang="en-US" smtClean="0"/>
-              <a:t>7/24/2026</a:t>
+              <a:t>7/26/2026</a:t>
             </a:fld>
             <a:endParaRPr lang="en-US"/>
           </a:p>
@@ -1740,7 +1740,7 @@
           <a:p>
             <a:fld id="{053C3A68-6922-42D3-8905-ECC2D82A3469}" type="datetime1">
               <a:rPr lang="en-US" smtClean="0"/>
-              <a:t>7/24/2026</a:t>
+              <a:t>7/26/2026</a:t>
             </a:fld>
             <a:endParaRPr lang="en-US"/>
           </a:p>
@@ -1932,7 +1932,7 @@
           <a:p>
             <a:fld id="{CB69E9F4-7604-4950-A8B2-8ACDEDB1506E}" type="datetime1">
               <a:rPr lang="en-US" smtClean="0"/>
-              <a:t>7/24/2026</a:t>
+              <a:t>7/26/2026</a:t>
             </a:fld>
             <a:endParaRPr lang="en-US"/>
           </a:p>
@@ -2114,7 +2114,7 @@
           <a:p>
             <a:fld id="{708B7524-32A2-4C20-A58C-BC3BAA1042FC}" type="datetime1">
               <a:rPr lang="en-US" smtClean="0"/>
-              <a:t>7/24/2026</a:t>
+              <a:t>7/26/2026</a:t>
             </a:fld>
             <a:endParaRPr lang="en-US"/>
           </a:p>
@@ -2373,7 +2373,7 @@
           <a:p>
             <a:fld id="{1E994447-D6B2-43BB-A877-57F1A267B999}" type="datetime1">
               <a:rPr lang="en-US" smtClean="0"/>
-              <a:t>7/24/2026</a:t>
+              <a:t>7/26/2026</a:t>
             </a:fld>
             <a:endParaRPr lang="en-US"/>
           </a:p>
@@ -2672,7 +2672,7 @@
           <a:p>
             <a:fld id="{68920E16-BD35-483C-AA6B-346FC7E46DEA}" type="datetime1">
               <a:rPr lang="en-US" smtClean="0"/>
-              <a:t>7/24/2026</a:t>
+              <a:t>7/26/2026</a:t>
             </a:fld>
             <a:endParaRPr lang="en-US"/>
           </a:p>
@@ -3105,7 +3105,7 @@
           <a:p>
             <a:fld id="{2FEAC6F8-5103-4FC0-A69E-5C6AE6469DA8}" type="datetime1">
               <a:rPr lang="en-US" smtClean="0"/>
-              <a:t>7/24/2026</a:t>
+              <a:t>7/26/2026</a:t>
             </a:fld>
             <a:endParaRPr lang="en-US"/>
           </a:p>
@@ -3236,7 +3236,7 @@
           <a:p>
             <a:fld id="{C60C6921-0627-4C8F-83D5-0CF936D2FFDD}" type="datetime1">
               <a:rPr lang="en-US" smtClean="0"/>
-              <a:t>7/24/2026</a:t>
+              <a:t>7/26/2026</a:t>
             </a:fld>
             <a:endParaRPr lang="en-US"/>
           </a:p>
@@ -3345,7 +3345,7 @@
           <a:p>
             <a:fld id="{2FF08AD7-8103-40F8-983C-E2BA6BB9CBE0}" type="datetime1">
               <a:rPr lang="en-US" smtClean="0"/>
-              <a:t>7/24/2026</a:t>
+              <a:t>7/26/2026</a:t>
             </a:fld>
             <a:endParaRPr lang="en-US"/>
           </a:p>
@@ -3634,7 +3634,7 @@
           <a:p>
             <a:fld id="{DF8C06B4-9380-4A4D-AF49-A3596E17DAF5}" type="datetime1">
               <a:rPr lang="en-US" smtClean="0"/>
-              <a:t>7/24/2026</a:t>
+              <a:t>7/26/2026</a:t>
             </a:fld>
             <a:endParaRPr lang="en-US"/>
           </a:p>
@@ -3903,7 +3903,7 @@
           <a:p>
             <a:fld id="{EF7FDEF1-C582-4E22-9E77-D68326471F28}" type="datetime1">
               <a:rPr lang="en-US" smtClean="0"/>
-              <a:t>7/24/2026</a:t>
+              <a:t>7/26/2026</a:t>
             </a:fld>
             <a:endParaRPr lang="en-US"/>
           </a:p>
@@ -4146,7 +4146,7 @@
           <a:p>
             <a:fld id="{780A9602-A9A9-453F-AEF1-37B5837E02CD}" type="datetime1">
               <a:rPr lang="en-US" smtClean="0"/>
-              <a:t>7/24/2026</a:t>
+              <a:t>7/26/2026</a:t>
             </a:fld>
             <a:endParaRPr lang="en-US"/>
           </a:p>
@@ -4664,6 +4664,493 @@
 </p:sldMaster>
 </file>
 
+<file path=ppt/slides/slide1.xml><?xml version="1.0" encoding="utf-8"?>
+<p:sld xmlns:a="http://schemas.openxmlformats.org/drawingml/2006/main" xmlns:r="http://schemas.openxmlformats.org/officeDocument/2006/relationships" xmlns:p="http://schemas.openxmlformats.org/presentationml/2006/main">
+  <p:cSld>
+    <p:spTree>
+      <p:nvGrpSpPr>
+        <p:cNvPr id="1" name=""/>
+        <p:cNvGrpSpPr/>
+        <p:nvPr/>
+      </p:nvGrpSpPr>
+      <p:grpSpPr>
+        <a:xfrm>
+          <a:off x="0" y="0"/>
+          <a:ext cx="0" cy="0"/>
+          <a:chOff x="0" y="0"/>
+          <a:chExt cx="0" cy="0"/>
+        </a:xfrm>
+      </p:grpSpPr>
+      <p:sp>
+        <p:nvSpPr>
+          <p:cNvPr id="4" name="Footer Placeholder 3">
+            <a:extLst>
+              <a:ext uri="{FF2B5EF4-FFF2-40B4-BE49-F238E27FC236}">
+                <a16:creationId xmlns:a16="http://schemas.microsoft.com/office/drawing/2014/main" id="{C2A033A5-F70E-7E73-0B8C-FA62C08DEB56}"/>
+              </a:ext>
+            </a:extLst>
+          </p:cNvPr>
+          <p:cNvSpPr>
+            <a:spLocks noGrp="1"/>
+          </p:cNvSpPr>
+          <p:nvPr>
+            <p:ph type="ftr" sz="quarter" idx="11"/>
+          </p:nvPr>
+        </p:nvSpPr>
+        <p:spPr/>
+        <p:txBody>
+          <a:bodyPr/>
+          <a:lstStyle/>
+          <a:p>
+            <a:pPr>
+              <a:defRPr/>
+            </a:pPr>
+            <a:r>
+              <a:rPr lang="en-US"/>
+              <a:t>@SIH Idea submission- Template</a:t>
+            </a:r>
+          </a:p>
+        </p:txBody>
+      </p:sp>
+      <p:sp>
+        <p:nvSpPr>
+          <p:cNvPr id="5" name="Slide Number Placeholder 4">
+            <a:extLst>
+              <a:ext uri="{FF2B5EF4-FFF2-40B4-BE49-F238E27FC236}">
+                <a16:creationId xmlns:a16="http://schemas.microsoft.com/office/drawing/2014/main" id="{EC99EC04-BCF1-5A69-7D5A-95D43C9763A1}"/>
+              </a:ext>
+            </a:extLst>
+          </p:cNvPr>
+          <p:cNvSpPr>
+            <a:spLocks noGrp="1"/>
+          </p:cNvSpPr>
+          <p:nvPr>
+            <p:ph type="sldNum" sz="quarter" idx="12"/>
+          </p:nvPr>
+        </p:nvSpPr>
+        <p:spPr/>
+        <p:txBody>
+          <a:bodyPr/>
+          <a:lstStyle/>
+          <a:p>
+            <a:fld id="{677C3CE7-23F7-4828-823C-E0205DF2CF97}" type="slidenum">
+              <a:rPr lang="en-US" smtClean="0"/>
+              <a:pPr/>
+              <a:t>1</a:t>
+            </a:fld>
+            <a:endParaRPr lang="en-US"/>
+          </a:p>
+        </p:txBody>
+      </p:sp>
+      <p:sp>
+        <p:nvSpPr>
+          <p:cNvPr id="6" name="Subtitle 3">
+            <a:extLst>
+              <a:ext uri="{FF2B5EF4-FFF2-40B4-BE49-F238E27FC236}">
+                <a16:creationId xmlns:a16="http://schemas.microsoft.com/office/drawing/2014/main" id="{E0A8E5C6-6BFC-01E5-DDF5-B6A7738A64F4}"/>
+              </a:ext>
+            </a:extLst>
+          </p:cNvPr>
+          <p:cNvSpPr txBox="1">
+            <a:spLocks/>
+          </p:cNvSpPr>
+          <p:nvPr/>
+        </p:nvSpPr>
+        <p:spPr bwMode="auto">
+          <a:xfrm>
+            <a:off x="1415369" y="-365784"/>
+            <a:ext cx="8534400" cy="1752600"/>
+          </a:xfrm>
+          <a:prstGeom prst="rect">
+            <a:avLst/>
+          </a:prstGeom>
+          <a:noFill/>
+          <a:ln w="9525">
+            <a:noFill/>
+            <a:miter lim="800000"/>
+            <a:headEnd/>
+            <a:tailEnd/>
+          </a:ln>
+        </p:spPr>
+        <p:txBody>
+          <a:bodyPr vert="horz" wrap="square" lIns="91440" tIns="45720" rIns="91440" bIns="45720" numCol="1" anchor="t" anchorCtr="0" compatLnSpc="1">
+            <a:prstTxWarp prst="textNoShape">
+              <a:avLst/>
+            </a:prstTxWarp>
+          </a:bodyPr>
+          <a:lstStyle>
+            <a:lvl1pPr marL="0" indent="0" algn="ctr" defTabSz="457200" rtl="0" eaLnBrk="0" fontAlgn="base" hangingPunct="0">
+              <a:spcBef>
+                <a:spcPct val="20000"/>
+              </a:spcBef>
+              <a:spcAft>
+                <a:spcPct val="0"/>
+              </a:spcAft>
+              <a:buFont typeface="Arial" pitchFamily="34" charset="0"/>
+              <a:buNone/>
+              <a:defRPr sz="3200" kern="1200">
+                <a:solidFill>
+                  <a:schemeClr val="tx1">
+                    <a:tint val="75000"/>
+                  </a:schemeClr>
+                </a:solidFill>
+                <a:latin typeface="TradeGothic"/>
+                <a:ea typeface="ＭＳ Ｐゴシック" charset="0"/>
+                <a:cs typeface="ＭＳ Ｐゴシック" charset="0"/>
+              </a:defRPr>
+            </a:lvl1pPr>
+            <a:lvl2pPr marL="457200" indent="0" algn="ctr" defTabSz="457200" rtl="0" eaLnBrk="0" fontAlgn="base" hangingPunct="0">
+              <a:spcBef>
+                <a:spcPct val="20000"/>
+              </a:spcBef>
+              <a:spcAft>
+                <a:spcPct val="0"/>
+              </a:spcAft>
+              <a:buFont typeface="Arial" pitchFamily="34" charset="0"/>
+              <a:buNone/>
+              <a:defRPr sz="2800" kern="1200">
+                <a:solidFill>
+                  <a:schemeClr val="tx1">
+                    <a:tint val="75000"/>
+                  </a:schemeClr>
+                </a:solidFill>
+                <a:latin typeface="TradeGothic"/>
+                <a:ea typeface="ＭＳ Ｐゴシック" charset="0"/>
+                <a:cs typeface="+mn-cs"/>
+              </a:defRPr>
+            </a:lvl2pPr>
+            <a:lvl3pPr marL="914400" indent="0" algn="ctr" defTabSz="457200" rtl="0" eaLnBrk="0" fontAlgn="base" hangingPunct="0">
+              <a:spcBef>
+                <a:spcPct val="20000"/>
+              </a:spcBef>
+              <a:spcAft>
+                <a:spcPct val="0"/>
+              </a:spcAft>
+              <a:buFont typeface="Arial" pitchFamily="34" charset="0"/>
+              <a:buNone/>
+              <a:defRPr sz="2400" kern="1200">
+                <a:solidFill>
+                  <a:schemeClr val="tx1">
+                    <a:tint val="75000"/>
+                  </a:schemeClr>
+                </a:solidFill>
+                <a:latin typeface="TradeGothic"/>
+                <a:ea typeface="ＭＳ Ｐゴシック" charset="0"/>
+                <a:cs typeface="+mn-cs"/>
+              </a:defRPr>
+            </a:lvl3pPr>
+            <a:lvl4pPr marL="1371600" indent="0" algn="ctr" defTabSz="457200" rtl="0" eaLnBrk="0" fontAlgn="base" hangingPunct="0">
+              <a:spcBef>
+                <a:spcPct val="20000"/>
+              </a:spcBef>
+              <a:spcAft>
+                <a:spcPct val="0"/>
+              </a:spcAft>
+              <a:buFont typeface="Arial" pitchFamily="34" charset="0"/>
+              <a:buNone/>
+              <a:defRPr sz="2000" kern="1200">
+                <a:solidFill>
+                  <a:schemeClr val="tx1">
+                    <a:tint val="75000"/>
+                  </a:schemeClr>
+                </a:solidFill>
+                <a:latin typeface="TradeGothic"/>
+                <a:ea typeface="ＭＳ Ｐゴシック" charset="0"/>
+                <a:cs typeface="+mn-cs"/>
+              </a:defRPr>
+            </a:lvl4pPr>
+            <a:lvl5pPr marL="1828800" indent="0" algn="ctr" defTabSz="457200" rtl="0" eaLnBrk="0" fontAlgn="base" hangingPunct="0">
+              <a:spcBef>
+                <a:spcPct val="20000"/>
+              </a:spcBef>
+              <a:spcAft>
+                <a:spcPct val="0"/>
+              </a:spcAft>
+              <a:buFont typeface="Arial" pitchFamily="34" charset="0"/>
+              <a:buNone/>
+              <a:defRPr sz="2000" kern="1200">
+                <a:solidFill>
+                  <a:schemeClr val="tx1">
+                    <a:tint val="75000"/>
+                  </a:schemeClr>
+                </a:solidFill>
+                <a:latin typeface="TradeGothic"/>
+                <a:ea typeface="ＭＳ Ｐゴシック" charset="0"/>
+                <a:cs typeface="+mn-cs"/>
+              </a:defRPr>
+            </a:lvl5pPr>
+            <a:lvl6pPr marL="2286000" indent="0" algn="ctr" defTabSz="457200" rtl="0" eaLnBrk="1" latinLnBrk="0" hangingPunct="1">
+              <a:spcBef>
+                <a:spcPct val="20000"/>
+              </a:spcBef>
+              <a:buFont typeface="Arial"/>
+              <a:buNone/>
+              <a:defRPr sz="2000" kern="1200">
+                <a:solidFill>
+                  <a:schemeClr val="tx1">
+                    <a:tint val="75000"/>
+                  </a:schemeClr>
+                </a:solidFill>
+                <a:latin typeface="+mn-lt"/>
+                <a:ea typeface="+mn-ea"/>
+                <a:cs typeface="+mn-cs"/>
+              </a:defRPr>
+            </a:lvl6pPr>
+            <a:lvl7pPr marL="2743200" indent="0" algn="ctr" defTabSz="457200" rtl="0" eaLnBrk="1" latinLnBrk="0" hangingPunct="1">
+              <a:spcBef>
+                <a:spcPct val="20000"/>
+              </a:spcBef>
+              <a:buFont typeface="Arial"/>
+              <a:buNone/>
+              <a:defRPr sz="2000" kern="1200">
+                <a:solidFill>
+                  <a:schemeClr val="tx1">
+                    <a:tint val="75000"/>
+                  </a:schemeClr>
+                </a:solidFill>
+                <a:latin typeface="+mn-lt"/>
+                <a:ea typeface="+mn-ea"/>
+                <a:cs typeface="+mn-cs"/>
+              </a:defRPr>
+            </a:lvl7pPr>
+            <a:lvl8pPr marL="3200400" indent="0" algn="ctr" defTabSz="457200" rtl="0" eaLnBrk="1" latinLnBrk="0" hangingPunct="1">
+              <a:spcBef>
+                <a:spcPct val="20000"/>
+              </a:spcBef>
+              <a:buFont typeface="Arial"/>
+              <a:buNone/>
+              <a:defRPr sz="2000" kern="1200">
+                <a:solidFill>
+                  <a:schemeClr val="tx1">
+                    <a:tint val="75000"/>
+                  </a:schemeClr>
+                </a:solidFill>
+                <a:latin typeface="+mn-lt"/>
+                <a:ea typeface="+mn-ea"/>
+                <a:cs typeface="+mn-cs"/>
+              </a:defRPr>
+            </a:lvl8pPr>
+            <a:lvl9pPr marL="3657600" indent="0" algn="ctr" defTabSz="457200" rtl="0" eaLnBrk="1" latinLnBrk="0" hangingPunct="1">
+              <a:spcBef>
+                <a:spcPct val="20000"/>
+              </a:spcBef>
+              <a:buFont typeface="Arial"/>
+              <a:buNone/>
+              <a:defRPr sz="2000" kern="1200">
+                <a:solidFill>
+                  <a:schemeClr val="tx1">
+                    <a:tint val="75000"/>
+                  </a:schemeClr>
+                </a:solidFill>
+                <a:latin typeface="+mn-lt"/>
+                <a:ea typeface="+mn-ea"/>
+                <a:cs typeface="+mn-cs"/>
+              </a:defRPr>
+            </a:lvl9pPr>
+          </a:lstStyle>
+          <a:p>
+            <a:endParaRPr lang="en-US" b="1" dirty="0">
+              <a:solidFill>
+                <a:schemeClr val="tx1"/>
+              </a:solidFill>
+              <a:latin typeface="Times New Roman" panose="02020603050405020304" pitchFamily="18" charset="0"/>
+              <a:cs typeface="Times New Roman" panose="02020603050405020304" pitchFamily="18" charset="0"/>
+            </a:endParaRPr>
+          </a:p>
+          <a:p>
+            <a:r>
+              <a:rPr lang="en-US" b="1" dirty="0">
+                <a:solidFill>
+                  <a:schemeClr val="tx1"/>
+                </a:solidFill>
+                <a:latin typeface="Times New Roman" panose="02020603050405020304" pitchFamily="18" charset="0"/>
+                <a:cs typeface="Times New Roman" panose="02020603050405020304" pitchFamily="18" charset="0"/>
+              </a:rPr>
+              <a:t>TITLE PAGE</a:t>
+            </a:r>
+            <a:endParaRPr lang="en-IN" b="1" dirty="0">
+              <a:solidFill>
+                <a:schemeClr val="tx1"/>
+              </a:solidFill>
+              <a:latin typeface="Times New Roman" panose="02020603050405020304" pitchFamily="18" charset="0"/>
+              <a:cs typeface="Times New Roman" panose="02020603050405020304" pitchFamily="18" charset="0"/>
+            </a:endParaRPr>
+          </a:p>
+        </p:txBody>
+      </p:sp>
+      <p:sp>
+        <p:nvSpPr>
+          <p:cNvPr id="7" name="TextBox 6">
+            <a:extLst>
+              <a:ext uri="{FF2B5EF4-FFF2-40B4-BE49-F238E27FC236}">
+                <a16:creationId xmlns:a16="http://schemas.microsoft.com/office/drawing/2014/main" id="{AFB1BDE7-2DA0-F526-CF6E-F50D43C2C5FE}"/>
+              </a:ext>
+            </a:extLst>
+          </p:cNvPr>
+          <p:cNvSpPr txBox="1"/>
+          <p:nvPr/>
+        </p:nvSpPr>
+        <p:spPr>
+          <a:xfrm>
+            <a:off x="397273" y="549199"/>
+            <a:ext cx="11674983" cy="5425331"/>
+          </a:xfrm>
+          <a:prstGeom prst="rect">
+            <a:avLst/>
+          </a:prstGeom>
+          <a:noFill/>
+        </p:spPr>
+        <p:txBody>
+          <a:bodyPr wrap="square" rtlCol="0">
+            <a:spAutoFit/>
+          </a:bodyPr>
+          <a:lstStyle/>
+          <a:p>
+            <a:endParaRPr lang="en-US" dirty="0"/>
+          </a:p>
+          <a:p>
+            <a:pPr marL="285750" indent="-285750" algn="just">
+              <a:lnSpc>
+                <a:spcPct val="200000"/>
+              </a:lnSpc>
+              <a:buFont typeface="Arial" panose="020B0604020202020204" pitchFamily="34" charset="0"/>
+              <a:buChar char="•"/>
+            </a:pPr>
+            <a:r>
+              <a:rPr lang="en-US" sz="2400" b="1" dirty="0">
+                <a:latin typeface="Arial" panose="020B0604020202020204" pitchFamily="34" charset="0"/>
+                <a:cs typeface="Arial" panose="020B0604020202020204" pitchFamily="34" charset="0"/>
+              </a:rPr>
+              <a:t>Problem Statement ID -</a:t>
+            </a:r>
+          </a:p>
+          <a:p>
+            <a:pPr marL="285750" indent="-285750" algn="just">
+              <a:lnSpc>
+                <a:spcPct val="200000"/>
+              </a:lnSpc>
+              <a:buFont typeface="Arial" panose="020B0604020202020204" pitchFamily="34" charset="0"/>
+              <a:buChar char="•"/>
+            </a:pPr>
+            <a:r>
+              <a:rPr lang="en-US" sz="2400" b="1" dirty="0">
+                <a:latin typeface="Arial" panose="020B0604020202020204" pitchFamily="34" charset="0"/>
+                <a:cs typeface="Arial" panose="020B0604020202020204" pitchFamily="34" charset="0"/>
+              </a:rPr>
+              <a:t>Problem Statement Title-</a:t>
+            </a:r>
+            <a:r>
+              <a:rPr lang="en-GB" sz="2400" dirty="0"/>
+              <a:t> Eco-Loop Building Agents: Autonomous Closed-Loop Building Energy Management</a:t>
+            </a:r>
+            <a:endParaRPr lang="en-US" sz="2400" b="1" dirty="0">
+              <a:latin typeface="Arial" panose="020B0604020202020204" pitchFamily="34" charset="0"/>
+              <a:cs typeface="Arial" panose="020B0604020202020204" pitchFamily="34" charset="0"/>
+            </a:endParaRPr>
+          </a:p>
+          <a:p>
+            <a:pPr marL="285750" indent="-285750" algn="just">
+              <a:lnSpc>
+                <a:spcPct val="200000"/>
+              </a:lnSpc>
+              <a:buFont typeface="Arial" panose="020B0604020202020204" pitchFamily="34" charset="0"/>
+              <a:buChar char="•"/>
+            </a:pPr>
+            <a:r>
+              <a:rPr lang="en-US" sz="2400" b="1" dirty="0">
+                <a:latin typeface="Arial" panose="020B0604020202020204" pitchFamily="34" charset="0"/>
+                <a:cs typeface="Arial" panose="020B0604020202020204" pitchFamily="34" charset="0"/>
+              </a:rPr>
+              <a:t>Theme- </a:t>
+            </a:r>
+          </a:p>
+          <a:p>
+            <a:pPr marL="285750" indent="-285750" algn="just">
+              <a:lnSpc>
+                <a:spcPct val="200000"/>
+              </a:lnSpc>
+              <a:buFont typeface="Arial" panose="020B0604020202020204" pitchFamily="34" charset="0"/>
+              <a:buChar char="•"/>
+            </a:pPr>
+            <a:r>
+              <a:rPr lang="en-US" sz="2400" b="1" dirty="0">
+                <a:latin typeface="Arial" panose="020B0604020202020204" pitchFamily="34" charset="0"/>
+                <a:cs typeface="Arial" panose="020B0604020202020204" pitchFamily="34" charset="0"/>
+              </a:rPr>
+              <a:t>PS Category- </a:t>
+            </a:r>
+            <a:r>
+              <a:rPr lang="en-GB" sz="2400" dirty="0"/>
+              <a:t>Software</a:t>
+            </a:r>
+            <a:endParaRPr lang="en-US" sz="2400" b="1" dirty="0">
+              <a:latin typeface="Arial" panose="020B0604020202020204" pitchFamily="34" charset="0"/>
+              <a:cs typeface="Arial" panose="020B0604020202020204" pitchFamily="34" charset="0"/>
+            </a:endParaRPr>
+          </a:p>
+          <a:p>
+            <a:pPr marL="285750" indent="-285750" algn="just">
+              <a:lnSpc>
+                <a:spcPct val="200000"/>
+              </a:lnSpc>
+              <a:buFont typeface="Arial" panose="020B0604020202020204" pitchFamily="34" charset="0"/>
+              <a:buChar char="•"/>
+            </a:pPr>
+            <a:r>
+              <a:rPr lang="en-US" sz="2400" b="1" dirty="0">
+                <a:latin typeface="Arial" panose="020B0604020202020204" pitchFamily="34" charset="0"/>
+                <a:cs typeface="Arial" panose="020B0604020202020204" pitchFamily="34" charset="0"/>
+              </a:rPr>
+              <a:t>Student Name (Registered on portal)-</a:t>
+            </a:r>
+            <a:r>
+              <a:rPr lang="en-GB" sz="2400" dirty="0"/>
+              <a:t> Mahendra Kausik Vankadara</a:t>
+            </a:r>
+            <a:endParaRPr lang="en-US" sz="2400" b="1" dirty="0">
+              <a:latin typeface="Arial" panose="020B0604020202020204" pitchFamily="34" charset="0"/>
+              <a:cs typeface="Arial" panose="020B0604020202020204" pitchFamily="34" charset="0"/>
+            </a:endParaRPr>
+          </a:p>
+          <a:p>
+            <a:pPr marL="285750" indent="-285750" algn="just">
+              <a:lnSpc>
+                <a:spcPct val="200000"/>
+              </a:lnSpc>
+              <a:buFont typeface="Arial" panose="020B0604020202020204" pitchFamily="34" charset="0"/>
+              <a:buChar char="•"/>
+            </a:pPr>
+            <a:r>
+              <a:rPr lang="en-US" sz="2400" b="1" dirty="0">
+                <a:latin typeface="Arial" panose="020B0604020202020204" pitchFamily="34" charset="0"/>
+                <a:cs typeface="Arial" panose="020B0604020202020204" pitchFamily="34" charset="0"/>
+              </a:rPr>
+              <a:t>Student ID-</a:t>
+            </a:r>
+            <a:r>
+              <a:rPr lang="en-GB" sz="2400" dirty="0"/>
+              <a:t> PES1UG23AM163</a:t>
+            </a:r>
+            <a:endParaRPr lang="en-IN" sz="2400" b="1" dirty="0">
+              <a:latin typeface="Arial" panose="020B0604020202020204" pitchFamily="34" charset="0"/>
+              <a:cs typeface="Arial" panose="020B0604020202020204" pitchFamily="34" charset="0"/>
+            </a:endParaRPr>
+          </a:p>
+        </p:txBody>
+      </p:sp>
+    </p:spTree>
+    <p:extLst>
+      <p:ext uri="{BB962C8B-B14F-4D97-AF65-F5344CB8AC3E}">
+        <p14:creationId xmlns:p14="http://schemas.microsoft.com/office/powerpoint/2010/main" val="3319884780"/>
+      </p:ext>
+    </p:extLst>
+  </p:cSld>
+  <p:clrMapOvr>
+    <a:masterClrMapping/>
+  </p:clrMapOvr>
+</p:sld>
+</file>
+
 <file path=ppt/slides/slide2.xml><?xml version="1.0" encoding="utf-8"?>
 <p:sld xmlns:a="http://schemas.openxmlformats.org/drawingml/2006/main" xmlns:r="http://schemas.openxmlformats.org/officeDocument/2006/relationships" xmlns:p="http://schemas.openxmlformats.org/presentationml/2006/main">
   <p:cSld>
@@ -4683,83 +5170,53 @@
       </p:grpSpPr>
       <p:sp>
         <p:nvSpPr>
-          <p:cNvPr id="4" name="Footer Placeholder 3">
-            <a:extLst>
-              <a:ext uri="{FF2B5EF4-FFF2-40B4-BE49-F238E27FC236}">
-                <a16:creationId xmlns:a16="http://schemas.microsoft.com/office/drawing/2014/main" id="{C2A033A5-F70E-7E73-0B8C-FA62C08DEB56}"/>
-              </a:ext>
-            </a:extLst>
-          </p:cNvPr>
-          <p:cNvSpPr>
-            <a:spLocks noGrp="1"/>
-          </p:cNvSpPr>
-          <p:nvPr>
-            <p:ph type="ftr" sz="quarter" idx="11"/>
-          </p:nvPr>
-        </p:nvSpPr>
-        <p:spPr/>
+          <p:cNvPr id="15361" name="Title 1"/>
+          <p:cNvSpPr>
+            <a:spLocks noGrp="1"/>
+          </p:cNvSpPr>
+          <p:nvPr>
+            <p:ph type="title"/>
+          </p:nvPr>
+        </p:nvSpPr>
+        <p:spPr>
+          <a:xfrm>
+            <a:off x="609600" y="0"/>
+            <a:ext cx="10972800" cy="1143000"/>
+          </a:xfrm>
+        </p:spPr>
         <p:txBody>
           <a:bodyPr/>
           <a:lstStyle/>
           <a:p>
-            <a:pPr>
-              <a:defRPr/>
-            </a:pPr>
-            <a:r>
-              <a:rPr lang="en-US"/>
-              <a:t>@SIH Idea submission- Template</a:t>
-            </a:r>
-          </a:p>
-        </p:txBody>
-      </p:sp>
-      <p:sp>
-        <p:nvSpPr>
-          <p:cNvPr id="5" name="Slide Number Placeholder 4">
-            <a:extLst>
-              <a:ext uri="{FF2B5EF4-FFF2-40B4-BE49-F238E27FC236}">
-                <a16:creationId xmlns:a16="http://schemas.microsoft.com/office/drawing/2014/main" id="{EC99EC04-BCF1-5A69-7D5A-95D43C9763A1}"/>
-              </a:ext>
-            </a:extLst>
-          </p:cNvPr>
-          <p:cNvSpPr>
-            <a:spLocks noGrp="1"/>
-          </p:cNvSpPr>
-          <p:nvPr>
-            <p:ph type="sldNum" sz="quarter" idx="12"/>
-          </p:nvPr>
-        </p:nvSpPr>
-        <p:spPr/>
-        <p:txBody>
-          <a:bodyPr/>
-          <a:lstStyle/>
-          <a:p>
-            <a:fld id="{677C3CE7-23F7-4828-823C-E0205DF2CF97}" type="slidenum">
-              <a:rPr lang="en-US" smtClean="0"/>
-              <a:pPr/>
-              <a:t>2</a:t>
-            </a:fld>
-            <a:endParaRPr lang="en-US"/>
-          </a:p>
-        </p:txBody>
-      </p:sp>
-      <p:sp>
-        <p:nvSpPr>
-          <p:cNvPr id="6" name="Subtitle 3">
-            <a:extLst>
-              <a:ext uri="{FF2B5EF4-FFF2-40B4-BE49-F238E27FC236}">
-                <a16:creationId xmlns:a16="http://schemas.microsoft.com/office/drawing/2014/main" id="{E0A8E5C6-6BFC-01E5-DDF5-B6A7738A64F4}"/>
-              </a:ext>
-            </a:extLst>
-          </p:cNvPr>
+            <a:pPr eaLnBrk="1" hangingPunct="1"/>
+            <a:r>
+              <a:rPr lang="en-GB" sz="3400" b="1" i="1" u="sng" dirty="0">
+                <a:latin typeface="Times New Roman" panose="02020603050405020304" pitchFamily="18" charset="0"/>
+                <a:ea typeface="ＭＳ Ｐゴシック" pitchFamily="1" charset="-128"/>
+                <a:cs typeface="Times New Roman" panose="02020603050405020304" pitchFamily="18" charset="0"/>
+              </a:rPr>
+              <a:t>Eco-Loop: A Self-Correcting Building That Negotiates Its Own Energy Use</a:t>
+            </a:r>
+            <a:endParaRPr lang="en-US" sz="3400" b="1" i="1" u="sng" dirty="0">
+              <a:latin typeface="Times New Roman" panose="02020603050405020304" pitchFamily="18" charset="0"/>
+              <a:ea typeface="ＭＳ Ｐゴシック" pitchFamily="1" charset="-128"/>
+              <a:cs typeface="Times New Roman" panose="02020603050405020304" pitchFamily="18" charset="0"/>
+            </a:endParaRPr>
+          </a:p>
+        </p:txBody>
+      </p:sp>
+      <p:sp>
+        <p:nvSpPr>
+          <p:cNvPr id="15362" name="TextBox 8"/>
           <p:cNvSpPr txBox="1">
-            <a:spLocks/>
+            <a:spLocks noChangeArrowheads="1"/>
           </p:cNvSpPr>
           <p:nvPr/>
         </p:nvSpPr>
         <p:spPr bwMode="auto">
           <a:xfrm>
-            <a:off x="1415369" y="-365784"/>
-            <a:ext cx="8534400" cy="1752600"/>
+            <a:off x="0" y="986393"/>
+            <a:ext cx="12191999" cy="5663089"/>
           </a:xfrm>
           <a:prstGeom prst="rect">
             <a:avLst/>
@@ -4773,373 +5230,396 @@
           </a:ln>
         </p:spPr>
         <p:txBody>
-          <a:bodyPr vert="horz" wrap="square" lIns="91440" tIns="45720" rIns="91440" bIns="45720" numCol="1" anchor="t" anchorCtr="0" compatLnSpc="1">
-            <a:prstTxWarp prst="textNoShape">
-              <a:avLst/>
-            </a:prstTxWarp>
-          </a:bodyPr>
-          <a:lstStyle>
-            <a:lvl1pPr marL="0" indent="0" algn="ctr" defTabSz="457200" rtl="0" eaLnBrk="0" fontAlgn="base" hangingPunct="0">
-              <a:spcBef>
-                <a:spcPct val="20000"/>
-              </a:spcBef>
-              <a:spcAft>
-                <a:spcPct val="0"/>
-              </a:spcAft>
-              <a:buFont typeface="Arial" pitchFamily="34" charset="0"/>
-              <a:buNone/>
-              <a:defRPr sz="3200" kern="1200">
-                <a:solidFill>
-                  <a:schemeClr val="tx1">
-                    <a:tint val="75000"/>
-                  </a:schemeClr>
-                </a:solidFill>
-                <a:latin typeface="TradeGothic"/>
-                <a:ea typeface="ＭＳ Ｐゴシック" charset="0"/>
-                <a:cs typeface="ＭＳ Ｐゴシック" charset="0"/>
-              </a:defRPr>
-            </a:lvl1pPr>
-            <a:lvl2pPr marL="457200" indent="0" algn="ctr" defTabSz="457200" rtl="0" eaLnBrk="0" fontAlgn="base" hangingPunct="0">
-              <a:spcBef>
-                <a:spcPct val="20000"/>
-              </a:spcBef>
-              <a:spcAft>
-                <a:spcPct val="0"/>
-              </a:spcAft>
-              <a:buFont typeface="Arial" pitchFamily="34" charset="0"/>
-              <a:buNone/>
-              <a:defRPr sz="2800" kern="1200">
-                <a:solidFill>
-                  <a:schemeClr val="tx1">
-                    <a:tint val="75000"/>
-                  </a:schemeClr>
-                </a:solidFill>
-                <a:latin typeface="TradeGothic"/>
-                <a:ea typeface="ＭＳ Ｐゴシック" charset="0"/>
-                <a:cs typeface="+mn-cs"/>
-              </a:defRPr>
-            </a:lvl2pPr>
-            <a:lvl3pPr marL="914400" indent="0" algn="ctr" defTabSz="457200" rtl="0" eaLnBrk="0" fontAlgn="base" hangingPunct="0">
-              <a:spcBef>
-                <a:spcPct val="20000"/>
-              </a:spcBef>
-              <a:spcAft>
-                <a:spcPct val="0"/>
-              </a:spcAft>
-              <a:buFont typeface="Arial" pitchFamily="34" charset="0"/>
-              <a:buNone/>
-              <a:defRPr sz="2400" kern="1200">
-                <a:solidFill>
-                  <a:schemeClr val="tx1">
-                    <a:tint val="75000"/>
-                  </a:schemeClr>
-                </a:solidFill>
-                <a:latin typeface="TradeGothic"/>
-                <a:ea typeface="ＭＳ Ｐゴシック" charset="0"/>
-                <a:cs typeface="+mn-cs"/>
-              </a:defRPr>
-            </a:lvl3pPr>
-            <a:lvl4pPr marL="1371600" indent="0" algn="ctr" defTabSz="457200" rtl="0" eaLnBrk="0" fontAlgn="base" hangingPunct="0">
-              <a:spcBef>
-                <a:spcPct val="20000"/>
-              </a:spcBef>
-              <a:spcAft>
-                <a:spcPct val="0"/>
-              </a:spcAft>
-              <a:buFont typeface="Arial" pitchFamily="34" charset="0"/>
-              <a:buNone/>
-              <a:defRPr sz="2000" kern="1200">
-                <a:solidFill>
-                  <a:schemeClr val="tx1">
-                    <a:tint val="75000"/>
-                  </a:schemeClr>
-                </a:solidFill>
-                <a:latin typeface="TradeGothic"/>
-                <a:ea typeface="ＭＳ Ｐゴシック" charset="0"/>
-                <a:cs typeface="+mn-cs"/>
-              </a:defRPr>
-            </a:lvl4pPr>
-            <a:lvl5pPr marL="1828800" indent="0" algn="ctr" defTabSz="457200" rtl="0" eaLnBrk="0" fontAlgn="base" hangingPunct="0">
-              <a:spcBef>
-                <a:spcPct val="20000"/>
-              </a:spcBef>
-              <a:spcAft>
-                <a:spcPct val="0"/>
-              </a:spcAft>
-              <a:buFont typeface="Arial" pitchFamily="34" charset="0"/>
-              <a:buNone/>
-              <a:defRPr sz="2000" kern="1200">
-                <a:solidFill>
-                  <a:schemeClr val="tx1">
-                    <a:tint val="75000"/>
-                  </a:schemeClr>
-                </a:solidFill>
-                <a:latin typeface="TradeGothic"/>
-                <a:ea typeface="ＭＳ Ｐゴシック" charset="0"/>
-                <a:cs typeface="+mn-cs"/>
-              </a:defRPr>
-            </a:lvl5pPr>
-            <a:lvl6pPr marL="2286000" indent="0" algn="ctr" defTabSz="457200" rtl="0" eaLnBrk="1" latinLnBrk="0" hangingPunct="1">
-              <a:spcBef>
-                <a:spcPct val="20000"/>
-              </a:spcBef>
-              <a:buFont typeface="Arial"/>
-              <a:buNone/>
-              <a:defRPr sz="2000" kern="1200">
-                <a:solidFill>
-                  <a:schemeClr val="tx1">
-                    <a:tint val="75000"/>
-                  </a:schemeClr>
-                </a:solidFill>
-                <a:latin typeface="+mn-lt"/>
-                <a:ea typeface="+mn-ea"/>
-                <a:cs typeface="+mn-cs"/>
-              </a:defRPr>
-            </a:lvl6pPr>
-            <a:lvl7pPr marL="2743200" indent="0" algn="ctr" defTabSz="457200" rtl="0" eaLnBrk="1" latinLnBrk="0" hangingPunct="1">
-              <a:spcBef>
-                <a:spcPct val="20000"/>
-              </a:spcBef>
-              <a:buFont typeface="Arial"/>
-              <a:buNone/>
-              <a:defRPr sz="2000" kern="1200">
-                <a:solidFill>
-                  <a:schemeClr val="tx1">
-                    <a:tint val="75000"/>
-                  </a:schemeClr>
-                </a:solidFill>
-                <a:latin typeface="+mn-lt"/>
-                <a:ea typeface="+mn-ea"/>
-                <a:cs typeface="+mn-cs"/>
-              </a:defRPr>
-            </a:lvl7pPr>
-            <a:lvl8pPr marL="3200400" indent="0" algn="ctr" defTabSz="457200" rtl="0" eaLnBrk="1" latinLnBrk="0" hangingPunct="1">
-              <a:spcBef>
-                <a:spcPct val="20000"/>
-              </a:spcBef>
-              <a:buFont typeface="Arial"/>
-              <a:buNone/>
-              <a:defRPr sz="2000" kern="1200">
-                <a:solidFill>
-                  <a:schemeClr val="tx1">
-                    <a:tint val="75000"/>
-                  </a:schemeClr>
-                </a:solidFill>
-                <a:latin typeface="+mn-lt"/>
-                <a:ea typeface="+mn-ea"/>
-                <a:cs typeface="+mn-cs"/>
-              </a:defRPr>
-            </a:lvl8pPr>
-            <a:lvl9pPr marL="3657600" indent="0" algn="ctr" defTabSz="457200" rtl="0" eaLnBrk="1" latinLnBrk="0" hangingPunct="1">
-              <a:spcBef>
-                <a:spcPct val="20000"/>
-              </a:spcBef>
-              <a:buFont typeface="Arial"/>
-              <a:buNone/>
-              <a:defRPr sz="2000" kern="1200">
-                <a:solidFill>
-                  <a:schemeClr val="tx1">
-                    <a:tint val="75000"/>
-                  </a:schemeClr>
-                </a:solidFill>
-                <a:latin typeface="+mn-lt"/>
-                <a:ea typeface="+mn-ea"/>
-                <a:cs typeface="+mn-cs"/>
-              </a:defRPr>
-            </a:lvl9pPr>
-          </a:lstStyle>
-          <a:p>
-            <a:endParaRPr lang="en-US" b="1" dirty="0">
-              <a:solidFill>
-                <a:schemeClr val="tx1"/>
-              </a:solidFill>
-              <a:latin typeface="Times New Roman" panose="02020603050405020304" pitchFamily="18" charset="0"/>
-              <a:cs typeface="Times New Roman" panose="02020603050405020304" pitchFamily="18" charset="0"/>
-            </a:endParaRPr>
-          </a:p>
-          <a:p>
-            <a:r>
-              <a:rPr lang="en-US" b="1" dirty="0">
-                <a:solidFill>
-                  <a:schemeClr val="tx1"/>
-                </a:solidFill>
-                <a:latin typeface="Times New Roman" panose="02020603050405020304" pitchFamily="18" charset="0"/>
-                <a:cs typeface="Times New Roman" panose="02020603050405020304" pitchFamily="18" charset="0"/>
-              </a:rPr>
-              <a:t>TITLE PAGE</a:t>
-            </a:r>
-            <a:endParaRPr lang="en-IN" b="1" dirty="0">
-              <a:solidFill>
-                <a:schemeClr val="tx1"/>
-              </a:solidFill>
-              <a:latin typeface="Times New Roman" panose="02020603050405020304" pitchFamily="18" charset="0"/>
-              <a:cs typeface="Times New Roman" panose="02020603050405020304" pitchFamily="18" charset="0"/>
-            </a:endParaRPr>
-          </a:p>
-        </p:txBody>
-      </p:sp>
-      <p:sp>
-        <p:nvSpPr>
-          <p:cNvPr id="7" name="TextBox 6">
-            <a:extLst>
-              <a:ext uri="{FF2B5EF4-FFF2-40B4-BE49-F238E27FC236}">
-                <a16:creationId xmlns:a16="http://schemas.microsoft.com/office/drawing/2014/main" id="{AFB1BDE7-2DA0-F526-CF6E-F50D43C2C5FE}"/>
-              </a:ext>
-            </a:extLst>
-          </p:cNvPr>
-          <p:cNvSpPr txBox="1"/>
-          <p:nvPr/>
-        </p:nvSpPr>
-        <p:spPr>
-          <a:xfrm>
-            <a:off x="397274" y="1203454"/>
-            <a:ext cx="5924550" cy="4686668"/>
-          </a:xfrm>
-          <a:prstGeom prst="rect">
-            <a:avLst/>
-          </a:prstGeom>
-          <a:noFill/>
-        </p:spPr>
-        <p:txBody>
-          <a:bodyPr wrap="square" rtlCol="0">
+          <a:bodyPr wrap="square">
             <a:spAutoFit/>
           </a:bodyPr>
           <a:lstStyle/>
           <a:p>
-            <a:endParaRPr lang="en-US" dirty="0"/>
-          </a:p>
-          <a:p>
-            <a:pPr marL="285750" indent="-285750" algn="just">
-              <a:lnSpc>
-                <a:spcPct val="200000"/>
-              </a:lnSpc>
+            <a:r>
+              <a:rPr lang="en-US" sz="3200" b="1" u="sng" dirty="0">
+                <a:latin typeface="Arial" pitchFamily="34" charset="0"/>
+                <a:cs typeface="Arial" pitchFamily="34" charset="0"/>
+              </a:rPr>
+              <a:t>Proposed Solution:</a:t>
+            </a:r>
+          </a:p>
+          <a:p>
+            <a:pPr marL="285750" indent="-285750">
               <a:buFont typeface="Arial" panose="020B0604020202020204" pitchFamily="34" charset="0"/>
               <a:buChar char="•"/>
             </a:pPr>
             <a:r>
-              <a:rPr lang="en-US" sz="2400" b="1" dirty="0">
-                <a:latin typeface="Arial" panose="020B0604020202020204" pitchFamily="34" charset="0"/>
-                <a:cs typeface="Arial" panose="020B0604020202020204" pitchFamily="34" charset="0"/>
-              </a:rPr>
-              <a:t>Problem Statement ID –</a:t>
-            </a:r>
-            <a:r>
-              <a:rPr b="0" sz="2400"/>
-              <a:t> &lt;FILL: from your SIH portal registration&gt;</a:t>
-            </a:r>
-          </a:p>
-          <a:p>
-            <a:pPr marL="285750" indent="-285750" algn="just">
-              <a:lnSpc>
-                <a:spcPct val="200000"/>
-              </a:lnSpc>
+              <a:rPr lang="en-GB" sz="1500" b="1" dirty="0">
+                <a:latin typeface="Arial" pitchFamily="34" charset="0"/>
+                <a:cs typeface="Arial" pitchFamily="34" charset="0"/>
+              </a:rPr>
+              <a:t>What it is:</a:t>
+            </a:r>
+          </a:p>
+          <a:p>
+            <a:pPr marL="742950" lvl="1" indent="-285750">
               <a:buFont typeface="Arial" panose="020B0604020202020204" pitchFamily="34" charset="0"/>
               <a:buChar char="•"/>
             </a:pPr>
             <a:r>
-              <a:rPr lang="en-US" sz="2400" b="1" dirty="0">
-                <a:latin typeface="Arial" panose="020B0604020202020204" pitchFamily="34" charset="0"/>
-                <a:cs typeface="Arial" panose="020B0604020202020204" pitchFamily="34" charset="0"/>
-              </a:rPr>
-              <a:t>Problem Statement Title-</a:t>
-            </a:r>
-            <a:r>
-              <a:rPr b="0" sz="2400"/>
-              <a:t> Eco-Loop Building Agents -- Autonomous Closed-Loop Building Energy Management</a:t>
-            </a:r>
-          </a:p>
-          <a:p>
-            <a:pPr marL="285750" indent="-285750" algn="just">
-              <a:lnSpc>
-                <a:spcPct val="200000"/>
-              </a:lnSpc>
+              <a:rPr lang="en-GB" sz="1500" dirty="0">
+                <a:latin typeface="Arial" pitchFamily="34" charset="0"/>
+                <a:cs typeface="Arial" pitchFamily="34" charset="0"/>
+              </a:rPr>
+              <a:t>A closed control loop: </a:t>
+            </a:r>
+            <a:r>
+              <a:rPr lang="en-GB" sz="1500" b="1" dirty="0" err="1">
+                <a:latin typeface="Arial" pitchFamily="34" charset="0"/>
+                <a:cs typeface="Arial" pitchFamily="34" charset="0"/>
+              </a:rPr>
+              <a:t>EnergyPlus</a:t>
+            </a:r>
+            <a:r>
+              <a:rPr lang="en-GB" sz="1500" dirty="0">
+                <a:latin typeface="Arial" pitchFamily="34" charset="0"/>
+                <a:cs typeface="Arial" pitchFamily="34" charset="0"/>
+              </a:rPr>
+              <a:t> simulates a real 5-zone building; an </a:t>
+            </a:r>
+            <a:r>
+              <a:rPr lang="en-GB" sz="1500" b="1" dirty="0">
+                <a:latin typeface="Arial" pitchFamily="34" charset="0"/>
+                <a:cs typeface="Arial" pitchFamily="34" charset="0"/>
+              </a:rPr>
+              <a:t>open-weight LLM </a:t>
+            </a:r>
+            <a:r>
+              <a:rPr lang="en-GB" sz="1500" dirty="0">
+                <a:latin typeface="Arial" pitchFamily="34" charset="0"/>
+                <a:cs typeface="Arial" pitchFamily="34" charset="0"/>
+              </a:rPr>
+              <a:t>(gpt-oss-120b) reads live zone state every simulated hour and injects </a:t>
+            </a:r>
+            <a:r>
+              <a:rPr lang="en-GB" sz="1500" b="1" dirty="0">
+                <a:latin typeface="Arial" pitchFamily="34" charset="0"/>
+                <a:cs typeface="Arial" pitchFamily="34" charset="0"/>
+              </a:rPr>
+              <a:t>new HVAC setpoints back into the running simulation- </a:t>
+            </a:r>
+            <a:r>
+              <a:rPr lang="en-GB" sz="1500" dirty="0">
+                <a:latin typeface="Arial" pitchFamily="34" charset="0"/>
+                <a:cs typeface="Arial" pitchFamily="34" charset="0"/>
+              </a:rPr>
+              <a:t>one process, in-memory, no human in the loop.</a:t>
+            </a:r>
+          </a:p>
+          <a:p>
+            <a:pPr marL="742950" lvl="1" indent="-285750">
               <a:buFont typeface="Arial" panose="020B0604020202020204" pitchFamily="34" charset="0"/>
               <a:buChar char="•"/>
             </a:pPr>
             <a:r>
-              <a:rPr lang="en-US" sz="2400" b="1" dirty="0">
-                <a:latin typeface="Arial" panose="020B0604020202020204" pitchFamily="34" charset="0"/>
-                <a:cs typeface="Arial" panose="020B0604020202020204" pitchFamily="34" charset="0"/>
-              </a:rPr>
-              <a:t>Theme-</a:t>
-            </a:r>
-            <a:r>
-              <a:rPr b="0" sz="2400"/>
-              <a:t> &lt;FILL: from your SIH portal registration&gt;</a:t>
-            </a:r>
-          </a:p>
-          <a:p>
-            <a:pPr marL="285750" indent="-285750" algn="just">
-              <a:lnSpc>
-                <a:spcPct val="200000"/>
-              </a:lnSpc>
+              <a:rPr lang="en-GB" sz="1500" dirty="0">
+                <a:latin typeface="Arial" pitchFamily="34" charset="0"/>
+                <a:cs typeface="Arial" pitchFamily="34" charset="0"/>
+              </a:rPr>
+              <a:t>The LLM doesn't just react to temperature. It reasons against a </a:t>
+            </a:r>
+            <a:r>
+              <a:rPr lang="en-GB" sz="1500" b="1" dirty="0">
+                <a:latin typeface="Arial" pitchFamily="34" charset="0"/>
+                <a:cs typeface="Arial" pitchFamily="34" charset="0"/>
+              </a:rPr>
+              <a:t>24 h grid carbon-intensity + tariff forecast</a:t>
+            </a:r>
+            <a:r>
+              <a:rPr lang="en-GB" sz="1500" dirty="0">
+                <a:latin typeface="Arial" pitchFamily="34" charset="0"/>
+                <a:cs typeface="Arial" pitchFamily="34" charset="0"/>
+              </a:rPr>
+              <a:t>, occupancy lookahead, weather lookahead, CO₂/IAQ, humidity, and a </a:t>
+            </a:r>
+            <a:r>
+              <a:rPr lang="en-GB" sz="1500" b="1" dirty="0">
+                <a:latin typeface="Arial" pitchFamily="34" charset="0"/>
+                <a:cs typeface="Arial" pitchFamily="34" charset="0"/>
+              </a:rPr>
+              <a:t>peak-demand</a:t>
+            </a:r>
+            <a:r>
+              <a:rPr lang="en-GB" sz="1500" dirty="0">
+                <a:latin typeface="Arial" pitchFamily="34" charset="0"/>
+                <a:cs typeface="Arial" pitchFamily="34" charset="0"/>
+              </a:rPr>
+              <a:t> </a:t>
+            </a:r>
+            <a:r>
+              <a:rPr lang="en-GB" sz="1500" b="1" dirty="0">
+                <a:latin typeface="Arial" pitchFamily="34" charset="0"/>
+                <a:cs typeface="Arial" pitchFamily="34" charset="0"/>
+              </a:rPr>
+              <a:t>threshold</a:t>
+            </a:r>
+            <a:r>
+              <a:rPr lang="en-GB" sz="1500" dirty="0">
+                <a:latin typeface="Arial" pitchFamily="34" charset="0"/>
+                <a:cs typeface="Arial" pitchFamily="34" charset="0"/>
+              </a:rPr>
+              <a:t> then pre-cools into clean, cheap hours and sets back hard when the building empties.</a:t>
+            </a:r>
+            <a:br>
+              <a:rPr lang="en-GB" sz="1500" dirty="0">
+                <a:latin typeface="Arial" pitchFamily="34" charset="0"/>
+                <a:cs typeface="Arial" pitchFamily="34" charset="0"/>
+              </a:rPr>
+            </a:br>
+            <a:endParaRPr lang="en-GB" sz="1500" dirty="0">
+              <a:latin typeface="Arial" pitchFamily="34" charset="0"/>
+              <a:cs typeface="Arial" pitchFamily="34" charset="0"/>
+            </a:endParaRPr>
+          </a:p>
+          <a:p>
+            <a:pPr marL="285750" indent="-285750">
               <a:buFont typeface="Arial" panose="020B0604020202020204" pitchFamily="34" charset="0"/>
               <a:buChar char="•"/>
             </a:pPr>
             <a:r>
-              <a:rPr lang="en-US" sz="2400" b="1" dirty="0">
-                <a:latin typeface="Arial" panose="020B0604020202020204" pitchFamily="34" charset="0"/>
-                <a:cs typeface="Arial" panose="020B0604020202020204" pitchFamily="34" charset="0"/>
-              </a:rPr>
-              <a:t>PS Category- Software/Hardware</a:t>
-            </a:r>
-            <a:r>
-              <a:rPr b="0" sz="2400"/>
-              <a:t> Software</a:t>
-            </a:r>
-          </a:p>
-          <a:p>
-            <a:pPr marL="285750" indent="-285750" algn="just">
-              <a:lnSpc>
-                <a:spcPct val="200000"/>
-              </a:lnSpc>
+              <a:rPr lang="en-GB" sz="1500" b="1" dirty="0">
+                <a:latin typeface="Arial" pitchFamily="34" charset="0"/>
+                <a:cs typeface="Arial" pitchFamily="34" charset="0"/>
+              </a:rPr>
+              <a:t>How it addresses the problem:</a:t>
+            </a:r>
+          </a:p>
+          <a:p>
+            <a:pPr marL="742950" lvl="1" indent="-285750">
               <a:buFont typeface="Arial" panose="020B0604020202020204" pitchFamily="34" charset="0"/>
               <a:buChar char="•"/>
             </a:pPr>
             <a:r>
-              <a:rPr lang="en-US" sz="2400" b="1" dirty="0">
-                <a:latin typeface="Arial" panose="020B0604020202020204" pitchFamily="34" charset="0"/>
-                <a:cs typeface="Arial" panose="020B0604020202020204" pitchFamily="34" charset="0"/>
-              </a:rPr>
-              <a:t>Student Name (Registered on portal)</a:t>
-            </a:r>
-            <a:r>
-              <a:rPr b="0" sz="2400"/>
-              <a:t> &lt;FILL: from your SIH portal registration&gt;</a:t>
-            </a:r>
-          </a:p>
-          <a:p>
-            <a:pPr marL="285750" indent="-285750" algn="just">
-              <a:lnSpc>
-                <a:spcPct val="200000"/>
-              </a:lnSpc>
+              <a:rPr lang="en-GB" sz="1500" dirty="0">
+                <a:latin typeface="Arial" pitchFamily="34" charset="0"/>
+                <a:cs typeface="Arial" pitchFamily="34" charset="0"/>
+              </a:rPr>
+              <a:t>Traditional BMS runs rigid schedules. Measured on a matched 7-simulated-day run, same weather, same building: </a:t>
+            </a:r>
+            <a:r>
+              <a:rPr lang="en-GB" sz="1500" b="1" dirty="0">
+                <a:latin typeface="Arial" pitchFamily="34" charset="0"/>
+                <a:cs typeface="Arial" pitchFamily="34" charset="0"/>
+              </a:rPr>
+              <a:t>−8.8% total facility electricity</a:t>
+            </a:r>
+            <a:r>
+              <a:rPr lang="en-GB" sz="1500" dirty="0">
+                <a:latin typeface="Arial" pitchFamily="34" charset="0"/>
+                <a:cs typeface="Arial" pitchFamily="34" charset="0"/>
+              </a:rPr>
+              <a:t>, </a:t>
+            </a:r>
+            <a:r>
+              <a:rPr lang="en-GB" sz="1500" b="1" dirty="0">
+                <a:latin typeface="Arial" pitchFamily="34" charset="0"/>
+                <a:cs typeface="Arial" pitchFamily="34" charset="0"/>
+              </a:rPr>
+              <a:t>-23.3% HVAC-only electricity, and comfort improved 12.4 points (80.7% -&gt; 93.1% of occupied hours with PMV in [-0.5, +0.5]).</a:t>
+            </a:r>
+          </a:p>
+          <a:p>
+            <a:pPr marL="742950" lvl="1" indent="-285750">
               <a:buFont typeface="Arial" panose="020B0604020202020204" pitchFamily="34" charset="0"/>
               <a:buChar char="•"/>
             </a:pPr>
             <a:r>
-              <a:rPr lang="en-US" sz="2400" b="1" dirty="0">
-                <a:latin typeface="Arial" panose="020B0604020202020204" pitchFamily="34" charset="0"/>
-                <a:cs typeface="Arial" panose="020B0604020202020204" pitchFamily="34" charset="0"/>
-              </a:rPr>
-              <a:t>Student ID</a:t>
-            </a:r>
-            <a:r>
-              <a:rPr b="0" sz="2400"/>
-              <a:t> &lt;FILL: from your SIH portal registration&gt;</a:t>
-            </a:r>
-            <a:endParaRPr lang="en-IN" sz="2400" b="1" dirty="0">
-              <a:latin typeface="Arial" panose="020B0604020202020204" pitchFamily="34" charset="0"/>
-              <a:cs typeface="Arial" panose="020B0604020202020204" pitchFamily="34" charset="0"/>
+              <a:rPr lang="en-GB" sz="1500" dirty="0">
+                <a:latin typeface="Arial" pitchFamily="34" charset="0"/>
+                <a:cs typeface="Arial" pitchFamily="34" charset="0"/>
+              </a:rPr>
+              <a:t>Savings are </a:t>
+            </a:r>
+            <a:r>
+              <a:rPr lang="en-GB" sz="1500" b="1" dirty="0">
+                <a:latin typeface="Arial" pitchFamily="34" charset="0"/>
+                <a:cs typeface="Arial" pitchFamily="34" charset="0"/>
+              </a:rPr>
+              <a:t>not</a:t>
+            </a:r>
+            <a:r>
+              <a:rPr lang="en-GB" sz="1500" dirty="0">
+                <a:latin typeface="Arial" pitchFamily="34" charset="0"/>
+                <a:cs typeface="Arial" pitchFamily="34" charset="0"/>
+              </a:rPr>
+              <a:t> taken out of occupants' comfort- the usual trade-off is inverted. Reheat gas also fell 32.9 -&gt; 3.6 kWh and peak demand 19.9 -&gt; 19.0 kW.</a:t>
+            </a:r>
+            <a:br>
+              <a:rPr lang="en-GB" sz="1500" dirty="0">
+                <a:latin typeface="Arial" pitchFamily="34" charset="0"/>
+                <a:cs typeface="Arial" pitchFamily="34" charset="0"/>
+              </a:rPr>
+            </a:br>
+            <a:endParaRPr lang="en-GB" sz="1500" dirty="0">
+              <a:latin typeface="Arial" pitchFamily="34" charset="0"/>
+              <a:cs typeface="Arial" pitchFamily="34" charset="0"/>
             </a:endParaRPr>
           </a:p>
+          <a:p>
+            <a:pPr marL="285750" indent="-285750">
+              <a:buFont typeface="Arial" panose="020B0604020202020204" pitchFamily="34" charset="0"/>
+              <a:buChar char="•"/>
+            </a:pPr>
+            <a:r>
+              <a:rPr lang="en-GB" sz="1500" b="1" dirty="0">
+                <a:latin typeface="Arial" pitchFamily="34" charset="0"/>
+                <a:cs typeface="Arial" pitchFamily="34" charset="0"/>
+              </a:rPr>
+              <a:t>Innovation / uniqueness:</a:t>
+            </a:r>
+          </a:p>
+          <a:p>
+            <a:pPr marL="742950" lvl="1" indent="-285750">
+              <a:buFont typeface="Arial" panose="020B0604020202020204" pitchFamily="34" charset="0"/>
+              <a:buChar char="•"/>
+            </a:pPr>
+            <a:r>
+              <a:rPr lang="en-GB" sz="1500" b="1" dirty="0">
+                <a:latin typeface="Arial" pitchFamily="34" charset="0"/>
+                <a:cs typeface="Arial" pitchFamily="34" charset="0"/>
+              </a:rPr>
+              <a:t>A safety supervisor wraps the LLM</a:t>
+            </a:r>
+            <a:r>
+              <a:rPr lang="en-GB" sz="1500" dirty="0">
+                <a:latin typeface="Arial" pitchFamily="34" charset="0"/>
+                <a:cs typeface="Arial" pitchFamily="34" charset="0"/>
+              </a:rPr>
+              <a:t>: schema validation -&gt; hard clamps -&gt; anti-thrash rate limiter -&gt; watchdog timeout -&gt; deterministic rule-based fallback. The simulation cannot be killed by a bad, slow, or absent LLM response. A full run completes with the LLM entirely unreachable (shipped as proof).</a:t>
+            </a:r>
+          </a:p>
+          <a:p>
+            <a:pPr marL="742950" lvl="1" indent="-285750">
+              <a:buFont typeface="Arial" panose="020B0604020202020204" pitchFamily="34" charset="0"/>
+              <a:buChar char="•"/>
+            </a:pPr>
+            <a:r>
+              <a:rPr lang="en-GB" sz="1500" b="1" dirty="0">
+                <a:latin typeface="Arial" pitchFamily="34" charset="0"/>
+                <a:cs typeface="Arial" pitchFamily="34" charset="0"/>
+              </a:rPr>
+              <a:t>The LLM beats its own deterministic fallback on energy, HVAC energy, AND comfort simultaneously </a:t>
+            </a:r>
+            <a:r>
+              <a:rPr lang="en-GB" sz="1500" dirty="0">
+                <a:latin typeface="Arial" pitchFamily="34" charset="0"/>
+                <a:cs typeface="Arial" pitchFamily="34" charset="0"/>
+              </a:rPr>
+              <a:t>so the intelligence is doing measurable work, not just adding risk.</a:t>
+            </a:r>
+          </a:p>
+          <a:p>
+            <a:pPr marL="742950" lvl="1" indent="-285750">
+              <a:buFont typeface="Arial" panose="020B0604020202020204" pitchFamily="34" charset="0"/>
+              <a:buChar char="•"/>
+            </a:pPr>
+            <a:r>
+              <a:rPr lang="en-GB" sz="1500" b="1" dirty="0">
+                <a:latin typeface="Arial" pitchFamily="34" charset="0"/>
+                <a:cs typeface="Arial" pitchFamily="34" charset="0"/>
+              </a:rPr>
+              <a:t>Genuine self-correction</a:t>
+            </a:r>
+            <a:r>
+              <a:rPr lang="en-GB" sz="1500" dirty="0">
+                <a:latin typeface="Arial" pitchFamily="34" charset="0"/>
+                <a:cs typeface="Arial" pitchFamily="34" charset="0"/>
+              </a:rPr>
+              <a:t>: the agent was wasting 20+ kWh/day coasting into an empty building because the state digest described the previous hour. Adding one explicit </a:t>
+            </a:r>
+            <a:r>
+              <a:rPr lang="en-GB" sz="1500" dirty="0" err="1">
+                <a:latin typeface="Arial" pitchFamily="34" charset="0"/>
+                <a:cs typeface="Arial" pitchFamily="34" charset="0"/>
+              </a:rPr>
+              <a:t>decision_hour_occupied</a:t>
+            </a:r>
+            <a:r>
+              <a:rPr lang="en-GB" sz="1500" dirty="0">
+                <a:latin typeface="Arial" pitchFamily="34" charset="0"/>
+                <a:cs typeface="Arial" pitchFamily="34" charset="0"/>
+              </a:rPr>
+              <a:t> signal let the model fix itself- no supervisor override needed.</a:t>
+            </a:r>
+            <a:endParaRPr lang="en-US" sz="1500" dirty="0">
+              <a:latin typeface="Arial" pitchFamily="34" charset="0"/>
+              <a:cs typeface="Arial" pitchFamily="34" charset="0"/>
+            </a:endParaRPr>
+          </a:p>
+        </p:txBody>
+      </p:sp>
+      <p:sp>
+        <p:nvSpPr>
+          <p:cNvPr id="6" name="Slide Number Placeholder 5"/>
+          <p:cNvSpPr>
+            <a:spLocks noGrp="1"/>
+          </p:cNvSpPr>
+          <p:nvPr>
+            <p:ph type="sldNum" sz="quarter" idx="12"/>
+          </p:nvPr>
+        </p:nvSpPr>
+        <p:spPr/>
+        <p:txBody>
+          <a:bodyPr/>
+          <a:lstStyle/>
+          <a:p>
+            <a:fld id="{677C3CE7-23F7-4828-823C-E0205DF2CF97}" type="slidenum">
+              <a:rPr lang="en-US" b="1" smtClean="0">
+                <a:solidFill>
+                  <a:schemeClr val="bg1"/>
+                </a:solidFill>
+              </a:rPr>
+              <a:pPr/>
+              <a:t>2</a:t>
+            </a:fld>
+            <a:endParaRPr lang="en-US" b="1" dirty="0">
+              <a:solidFill>
+                <a:schemeClr val="bg1"/>
+              </a:solidFill>
+            </a:endParaRPr>
+          </a:p>
+        </p:txBody>
+      </p:sp>
+      <p:sp>
+        <p:nvSpPr>
+          <p:cNvPr id="7" name="Footer Placeholder 6"/>
+          <p:cNvSpPr>
+            <a:spLocks noGrp="1"/>
+          </p:cNvSpPr>
+          <p:nvPr>
+            <p:ph type="ftr" sz="quarter" idx="11"/>
+          </p:nvPr>
+        </p:nvSpPr>
+        <p:spPr>
+          <a:xfrm>
+            <a:off x="4648200" y="6492875"/>
+            <a:ext cx="3204000" cy="365125"/>
+          </a:xfrm>
+        </p:spPr>
+        <p:txBody>
+          <a:bodyPr/>
+          <a:lstStyle/>
+          <a:p>
+            <a:pPr>
+              <a:defRPr/>
+            </a:pPr>
+            <a:r>
+              <a:rPr lang="en-US" dirty="0">
+                <a:solidFill>
+                  <a:schemeClr val="bg1"/>
+                </a:solidFill>
+              </a:rPr>
+              <a:t>@SIH Idea submission- Template</a:t>
+            </a:r>
+          </a:p>
         </p:txBody>
       </p:sp>
     </p:spTree>
-    <p:extLst>
-      <p:ext uri="{BB962C8B-B14F-4D97-AF65-F5344CB8AC3E}">
-        <p14:creationId xmlns:p14="http://schemas.microsoft.com/office/powerpoint/2010/main" val="3319884780"/>
-      </p:ext>
-    </p:extLst>
   </p:cSld>
   <p:clrMapOvr>
     <a:masterClrMapping/>
@@ -5166,7 +5646,7 @@
       </p:grpSpPr>
       <p:sp>
         <p:nvSpPr>
-          <p:cNvPr id="15361" name="Title 1"/>
+          <p:cNvPr id="17409" name="Title 1"/>
           <p:cNvSpPr>
             <a:spLocks noGrp="1"/>
           </p:cNvSpPr>
@@ -5174,38 +5654,26 @@
             <p:ph type="title"/>
           </p:nvPr>
         </p:nvSpPr>
-        <p:spPr>
-          <a:xfrm>
-            <a:off x="182998" y="0"/>
-            <a:ext cx="10972800" cy="1143000"/>
-          </a:xfrm>
-        </p:spPr>
+        <p:spPr/>
         <p:txBody>
           <a:bodyPr/>
           <a:lstStyle/>
           <a:p>
             <a:pPr eaLnBrk="1" hangingPunct="1"/>
-            <a:br>
+            <a:r>
               <a:rPr lang="en-US" sz="3600" b="1" dirty="0">
                 <a:latin typeface="Times New Roman" panose="02020603050405020304" pitchFamily="18" charset="0"/>
                 <a:ea typeface="ＭＳ Ｐゴシック" pitchFamily="1" charset="-128"/>
                 <a:cs typeface="Times New Roman" panose="02020603050405020304" pitchFamily="18" charset="0"/>
               </a:rPr>
-            </a:br>
-            <a:r>
-              <a:rPr lang="en-US" sz="3600" b="1" dirty="0">
-                <a:latin typeface="Times New Roman" panose="02020603050405020304" pitchFamily="18" charset="0"/>
-                <a:ea typeface="ＭＳ Ｐゴシック" pitchFamily="1" charset="-128"/>
-                <a:cs typeface="Times New Roman" panose="02020603050405020304" pitchFamily="18" charset="0"/>
-              </a:rPr>
-              <a:t>IDEA TITLE</a:t>
-            </a:r>
-          </a:p>
-        </p:txBody>
-      </p:sp>
-      <p:sp>
-        <p:nvSpPr>
-          <p:cNvPr id="15362" name="TextBox 8"/>
+              <a:t>TECHNICAL APPROACH</a:t>
+            </a:r>
+          </a:p>
+        </p:txBody>
+      </p:sp>
+      <p:sp>
+        <p:nvSpPr>
+          <p:cNvPr id="17410" name="TextBox 8"/>
           <p:cNvSpPr txBox="1">
             <a:spLocks noChangeArrowheads="1"/>
           </p:cNvSpPr>
@@ -5213,8 +5681,8 @@
         </p:nvSpPr>
         <p:spPr bwMode="auto">
           <a:xfrm>
-            <a:off x="-1" y="2064921"/>
-            <a:ext cx="12191999" cy="2492990"/>
+            <a:off x="609600" y="846367"/>
+            <a:ext cx="10972800" cy="3170099"/>
           </a:xfrm>
           <a:prstGeom prst="rect">
             <a:avLst/>
@@ -5233,81 +5701,260 @@
           </a:bodyPr>
           <a:lstStyle/>
           <a:p>
-            <a:r>
-              <a:rPr lang="en-US" sz="3200" b="1" u="sng" dirty="0">
-                <a:latin typeface="Arial" pitchFamily="34" charset="0"/>
-                <a:cs typeface="Arial" pitchFamily="34" charset="0"/>
-              </a:rPr>
-              <a:t>Proposed Solution (Describe your Idea/Solution/Prototype)</a:t>
-            </a:r>
-            <a:endParaRPr lang="en-US" sz="3200" u="sng" dirty="0">
+            <a:pPr marL="457200" indent="-457200">
+              <a:buFont typeface="Arial" panose="020B0604020202020204" pitchFamily="34" charset="0"/>
+              <a:buChar char="•"/>
+            </a:pPr>
+            <a:r>
+              <a:rPr lang="en-US" sz="2000" b="1" dirty="0">
+                <a:latin typeface="Arial" pitchFamily="34" charset="0"/>
+                <a:cs typeface="Arial" pitchFamily="34" charset="0"/>
+              </a:rPr>
+              <a:t>Python 3.11; </a:t>
+            </a:r>
+            <a:r>
+              <a:rPr lang="en-US" sz="2000" b="1" dirty="0" err="1">
+                <a:latin typeface="Arial" pitchFamily="34" charset="0"/>
+                <a:cs typeface="Arial" pitchFamily="34" charset="0"/>
+              </a:rPr>
+              <a:t>EnergyPlus</a:t>
+            </a:r>
+            <a:r>
+              <a:rPr lang="en-US" sz="2000" b="1" dirty="0">
+                <a:latin typeface="Arial" pitchFamily="34" charset="0"/>
+                <a:cs typeface="Arial" pitchFamily="34" charset="0"/>
+              </a:rPr>
+              <a:t> 26.1 </a:t>
+            </a:r>
+            <a:r>
+              <a:rPr lang="en-US" sz="2000" dirty="0">
+                <a:latin typeface="Arial" pitchFamily="34" charset="0"/>
+                <a:cs typeface="Arial" pitchFamily="34" charset="0"/>
+              </a:rPr>
+              <a:t>driven through its bundled </a:t>
+            </a:r>
+            <a:r>
+              <a:rPr lang="en-US" sz="2000" dirty="0" err="1">
+                <a:latin typeface="Arial" pitchFamily="34" charset="0"/>
+                <a:cs typeface="Arial" pitchFamily="34" charset="0"/>
+              </a:rPr>
+              <a:t>pyenergyplus</a:t>
+            </a:r>
+            <a:r>
+              <a:rPr lang="en-US" sz="2000" dirty="0">
+                <a:latin typeface="Arial" pitchFamily="34" charset="0"/>
+                <a:cs typeface="Arial" pitchFamily="34" charset="0"/>
+              </a:rPr>
+              <a:t> runtime API with in-process callbacks (not file-rewrite-and-rerun, not FMU/BCVTB)</a:t>
+            </a:r>
+          </a:p>
+          <a:p>
+            <a:pPr marL="457200" indent="-457200">
+              <a:buFont typeface="Arial" panose="020B0604020202020204" pitchFamily="34" charset="0"/>
+              <a:buChar char="•"/>
+            </a:pPr>
+            <a:endParaRPr lang="en-US" sz="2000" dirty="0">
               <a:latin typeface="Arial" pitchFamily="34" charset="0"/>
               <a:cs typeface="Arial" pitchFamily="34" charset="0"/>
             </a:endParaRPr>
           </a:p>
           <a:p>
-            <a:pPr marL="342900" indent="-342900">
+            <a:pPr marL="457200" indent="-457200">
               <a:buFont typeface="Arial" panose="020B0604020202020204" pitchFamily="34" charset="0"/>
               <a:buChar char="•"/>
             </a:pPr>
-            <a:endParaRPr lang="en-US" sz="2000" u="sng" dirty="0">
-              <a:solidFill>
-                <a:schemeClr val="tx2"/>
-              </a:solidFill>
+            <a:r>
+              <a:rPr lang="en-US" sz="2000" b="1" dirty="0">
+                <a:latin typeface="Arial" pitchFamily="34" charset="0"/>
+                <a:cs typeface="Arial" pitchFamily="34" charset="0"/>
+              </a:rPr>
+              <a:t>gpt-oss-120b</a:t>
+            </a:r>
+            <a:r>
+              <a:rPr lang="en-US" sz="2000" dirty="0">
+                <a:latin typeface="Arial" pitchFamily="34" charset="0"/>
+                <a:cs typeface="Arial" pitchFamily="34" charset="0"/>
+              </a:rPr>
+              <a:t> (OpenAI open-weight), served OpenAI-compatible on </a:t>
+            </a:r>
+            <a:r>
+              <a:rPr lang="en-US" sz="2000" b="1" dirty="0" err="1">
+                <a:latin typeface="Arial" pitchFamily="34" charset="0"/>
+                <a:cs typeface="Arial" pitchFamily="34" charset="0"/>
+              </a:rPr>
+              <a:t>Cerebras+Groq</a:t>
+            </a:r>
+            <a:r>
+              <a:rPr lang="en-US" sz="2000" b="1" dirty="0">
+                <a:latin typeface="Arial" pitchFamily="34" charset="0"/>
+                <a:cs typeface="Arial" pitchFamily="34" charset="0"/>
+              </a:rPr>
+              <a:t>, round </a:t>
+            </a:r>
+            <a:r>
+              <a:rPr lang="en-US" sz="2000" b="1" dirty="0" err="1">
+                <a:latin typeface="Arial" pitchFamily="34" charset="0"/>
+                <a:cs typeface="Arial" pitchFamily="34" charset="0"/>
+              </a:rPr>
+              <a:t>robined</a:t>
+            </a:r>
+            <a:r>
+              <a:rPr lang="en-US" sz="2000" b="1" dirty="0">
+                <a:latin typeface="Arial" pitchFamily="34" charset="0"/>
+                <a:cs typeface="Arial" pitchFamily="34" charset="0"/>
+              </a:rPr>
+              <a:t> </a:t>
+            </a:r>
+            <a:r>
+              <a:rPr lang="en-US" sz="2000" dirty="0">
+                <a:latin typeface="Arial" pitchFamily="34" charset="0"/>
+                <a:cs typeface="Arial" pitchFamily="34" charset="0"/>
+              </a:rPr>
+              <a:t>per call; local </a:t>
+            </a:r>
+            <a:r>
+              <a:rPr lang="en-US" sz="2000" b="1" dirty="0" err="1">
+                <a:latin typeface="Arial" pitchFamily="34" charset="0"/>
+                <a:cs typeface="Arial" pitchFamily="34" charset="0"/>
+              </a:rPr>
+              <a:t>Ollama</a:t>
+            </a:r>
+            <a:r>
+              <a:rPr lang="en-US" sz="2000" dirty="0">
+                <a:latin typeface="Arial" pitchFamily="34" charset="0"/>
+                <a:cs typeface="Arial" pitchFamily="34" charset="0"/>
+              </a:rPr>
+              <a:t> documented as a fully offline option</a:t>
+            </a:r>
+          </a:p>
+          <a:p>
+            <a:pPr marL="457200" indent="-457200">
+              <a:buFont typeface="Arial" panose="020B0604020202020204" pitchFamily="34" charset="0"/>
+              <a:buChar char="•"/>
+            </a:pPr>
+            <a:endParaRPr lang="en-US" sz="2000" dirty="0">
               <a:latin typeface="Arial" pitchFamily="34" charset="0"/>
               <a:cs typeface="Arial" pitchFamily="34" charset="0"/>
             </a:endParaRPr>
           </a:p>
           <a:p>
-            <a:pPr marL="342900" indent="-342900">
+            <a:pPr marL="457200" indent="-457200">
               <a:buFont typeface="Arial" panose="020B0604020202020204" pitchFamily="34" charset="0"/>
               <a:buChar char="•"/>
             </a:pPr>
-            <a:endParaRPr lang="en-US" sz="2000" u="sng" dirty="0">
-              <a:solidFill>
-                <a:schemeClr val="tx2"/>
-              </a:solidFill>
+            <a:r>
+              <a:rPr lang="en-US" sz="2000" b="1" dirty="0" err="1">
+                <a:latin typeface="Arial" pitchFamily="34" charset="0"/>
+                <a:cs typeface="Arial" pitchFamily="34" charset="0"/>
+              </a:rPr>
+              <a:t>FastMCP</a:t>
+            </a:r>
+            <a:r>
+              <a:rPr lang="en-US" sz="2000" b="1" dirty="0">
+                <a:latin typeface="Arial" pitchFamily="34" charset="0"/>
+                <a:cs typeface="Arial" pitchFamily="34" charset="0"/>
+              </a:rPr>
+              <a:t>: </a:t>
+            </a:r>
+            <a:r>
+              <a:rPr lang="en-US" sz="2000" dirty="0">
+                <a:latin typeface="Arial" pitchFamily="34" charset="0"/>
+                <a:cs typeface="Arial" pitchFamily="34" charset="0"/>
+              </a:rPr>
+              <a:t>MCP server exposing the same 5 tools; </a:t>
+            </a:r>
+            <a:r>
+              <a:rPr lang="en-US" sz="2000" b="1" dirty="0" err="1">
+                <a:latin typeface="Arial" pitchFamily="34" charset="0"/>
+                <a:cs typeface="Arial" pitchFamily="34" charset="0"/>
+              </a:rPr>
+              <a:t>Pydantic</a:t>
+            </a:r>
+            <a:r>
+              <a:rPr lang="en-US" sz="2000" dirty="0">
+                <a:latin typeface="Arial" pitchFamily="34" charset="0"/>
+                <a:cs typeface="Arial" pitchFamily="34" charset="0"/>
+              </a:rPr>
+              <a:t> for strict-JSON decision validation; </a:t>
+            </a:r>
+            <a:r>
+              <a:rPr lang="en-US" sz="2000" b="1" dirty="0" err="1">
+                <a:latin typeface="Arial" pitchFamily="34" charset="0"/>
+                <a:cs typeface="Arial" pitchFamily="34" charset="0"/>
+              </a:rPr>
+              <a:t>Plotly</a:t>
+            </a:r>
+            <a:r>
+              <a:rPr lang="en-US" sz="2000" dirty="0">
+                <a:latin typeface="Arial" pitchFamily="34" charset="0"/>
+                <a:cs typeface="Arial" pitchFamily="34" charset="0"/>
+              </a:rPr>
+              <a:t> for the self-contained offline dashboard; </a:t>
+            </a:r>
+            <a:r>
+              <a:rPr lang="en-US" sz="2000" b="1" dirty="0">
+                <a:latin typeface="Arial" pitchFamily="34" charset="0"/>
+                <a:cs typeface="Arial" pitchFamily="34" charset="0"/>
+              </a:rPr>
+              <a:t>pandas/</a:t>
+            </a:r>
+            <a:r>
+              <a:rPr lang="en-US" sz="2000" b="1" dirty="0" err="1">
+                <a:latin typeface="Arial" pitchFamily="34" charset="0"/>
+                <a:cs typeface="Arial" pitchFamily="34" charset="0"/>
+              </a:rPr>
+              <a:t>numpy</a:t>
+            </a:r>
+            <a:r>
+              <a:rPr lang="en-US" sz="2000" b="1" dirty="0">
+                <a:latin typeface="Arial" pitchFamily="34" charset="0"/>
+                <a:cs typeface="Arial" pitchFamily="34" charset="0"/>
+              </a:rPr>
+              <a:t> </a:t>
+            </a:r>
+            <a:r>
+              <a:rPr lang="en-US" sz="2000" dirty="0">
+                <a:latin typeface="Arial" pitchFamily="34" charset="0"/>
+                <a:cs typeface="Arial" pitchFamily="34" charset="0"/>
+              </a:rPr>
+              <a:t>for metrics</a:t>
+            </a:r>
+          </a:p>
+          <a:p>
+            <a:pPr marL="457200" indent="-457200">
+              <a:buFont typeface="Arial" panose="020B0604020202020204" pitchFamily="34" charset="0"/>
+              <a:buChar char="•"/>
+            </a:pPr>
+            <a:endParaRPr lang="en-US" sz="2000" dirty="0">
               <a:latin typeface="Arial" pitchFamily="34" charset="0"/>
               <a:cs typeface="Arial" pitchFamily="34" charset="0"/>
             </a:endParaRPr>
           </a:p>
           <a:p>
-            <a:pPr marL="342900" indent="-342900" algn="just">
+            <a:pPr marL="457200" indent="-457200">
               <a:buFont typeface="Arial" panose="020B0604020202020204" pitchFamily="34" charset="0"/>
               <a:buChar char="•"/>
             </a:pPr>
             <a:r>
-              <a:rPr lang="en-US" sz="2800" dirty="0">
-                <a:latin typeface="Arial" pitchFamily="34" charset="0"/>
-                <a:cs typeface="Arial" pitchFamily="34" charset="0"/>
-              </a:rPr>
-              <a:t>An autonomous closed loop: EnergyPlus simulates the building, an open-weight LLM (gpt-oss-120b) reads live zone state every simulated hour, and a safety-clamped decision writes new HVAC setpoints straight back into the running simulation -- no human in the loop.</a:t>
-            </a:r>
-          </a:p>
-          <a:p>
-            <a:pPr marL="342900" indent="-342900" algn="just">
-              <a:buFont typeface="Arial" panose="020B0604020202020204" pitchFamily="34" charset="0"/>
-              <a:buChar char="•"/>
-            </a:pPr>
-            <a:r>
-              <a:rPr lang="en-US" sz="2800" dirty="0">
-                <a:latin typeface="Arial" pitchFamily="34" charset="0"/>
-                <a:cs typeface="Arial" pitchFamily="34" charset="0"/>
-              </a:rPr>
-              <a:t>Buildings waste energy because fixed schedules can't react to real occupancy, weather, or grid carbon intensity. Here the LLM reasons against forecast context (weather, carbon/tariff, occupancy ahead) and measurably cuts HVAC energy while holding comfort in band -- proven on a matched 7-day baseline-vs-agent run, not simulated on paper.</a:t>
-            </a:r>
-          </a:p>
-          <a:p>
-            <a:pPr marL="342900" indent="-342900" algn="just">
-              <a:buFont typeface="Arial" panose="020B0604020202020204" pitchFamily="34" charset="0"/>
-              <a:buChar char="•"/>
-            </a:pPr>
-            <a:r>
-              <a:rPr lang="en-US" sz="2800" dirty="0">
-                <a:latin typeface="Arial" pitchFamily="34" charset="0"/>
-                <a:cs typeface="Arial" pitchFamily="34" charset="0"/>
-              </a:rPr>
-              <a:t>A safety supervisor wraps the LLM: schema validation, hard clamps, a watchdog timeout, and a deterministic rule-based fallback mean the simulation cannot be killed by a bad, slow, or absent LLM response -- the LLM now also beats its own fallback on energy AND comfort at once.</a:t>
+              <a:rPr lang="en-US" sz="2000" dirty="0">
+                <a:latin typeface="Arial" pitchFamily="34" charset="0"/>
+                <a:cs typeface="Arial" pitchFamily="34" charset="0"/>
+              </a:rPr>
+              <a:t>Building model: shipped </a:t>
+            </a:r>
+            <a:r>
+              <a:rPr lang="en-US" sz="2000" b="1" dirty="0">
+                <a:latin typeface="Arial" pitchFamily="34" charset="0"/>
+                <a:cs typeface="Arial" pitchFamily="34" charset="0"/>
+              </a:rPr>
+              <a:t>5ZoneAirCooled.idf</a:t>
+            </a:r>
+            <a:r>
+              <a:rPr lang="en-US" sz="2000" dirty="0">
+                <a:latin typeface="Arial" pitchFamily="34" charset="0"/>
+                <a:cs typeface="Arial" pitchFamily="34" charset="0"/>
+              </a:rPr>
+              <a:t>, Chicago TMY3 weather, 15-21 July</a:t>
             </a:r>
           </a:p>
         </p:txBody>
@@ -5328,7 +5975,7 @@
           <a:lstStyle/>
           <a:p>
             <a:fld id="{677C3CE7-23F7-4828-823C-E0205DF2CF97}" type="slidenum">
-              <a:rPr lang="en-US" b="1" smtClean="0">
+              <a:rPr lang="en-US" b="1">
                 <a:solidFill>
                   <a:schemeClr val="bg1"/>
                 </a:solidFill>
@@ -5383,6 +6030,36 @@
           </a:p>
         </p:txBody>
       </p:sp>
+      <p:pic>
+        <p:nvPicPr>
+          <p:cNvPr id="11" name="Picture 10">
+            <a:extLst>
+              <a:ext uri="{FF2B5EF4-FFF2-40B4-BE49-F238E27FC236}">
+                <a16:creationId xmlns:a16="http://schemas.microsoft.com/office/drawing/2014/main" id="{DCA70006-A166-45C5-7872-469EEBC2E019}"/>
+              </a:ext>
+            </a:extLst>
+          </p:cNvPr>
+          <p:cNvPicPr>
+            <a:picLocks noChangeAspect="1"/>
+          </p:cNvPicPr>
+          <p:nvPr/>
+        </p:nvPicPr>
+        <p:blipFill>
+          <a:blip r:embed="rId3"/>
+          <a:stretch>
+            <a:fillRect/>
+          </a:stretch>
+        </p:blipFill>
+        <p:spPr>
+          <a:xfrm>
+            <a:off x="0" y="4217874"/>
+            <a:ext cx="12192000" cy="2324440"/>
+          </a:xfrm>
+          <a:prstGeom prst="rect">
+            <a:avLst/>
+          </a:prstGeom>
+        </p:spPr>
+      </p:pic>
     </p:spTree>
   </p:cSld>
   <p:clrMapOvr>
@@ -5418,7 +6095,12 @@
             <p:ph type="title"/>
           </p:nvPr>
         </p:nvSpPr>
-        <p:spPr/>
+        <p:spPr>
+          <a:xfrm>
+            <a:off x="609599" y="-230867"/>
+            <a:ext cx="10972800" cy="1143000"/>
+          </a:xfrm>
+        </p:spPr>
         <p:txBody>
           <a:bodyPr/>
           <a:lstStyle/>
@@ -5430,7 +6112,7 @@
                 <a:ea typeface="ＭＳ Ｐゴシック" pitchFamily="1" charset="-128"/>
                 <a:cs typeface="Times New Roman" panose="02020603050405020304" pitchFamily="18" charset="0"/>
               </a:rPr>
-              <a:t>TECHNICAL APPROACH</a:t>
+              <a:t>FEASIBILITY AND VIABILITY</a:t>
             </a:r>
           </a:p>
         </p:txBody>
@@ -5445,8 +6127,8 @@
         </p:nvSpPr>
         <p:spPr bwMode="auto">
           <a:xfrm>
-            <a:off x="609600" y="2533653"/>
-            <a:ext cx="9385300" cy="1815882"/>
+            <a:off x="1083128" y="633422"/>
+            <a:ext cx="10025743" cy="6247864"/>
           </a:xfrm>
           <a:prstGeom prst="rect">
             <a:avLst/>
@@ -5465,214 +6147,514 @@
           </a:bodyPr>
           <a:lstStyle/>
           <a:p>
-            <a:pPr marL="342900" indent="-342900" algn="just">
+            <a:pPr marL="342900" lvl="0" indent="-342900">
               <a:buFont typeface="Arial" panose="020B0604020202020204" pitchFamily="34" charset="0"/>
               <a:buChar char="•"/>
+              <a:defRPr/>
             </a:pPr>
             <a:r>
-              <a:rPr lang="en-US" sz="2800" dirty="0">
-                <a:latin typeface="Arial" pitchFamily="34" charset="0"/>
-                <a:cs typeface="Arial" pitchFamily="34" charset="0"/>
-              </a:rPr>
-              <a:t>Python 3.11, EnergyPlus 26.1 via the pyenergyplus runtime API (in-process callbacks, not file-based re-runs), gpt-oss-120b served OpenAI-compatible on Cerebras + Groq (round-robined), FastMCP for spec-compliant tool exposure, Plotly for the evidence dashboard.</a:t>
-            </a:r>
-          </a:p>
-          <a:p>
-            <a:pPr marL="342900" indent="-342900" algn="just">
+              <a:rPr lang="en-GB" sz="1600" b="1" dirty="0">
+                <a:solidFill>
+                  <a:prstClr val="black"/>
+                </a:solidFill>
+                <a:latin typeface="Arial" pitchFamily="34" charset="0"/>
+                <a:cs typeface="Arial" pitchFamily="34" charset="0"/>
+              </a:rPr>
+              <a:t>Feasibility: measured, not projected</a:t>
+            </a:r>
+          </a:p>
+          <a:p>
+            <a:pPr marL="800100" lvl="1" indent="-342900">
               <a:buFont typeface="Arial" panose="020B0604020202020204" pitchFamily="34" charset="0"/>
               <a:buChar char="•"/>
-            </a:pPr>
-            <a:r>
-              <a:rPr lang="en-US" sz="2800" dirty="0">
-                <a:latin typeface="Arial" pitchFamily="34" charset="0"/>
-                <a:cs typeface="Arial" pitchFamily="34" charset="0"/>
-              </a:rPr>
-              <a:t>EnergyPlus -&gt; tool layer (get_building_state / get_forecast_context / propose_setpoints / inject_setpoints / get_recent_errors, exposed both directly and over MCP) -&gt; LLM decides once per simulated hour -&gt; safety supervisor validates + clamps -&gt; actuator injects setpoints -&gt; loop closes. See docs/ARCHITECTURE.md for the full diagram and prompt strategy.</a:t>
-            </a:r>
-          </a:p>
-        </p:txBody>
-      </p:sp>
-      <p:sp>
-        <p:nvSpPr>
-          <p:cNvPr id="6" name="Slide Number Placeholder 5"/>
-          <p:cNvSpPr>
-            <a:spLocks noGrp="1"/>
-          </p:cNvSpPr>
-          <p:nvPr>
-            <p:ph type="sldNum" sz="quarter" idx="12"/>
-          </p:nvPr>
-        </p:nvSpPr>
-        <p:spPr/>
-        <p:txBody>
-          <a:bodyPr/>
-          <a:lstStyle/>
-          <a:p>
-            <a:fld id="{677C3CE7-23F7-4828-823C-E0205DF2CF97}" type="slidenum">
-              <a:rPr lang="en-US" b="1">
-                <a:solidFill>
-                  <a:schemeClr val="bg1"/>
-                </a:solidFill>
-              </a:rPr>
-              <a:pPr/>
-              <a:t>4</a:t>
-            </a:fld>
-            <a:endParaRPr lang="en-US" b="1" dirty="0">
-              <a:solidFill>
-                <a:schemeClr val="bg1"/>
-              </a:solidFill>
-            </a:endParaRPr>
-          </a:p>
-        </p:txBody>
-      </p:sp>
-      <p:sp>
-        <p:nvSpPr>
-          <p:cNvPr id="7" name="Footer Placeholder 6"/>
-          <p:cNvSpPr>
-            <a:spLocks noGrp="1"/>
-          </p:cNvSpPr>
-          <p:nvPr>
-            <p:ph type="ftr" sz="quarter" idx="11"/>
-          </p:nvPr>
-        </p:nvSpPr>
-        <p:spPr>
-          <a:xfrm>
-            <a:off x="4648200" y="6356353"/>
-            <a:ext cx="3204000" cy="365125"/>
-          </a:xfrm>
-        </p:spPr>
-        <p:txBody>
-          <a:bodyPr/>
-          <a:lstStyle/>
-          <a:p>
-            <a:pPr>
               <a:defRPr/>
             </a:pPr>
             <a:r>
-              <a:rPr lang="en-US">
-                <a:solidFill>
-                  <a:schemeClr val="bg1"/>
-                </a:solidFill>
-              </a:rPr>
-              <a:t>@SIH Idea submission- Template</a:t>
-            </a:r>
-            <a:endParaRPr lang="en-US" dirty="0">
-              <a:solidFill>
-                <a:schemeClr val="bg1"/>
-              </a:solidFill>
-            </a:endParaRPr>
-          </a:p>
-        </p:txBody>
-      </p:sp>
-    </p:spTree>
-  </p:cSld>
-  <p:clrMapOvr>
-    <a:masterClrMapping/>
-  </p:clrMapOvr>
-</p:sld>
-</file>
-
-<file path=ppt/slides/slide5.xml><?xml version="1.0" encoding="utf-8"?>
-<p:sld xmlns:a="http://schemas.openxmlformats.org/drawingml/2006/main" xmlns:r="http://schemas.openxmlformats.org/officeDocument/2006/relationships" xmlns:p="http://schemas.openxmlformats.org/presentationml/2006/main">
-  <p:cSld>
-    <p:spTree>
-      <p:nvGrpSpPr>
-        <p:cNvPr id="1" name=""/>
-        <p:cNvGrpSpPr/>
-        <p:nvPr/>
-      </p:nvGrpSpPr>
-      <p:grpSpPr>
-        <a:xfrm>
-          <a:off x="0" y="0"/>
-          <a:ext cx="0" cy="0"/>
-          <a:chOff x="0" y="0"/>
-          <a:chExt cx="0" cy="0"/>
-        </a:xfrm>
-      </p:grpSpPr>
-      <p:sp>
-        <p:nvSpPr>
-          <p:cNvPr id="17409" name="Title 1"/>
-          <p:cNvSpPr>
-            <a:spLocks noGrp="1"/>
-          </p:cNvSpPr>
-          <p:nvPr>
-            <p:ph type="title"/>
-          </p:nvPr>
-        </p:nvSpPr>
-        <p:spPr/>
-        <p:txBody>
-          <a:bodyPr/>
-          <a:lstStyle/>
-          <a:p>
-            <a:pPr eaLnBrk="1" hangingPunct="1"/>
-            <a:r>
-              <a:rPr lang="en-US" sz="3600" b="1" dirty="0">
-                <a:latin typeface="Times New Roman" panose="02020603050405020304" pitchFamily="18" charset="0"/>
-                <a:ea typeface="ＭＳ Ｐゴシック" pitchFamily="1" charset="-128"/>
-                <a:cs typeface="Times New Roman" panose="02020603050405020304" pitchFamily="18" charset="0"/>
-              </a:rPr>
-              <a:t>FEASIBILITY AND VIABILITY</a:t>
-            </a:r>
-          </a:p>
-        </p:txBody>
-      </p:sp>
-      <p:sp>
-        <p:nvSpPr>
-          <p:cNvPr id="17410" name="TextBox 8"/>
-          <p:cNvSpPr txBox="1">
-            <a:spLocks noChangeArrowheads="1"/>
-          </p:cNvSpPr>
-          <p:nvPr/>
-        </p:nvSpPr>
-        <p:spPr bwMode="auto">
-          <a:xfrm>
-            <a:off x="609600" y="2533653"/>
-            <a:ext cx="9385300" cy="1384995"/>
-          </a:xfrm>
-          <a:prstGeom prst="rect">
-            <a:avLst/>
-          </a:prstGeom>
-          <a:noFill/>
-          <a:ln w="9525">
-            <a:noFill/>
-            <a:miter lim="800000"/>
-            <a:headEnd/>
-            <a:tailEnd/>
-          </a:ln>
-        </p:spPr>
-        <p:txBody>
-          <a:bodyPr wrap="square">
-            <a:spAutoFit/>
-          </a:bodyPr>
-          <a:lstStyle/>
-          <a:p>
-            <a:pPr marL="342900" marR="0" lvl="0" indent="-342900" algn="just" defTabSz="457200" rtl="0" eaLnBrk="1" fontAlgn="base" latinLnBrk="0" hangingPunct="1">
-              <a:lnSpc>
-                <a:spcPct val="100000"/>
-              </a:lnSpc>
-              <a:spcBef>
-                <a:spcPct val="0"/>
-              </a:spcBef>
-              <a:spcAft>
-                <a:spcPct val="0"/>
-              </a:spcAft>
-              <a:buClrTx/>
-              <a:buSzTx/>
+              <a:rPr lang="en-GB" sz="1600" dirty="0">
+                <a:solidFill>
+                  <a:prstClr val="black"/>
+                </a:solidFill>
+                <a:latin typeface="Arial" pitchFamily="34" charset="0"/>
+                <a:cs typeface="Arial" pitchFamily="34" charset="0"/>
+              </a:rPr>
+              <a:t>Runs today on free-tier infrastructure. </a:t>
+            </a:r>
+            <a:r>
+              <a:rPr lang="en-GB" sz="1600" b="1" dirty="0">
+                <a:solidFill>
+                  <a:prstClr val="black"/>
+                </a:solidFill>
+                <a:latin typeface="Arial" pitchFamily="34" charset="0"/>
+                <a:cs typeface="Arial" pitchFamily="34" charset="0"/>
+              </a:rPr>
+              <a:t>168/168 hourly decisions injected, 0 controller errors</a:t>
+            </a:r>
+            <a:r>
+              <a:rPr lang="en-GB" sz="1600" dirty="0">
+                <a:solidFill>
+                  <a:prstClr val="black"/>
+                </a:solidFill>
+                <a:latin typeface="Arial" pitchFamily="34" charset="0"/>
+                <a:cs typeface="Arial" pitchFamily="34" charset="0"/>
+              </a:rPr>
+              <a:t>, 165/168 genuine LLM calls, latency </a:t>
+            </a:r>
+            <a:r>
+              <a:rPr lang="en-GB" sz="1600" b="1" dirty="0">
+                <a:solidFill>
+                  <a:prstClr val="black"/>
+                </a:solidFill>
+                <a:latin typeface="Arial" pitchFamily="34" charset="0"/>
+                <a:cs typeface="Arial" pitchFamily="34" charset="0"/>
+              </a:rPr>
+              <a:t>p50 816ms / p95 2120ms </a:t>
+            </a:r>
+            <a:r>
+              <a:rPr lang="en-GB" sz="1600" dirty="0">
+                <a:solidFill>
+                  <a:prstClr val="black"/>
+                </a:solidFill>
+                <a:latin typeface="Arial" pitchFamily="34" charset="0"/>
+                <a:cs typeface="Arial" pitchFamily="34" charset="0"/>
+              </a:rPr>
+              <a:t>against a 15s watchdog ~7x headroom.</a:t>
+            </a:r>
+          </a:p>
+          <a:p>
+            <a:pPr marL="800100" lvl="1" indent="-342900">
               <a:buFont typeface="Arial" panose="020B0604020202020204" pitchFamily="34" charset="0"/>
               <a:buChar char="•"/>
-              <a:tabLst/>
               <a:defRPr/>
             </a:pPr>
             <a:r>
-              <a:rPr lang="en-US" sz="2800" dirty="0">
+              <a:rPr lang="en-GB" sz="1600" b="1" dirty="0">
                 <a:solidFill>
                   <a:prstClr val="black"/>
                 </a:solidFill>
                 <a:latin typeface="Arial" pitchFamily="34" charset="0"/>
                 <a:cs typeface="Arial" pitchFamily="34" charset="0"/>
               </a:rPr>
-              <a:t>Measured, not projected, on a matched 7-simulated-day run: +8.8% total electricity, +23.3% HVAC-only electricity, comfort-in-band +12.4 pts vs baseline -- savings aren't taken out of occupant comfort.</a:t>
-            </a:r>
-            <a:endParaRPr kumimoji="0" lang="en-US" sz="2800" b="0" i="0" u="none" strike="noStrike" kern="1200" cap="none" spc="0" normalizeH="0" baseline="0" noProof="0" dirty="0">
+              <a:t>Reliability soak: 14 simulated days (2x the required horizon), 336/336 decisions, zero crashes</a:t>
+            </a:r>
+            <a:r>
+              <a:rPr lang="en-GB" sz="1600" dirty="0">
+                <a:solidFill>
+                  <a:prstClr val="black"/>
+                </a:solidFill>
+                <a:latin typeface="Arial" pitchFamily="34" charset="0"/>
+                <a:cs typeface="Arial" pitchFamily="34" charset="0"/>
+              </a:rPr>
+              <a:t>. </a:t>
+            </a:r>
+          </a:p>
+          <a:p>
+            <a:pPr marL="800100" lvl="1" indent="-342900">
+              <a:buFont typeface="Arial" panose="020B0604020202020204" pitchFamily="34" charset="0"/>
+              <a:buChar char="•"/>
+              <a:defRPr/>
+            </a:pPr>
+            <a:r>
+              <a:rPr lang="en-GB" sz="1600" dirty="0">
+                <a:solidFill>
+                  <a:prstClr val="black"/>
+                </a:solidFill>
+                <a:latin typeface="Arial" pitchFamily="34" charset="0"/>
+                <a:cs typeface="Arial" pitchFamily="34" charset="0"/>
+              </a:rPr>
+              <a:t>Energy figures come from </a:t>
+            </a:r>
+            <a:r>
+              <a:rPr lang="en-GB" sz="1600" b="1" dirty="0" err="1">
+                <a:solidFill>
+                  <a:prstClr val="black"/>
+                </a:solidFill>
+                <a:latin typeface="Arial" pitchFamily="34" charset="0"/>
+                <a:cs typeface="Arial" pitchFamily="34" charset="0"/>
+              </a:rPr>
+              <a:t>EnergyPlus's</a:t>
+            </a:r>
+            <a:r>
+              <a:rPr lang="en-GB" sz="1600" b="1" dirty="0">
+                <a:solidFill>
+                  <a:prstClr val="black"/>
+                </a:solidFill>
+                <a:latin typeface="Arial" pitchFamily="34" charset="0"/>
+                <a:cs typeface="Arial" pitchFamily="34" charset="0"/>
+              </a:rPr>
+              <a:t> own meter file </a:t>
+            </a:r>
+            <a:r>
+              <a:rPr lang="en-GB" sz="1600" dirty="0">
+                <a:solidFill>
+                  <a:prstClr val="black"/>
+                </a:solidFill>
+                <a:latin typeface="Arial" pitchFamily="34" charset="0"/>
+                <a:cs typeface="Arial" pitchFamily="34" charset="0"/>
+              </a:rPr>
+              <a:t>(eplusmtr.csv), not self-reported totals, so the headline can't be doubted.</a:t>
+            </a:r>
+            <a:endParaRPr lang="en-GB" sz="1200" dirty="0">
+              <a:solidFill>
+                <a:prstClr val="black"/>
+              </a:solidFill>
+              <a:latin typeface="Arial" pitchFamily="34" charset="0"/>
+              <a:cs typeface="Arial" pitchFamily="34" charset="0"/>
+            </a:endParaRPr>
+          </a:p>
+          <a:p>
+            <a:pPr marL="342900" lvl="0" indent="-342900">
+              <a:buFont typeface="Arial" panose="020B0604020202020204" pitchFamily="34" charset="0"/>
+              <a:buChar char="•"/>
+              <a:defRPr/>
+            </a:pPr>
+            <a:r>
+              <a:rPr lang="en-GB" sz="1600" b="1" dirty="0">
+                <a:solidFill>
+                  <a:prstClr val="black"/>
+                </a:solidFill>
+                <a:latin typeface="Arial" pitchFamily="34" charset="0"/>
+                <a:cs typeface="Arial" pitchFamily="34" charset="0"/>
+              </a:rPr>
+              <a:t>Challenges and risks:</a:t>
+            </a:r>
+          </a:p>
+          <a:p>
+            <a:pPr marL="800100" lvl="1" indent="-342900">
+              <a:buFont typeface="Arial" panose="020B0604020202020204" pitchFamily="34" charset="0"/>
+              <a:buChar char="•"/>
+              <a:defRPr/>
+            </a:pPr>
+            <a:r>
+              <a:rPr lang="en-GB" sz="1600" b="1" dirty="0">
+                <a:solidFill>
+                  <a:prstClr val="black"/>
+                </a:solidFill>
+                <a:latin typeface="Arial" pitchFamily="34" charset="0"/>
+                <a:cs typeface="Arial" pitchFamily="34" charset="0"/>
+              </a:rPr>
+              <a:t>~62% of facility electricity is lighting/plug load </a:t>
+            </a:r>
+            <a:r>
+              <a:rPr lang="en-GB" sz="1600" dirty="0">
+                <a:solidFill>
+                  <a:prstClr val="black"/>
+                </a:solidFill>
+                <a:latin typeface="Arial" pitchFamily="34" charset="0"/>
+                <a:cs typeface="Arial" pitchFamily="34" charset="0"/>
+              </a:rPr>
+              <a:t>no</a:t>
+            </a:r>
+            <a:r>
+              <a:rPr lang="en-GB" sz="1600" b="1" dirty="0">
+                <a:solidFill>
+                  <a:prstClr val="black"/>
+                </a:solidFill>
+                <a:latin typeface="Arial" pitchFamily="34" charset="0"/>
+                <a:cs typeface="Arial" pitchFamily="34" charset="0"/>
+              </a:rPr>
+              <a:t> </a:t>
+            </a:r>
+            <a:r>
+              <a:rPr lang="en-GB" sz="1600" dirty="0">
+                <a:solidFill>
+                  <a:prstClr val="black"/>
+                </a:solidFill>
+                <a:latin typeface="Arial" pitchFamily="34" charset="0"/>
+                <a:cs typeface="Arial" pitchFamily="34" charset="0"/>
+              </a:rPr>
+              <a:t>setpoint can touch which caps the achievable total-kWh%</a:t>
+            </a:r>
+          </a:p>
+          <a:p>
+            <a:pPr marL="800100" lvl="1" indent="-342900">
+              <a:buFont typeface="Arial" panose="020B0604020202020204" pitchFamily="34" charset="0"/>
+              <a:buChar char="•"/>
+              <a:defRPr/>
+            </a:pPr>
+            <a:r>
+              <a:rPr lang="en-GB" sz="1600" dirty="0">
+                <a:solidFill>
+                  <a:prstClr val="black"/>
+                </a:solidFill>
+                <a:latin typeface="Arial" pitchFamily="34" charset="0"/>
+                <a:cs typeface="Arial" pitchFamily="34" charset="0"/>
+              </a:rPr>
+              <a:t>Free-tier LLM rate limits: an early run had only 43% genuine LLM participation</a:t>
+            </a:r>
+          </a:p>
+          <a:p>
+            <a:pPr marL="800100" lvl="1" indent="-342900">
+              <a:buFont typeface="Arial" panose="020B0604020202020204" pitchFamily="34" charset="0"/>
+              <a:buChar char="•"/>
+              <a:defRPr/>
+            </a:pPr>
+            <a:r>
+              <a:rPr lang="en-GB" sz="1600" dirty="0">
+                <a:solidFill>
+                  <a:prstClr val="black"/>
+                </a:solidFill>
+                <a:latin typeface="Arial" pitchFamily="34" charset="0"/>
+                <a:cs typeface="Arial" pitchFamily="34" charset="0"/>
+              </a:rPr>
+              <a:t>LLM could return invalid, slow, or no output mid-run</a:t>
+            </a:r>
+          </a:p>
+          <a:p>
+            <a:pPr marL="800100" lvl="1" indent="-342900">
+              <a:buFont typeface="Arial" panose="020B0604020202020204" pitchFamily="34" charset="0"/>
+              <a:buChar char="•"/>
+              <a:defRPr/>
+            </a:pPr>
+            <a:r>
+              <a:rPr lang="en-GB" sz="1600" dirty="0">
+                <a:solidFill>
+                  <a:prstClr val="black"/>
+                </a:solidFill>
+                <a:latin typeface="Arial" pitchFamily="34" charset="0"/>
+                <a:cs typeface="Arial" pitchFamily="34" charset="0"/>
+              </a:rPr>
+              <a:t>Naive energy accounting silently over-counted by 16.5%</a:t>
+            </a:r>
+            <a:endParaRPr lang="en-GB" sz="1200" dirty="0">
+              <a:solidFill>
+                <a:prstClr val="black"/>
+              </a:solidFill>
+              <a:latin typeface="Arial" pitchFamily="34" charset="0"/>
+              <a:cs typeface="Arial" pitchFamily="34" charset="0"/>
+            </a:endParaRPr>
+          </a:p>
+          <a:p>
+            <a:pPr marL="342900" lvl="0" indent="-342900">
+              <a:buFont typeface="Arial" panose="020B0604020202020204" pitchFamily="34" charset="0"/>
+              <a:buChar char="•"/>
+              <a:defRPr/>
+            </a:pPr>
+            <a:r>
+              <a:rPr lang="en-GB" sz="1600" b="1" dirty="0">
+                <a:solidFill>
+                  <a:prstClr val="black"/>
+                </a:solidFill>
+                <a:latin typeface="Arial" pitchFamily="34" charset="0"/>
+                <a:cs typeface="Arial" pitchFamily="34" charset="0"/>
+              </a:rPr>
+              <a:t>Strategies that resolved each:</a:t>
+            </a:r>
+          </a:p>
+          <a:p>
+            <a:pPr marL="800100" lvl="1" indent="-342900">
+              <a:buFont typeface="Arial" panose="020B0604020202020204" pitchFamily="34" charset="0"/>
+              <a:buChar char="•"/>
+              <a:defRPr/>
+            </a:pPr>
+            <a:r>
+              <a:rPr lang="en-GB" sz="1600" dirty="0">
+                <a:solidFill>
+                  <a:prstClr val="black"/>
+                </a:solidFill>
+                <a:latin typeface="Arial" pitchFamily="34" charset="0"/>
+                <a:cs typeface="Arial" pitchFamily="34" charset="0"/>
+              </a:rPr>
+              <a:t>Report </a:t>
+            </a:r>
+            <a:r>
+              <a:rPr lang="en-GB" sz="1600" b="1" dirty="0">
+                <a:solidFill>
+                  <a:prstClr val="black"/>
+                </a:solidFill>
+                <a:latin typeface="Arial" pitchFamily="34" charset="0"/>
+                <a:cs typeface="Arial" pitchFamily="34" charset="0"/>
+              </a:rPr>
+              <a:t>HVAC-only % as the honest headline </a:t>
+            </a:r>
+            <a:r>
+              <a:rPr lang="en-GB" sz="1600" dirty="0">
+                <a:solidFill>
+                  <a:prstClr val="black"/>
+                </a:solidFill>
+                <a:latin typeface="Arial" pitchFamily="34" charset="0"/>
+                <a:cs typeface="Arial" pitchFamily="34" charset="0"/>
+              </a:rPr>
+              <a:t>alongside total- state the ceiling rather than hide it</a:t>
+            </a:r>
+          </a:p>
+          <a:p>
+            <a:pPr marL="800100" lvl="1" indent="-342900">
+              <a:buFont typeface="Arial" panose="020B0604020202020204" pitchFamily="34" charset="0"/>
+              <a:buChar char="•"/>
+              <a:defRPr/>
+            </a:pPr>
+            <a:r>
+              <a:rPr lang="en-GB" sz="1600" dirty="0">
+                <a:solidFill>
+                  <a:prstClr val="black"/>
+                </a:solidFill>
+                <a:latin typeface="Arial" pitchFamily="34" charset="0"/>
+                <a:cs typeface="Arial" pitchFamily="34" charset="0"/>
+              </a:rPr>
+              <a:t>Measured the actual binding limit per provider (they invert: </a:t>
+            </a:r>
+            <a:r>
+              <a:rPr lang="en-GB" sz="1600" dirty="0" err="1">
+                <a:solidFill>
+                  <a:prstClr val="black"/>
+                </a:solidFill>
+                <a:latin typeface="Arial" pitchFamily="34" charset="0"/>
+                <a:cs typeface="Arial" pitchFamily="34" charset="0"/>
+              </a:rPr>
+              <a:t>Groq</a:t>
+            </a:r>
+            <a:r>
+              <a:rPr lang="en-GB" sz="1600" dirty="0">
+                <a:solidFill>
+                  <a:prstClr val="black"/>
+                </a:solidFill>
+                <a:latin typeface="Arial" pitchFamily="34" charset="0"/>
+                <a:cs typeface="Arial" pitchFamily="34" charset="0"/>
+              </a:rPr>
+              <a:t> token-bound, Cerebras request-bound) -&gt; per-provider throttles + round-robin took participation </a:t>
+            </a:r>
+            <a:r>
+              <a:rPr lang="en-GB" sz="1600" b="1" dirty="0">
+                <a:solidFill>
+                  <a:prstClr val="black"/>
+                </a:solidFill>
+                <a:latin typeface="Arial" pitchFamily="34" charset="0"/>
+                <a:cs typeface="Arial" pitchFamily="34" charset="0"/>
+              </a:rPr>
+              <a:t>43% -&gt; 98%.</a:t>
+            </a:r>
+          </a:p>
+          <a:p>
+            <a:pPr marL="800100" lvl="1" indent="-342900">
+              <a:buFont typeface="Arial" panose="020B0604020202020204" pitchFamily="34" charset="0"/>
+              <a:buChar char="•"/>
+              <a:defRPr/>
+            </a:pPr>
+            <a:r>
+              <a:rPr lang="en-GB" sz="1600" dirty="0">
+                <a:solidFill>
+                  <a:prstClr val="black"/>
+                </a:solidFill>
+                <a:latin typeface="Arial" pitchFamily="34" charset="0"/>
+                <a:cs typeface="Arial" pitchFamily="34" charset="0"/>
+              </a:rPr>
+              <a:t>The safety supervisor: clamp + watchdog + deterministic fallback. A </a:t>
+            </a:r>
+            <a:r>
+              <a:rPr lang="en-GB" sz="1600" b="1" dirty="0">
+                <a:solidFill>
+                  <a:prstClr val="black"/>
+                </a:solidFill>
+                <a:latin typeface="Arial" pitchFamily="34" charset="0"/>
+                <a:cs typeface="Arial" pitchFamily="34" charset="0"/>
+              </a:rPr>
+              <a:t>100%-fallback run </a:t>
+            </a:r>
+            <a:r>
+              <a:rPr lang="en-GB" sz="1600" dirty="0">
+                <a:solidFill>
+                  <a:prstClr val="black"/>
+                </a:solidFill>
+                <a:latin typeface="Arial" pitchFamily="34" charset="0"/>
+                <a:cs typeface="Arial" pitchFamily="34" charset="0"/>
+              </a:rPr>
+              <a:t>is shipped as proof the loop survives a total LLM outage</a:t>
+            </a:r>
+          </a:p>
+          <a:p>
+            <a:pPr marL="800100" lvl="1" indent="-342900">
+              <a:buFont typeface="Arial" panose="020B0604020202020204" pitchFamily="34" charset="0"/>
+              <a:buChar char="•"/>
+              <a:defRPr/>
+            </a:pPr>
+            <a:r>
+              <a:rPr lang="en-GB" sz="1600" dirty="0">
+                <a:solidFill>
+                  <a:prstClr val="black"/>
+                </a:solidFill>
+                <a:latin typeface="Arial" pitchFamily="34" charset="0"/>
+                <a:cs typeface="Arial" pitchFamily="34" charset="0"/>
+              </a:rPr>
+              <a:t>Caught it by reconciling against E+'s own meters; the smoke test now asserts </a:t>
+            </a:r>
+            <a:r>
+              <a:rPr lang="en-GB" sz="1600" b="1" dirty="0">
+                <a:solidFill>
+                  <a:prstClr val="black"/>
+                </a:solidFill>
+                <a:latin typeface="Arial" pitchFamily="34" charset="0"/>
+                <a:cs typeface="Arial" pitchFamily="34" charset="0"/>
+              </a:rPr>
+              <a:t>agreement within 0.5%</a:t>
+            </a:r>
+            <a:r>
+              <a:rPr lang="en-GB" sz="1600" dirty="0">
+                <a:solidFill>
+                  <a:prstClr val="black"/>
+                </a:solidFill>
+                <a:latin typeface="Arial" pitchFamily="34" charset="0"/>
+                <a:cs typeface="Arial" pitchFamily="34" charset="0"/>
+              </a:rPr>
+              <a:t> as a permanent regression guard (reconciles to 0.00%)</a:t>
+            </a:r>
+          </a:p>
+          <a:p>
+            <a:pPr marL="800100" lvl="1" indent="-342900">
+              <a:buFont typeface="Arial" panose="020B0604020202020204" pitchFamily="34" charset="0"/>
+              <a:buChar char="•"/>
+              <a:defRPr/>
+            </a:pPr>
+            <a:r>
+              <a:rPr lang="en-GB" sz="1600" dirty="0">
+                <a:solidFill>
+                  <a:prstClr val="black"/>
+                </a:solidFill>
+                <a:latin typeface="Arial" pitchFamily="34" charset="0"/>
+                <a:cs typeface="Arial" pitchFamily="34" charset="0"/>
+              </a:rPr>
+              <a:t>Method, not luck: </a:t>
+            </a:r>
+            <a:r>
+              <a:rPr lang="en-GB" sz="1600" b="1" dirty="0">
+                <a:solidFill>
+                  <a:prstClr val="black"/>
+                </a:solidFill>
+                <a:latin typeface="Arial" pitchFamily="34" charset="0"/>
+                <a:cs typeface="Arial" pitchFamily="34" charset="0"/>
+              </a:rPr>
+              <a:t>Two optimizations (CO₂-gated fan-off, optimal-start pre-heat) </a:t>
+            </a:r>
+            <a:r>
+              <a:rPr lang="en-GB" sz="1600" dirty="0">
+                <a:solidFill>
+                  <a:prstClr val="black"/>
+                </a:solidFill>
+                <a:latin typeface="Arial" pitchFamily="34" charset="0"/>
+                <a:cs typeface="Arial" pitchFamily="34" charset="0"/>
+              </a:rPr>
+              <a:t>were built, measured, and reverted when the data showed </a:t>
+            </a:r>
+            <a:r>
+              <a:rPr lang="en-GB" sz="1600" b="1" dirty="0">
+                <a:solidFill>
+                  <a:prstClr val="black"/>
+                </a:solidFill>
+                <a:latin typeface="Arial" pitchFamily="34" charset="0"/>
+                <a:cs typeface="Arial" pitchFamily="34" charset="0"/>
+              </a:rPr>
+              <a:t>no net benefit</a:t>
+            </a:r>
+            <a:r>
+              <a:rPr lang="en-GB" sz="1600" dirty="0">
+                <a:solidFill>
+                  <a:prstClr val="black"/>
+                </a:solidFill>
+                <a:latin typeface="Arial" pitchFamily="34" charset="0"/>
+                <a:cs typeface="Arial" pitchFamily="34" charset="0"/>
+              </a:rPr>
+              <a:t>- negative results documented, not buried.</a:t>
+            </a:r>
+            <a:endParaRPr kumimoji="0" lang="en-US" sz="1600" b="0" i="0" u="none" strike="noStrike" kern="1200" cap="none" spc="0" normalizeH="0" baseline="0" noProof="0" dirty="0">
               <a:ln>
                 <a:noFill/>
               </a:ln>
@@ -5687,8 +6669,24 @@
               <a:cs typeface="Arial" pitchFamily="34" charset="0"/>
             </a:endParaRPr>
           </a:p>
-          <a:p>
-            <a:pPr marL="342900" marR="0" lvl="0" indent="-342900" algn="just" defTabSz="457200" rtl="0" eaLnBrk="1" fontAlgn="base" latinLnBrk="0" hangingPunct="1">
+        </p:txBody>
+      </p:sp>
+      <p:sp>
+        <p:nvSpPr>
+          <p:cNvPr id="6" name="Slide Number Placeholder 5"/>
+          <p:cNvSpPr>
+            <a:spLocks noGrp="1"/>
+          </p:cNvSpPr>
+          <p:nvPr>
+            <p:ph type="sldNum" sz="quarter" idx="12"/>
+          </p:nvPr>
+        </p:nvSpPr>
+        <p:spPr/>
+        <p:txBody>
+          <a:bodyPr/>
+          <a:lstStyle/>
+          <a:p>
+            <a:pPr marL="0" marR="0" lvl="0" indent="0" algn="r" defTabSz="457200" rtl="0" eaLnBrk="1" fontAlgn="base" latinLnBrk="0" hangingPunct="1">
               <a:lnSpc>
                 <a:spcPct val="100000"/>
               </a:lnSpc>
@@ -5700,58 +6698,483 @@
               </a:spcAft>
               <a:buClrTx/>
               <a:buSzTx/>
-              <a:buFont typeface="Arial" panose="020B0604020202020204" pitchFamily="34" charset="0"/>
-              <a:buChar char="•"/>
+              <a:buFontTx/>
+              <a:buNone/>
               <a:tabLst/>
               <a:defRPr/>
             </a:pPr>
-            <a:r>
-              <a:rPr lang="en-US" sz="2800" dirty="0">
-                <a:solidFill>
-                  <a:prstClr val="black"/>
-                </a:solidFill>
-                <a:latin typeface="Arial" pitchFamily="34" charset="0"/>
-                <a:cs typeface="Arial" pitchFamily="34" charset="0"/>
-              </a:rPr>
-              <a:t>~62% of facility electricity is lighting/plug load no setpoint can touch (HVAC-only % is the honest headline); free-tier LLM provider rate limits; the risk of the LLM ever returning invalid or absent output.</a:t>
-            </a:r>
-          </a:p>
-          <a:p>
-            <a:pPr marL="342900" marR="0" lvl="0" indent="-342900" algn="just" defTabSz="457200" rtl="0" eaLnBrk="1" fontAlgn="base" latinLnBrk="0" hangingPunct="1">
+            <a:fld id="{677C3CE7-23F7-4828-823C-E0205DF2CF97}" type="slidenum">
+              <a:rPr kumimoji="0" lang="en-US" sz="1200" b="1" i="0" u="none" strike="noStrike" kern="1200" cap="none" spc="0" normalizeH="0" baseline="0" noProof="0">
+                <a:ln>
+                  <a:noFill/>
+                </a:ln>
+                <a:solidFill>
+                  <a:prstClr val="white"/>
+                </a:solidFill>
+                <a:effectLst/>
+                <a:uLnTx/>
+                <a:uFillTx/>
+                <a:latin typeface="TradeGothic" pitchFamily="1" charset="0"/>
+                <a:ea typeface="ＭＳ Ｐゴシック" pitchFamily="1" charset="-128"/>
+                <a:cs typeface="+mn-cs"/>
+              </a:rPr>
+              <a:pPr marL="0" marR="0" lvl="0" indent="0" algn="r" defTabSz="457200" rtl="0" eaLnBrk="1" fontAlgn="base" latinLnBrk="0" hangingPunct="1">
+                <a:lnSpc>
+                  <a:spcPct val="100000"/>
+                </a:lnSpc>
+                <a:spcBef>
+                  <a:spcPct val="0"/>
+                </a:spcBef>
+                <a:spcAft>
+                  <a:spcPct val="0"/>
+                </a:spcAft>
+                <a:buClrTx/>
+                <a:buSzTx/>
+                <a:buFontTx/>
+                <a:buNone/>
+                <a:tabLst/>
+                <a:defRPr/>
+              </a:pPr>
+              <a:t>4</a:t>
+            </a:fld>
+            <a:endParaRPr kumimoji="0" lang="en-US" sz="1200" b="1" i="0" u="none" strike="noStrike" kern="1200" cap="none" spc="0" normalizeH="0" baseline="0" noProof="0" dirty="0">
+              <a:ln>
+                <a:noFill/>
+              </a:ln>
+              <a:solidFill>
+                <a:prstClr val="white"/>
+              </a:solidFill>
+              <a:effectLst/>
+              <a:uLnTx/>
+              <a:uFillTx/>
+              <a:latin typeface="TradeGothic" pitchFamily="1" charset="0"/>
+              <a:ea typeface="ＭＳ Ｐゴシック" pitchFamily="1" charset="-128"/>
+              <a:cs typeface="+mn-cs"/>
+            </a:endParaRPr>
+          </a:p>
+        </p:txBody>
+      </p:sp>
+      <p:sp>
+        <p:nvSpPr>
+          <p:cNvPr id="7" name="Footer Placeholder 6"/>
+          <p:cNvSpPr>
+            <a:spLocks noGrp="1"/>
+          </p:cNvSpPr>
+          <p:nvPr>
+            <p:ph type="ftr" sz="quarter" idx="11"/>
+          </p:nvPr>
+        </p:nvSpPr>
+        <p:spPr>
+          <a:xfrm>
+            <a:off x="4669367" y="6412441"/>
+            <a:ext cx="3204000" cy="365125"/>
+          </a:xfrm>
+        </p:spPr>
+        <p:txBody>
+          <a:bodyPr/>
+          <a:lstStyle/>
+          <a:p>
+            <a:pPr marL="0" marR="0" lvl="0" indent="0" algn="ctr" defTabSz="457200" rtl="0" eaLnBrk="1" fontAlgn="auto" latinLnBrk="0" hangingPunct="1">
               <a:lnSpc>
                 <a:spcPct val="100000"/>
               </a:lnSpc>
               <a:spcBef>
-                <a:spcPct val="0"/>
+                <a:spcPts val="0"/>
               </a:spcBef>
               <a:spcAft>
-                <a:spcPct val="0"/>
+                <a:spcPts val="0"/>
               </a:spcAft>
               <a:buClrTx/>
               <a:buSzTx/>
-              <a:buFont typeface="Arial" panose="020B0604020202020204" pitchFamily="34" charset="0"/>
-              <a:buChar char="•"/>
+              <a:buFontTx/>
+              <a:buNone/>
               <a:tabLst/>
               <a:defRPr/>
             </a:pPr>
             <a:r>
-              <a:rPr kumimoji="0" lang="en-US" sz="2800" b="0" i="0" u="none" strike="noStrike" kern="1200" cap="none" spc="0" normalizeH="0" baseline="0" noProof="0" dirty="0">
+              <a:rPr kumimoji="0" lang="en-US" sz="1200" b="0" i="0" u="none" strike="noStrike" kern="1200" cap="none" spc="0" normalizeH="0" baseline="0" noProof="0" dirty="0">
                 <a:ln>
                   <a:noFill/>
                 </a:ln>
                 <a:solidFill>
-                  <a:prstClr val="black"/>
+                  <a:prstClr val="white"/>
                 </a:solidFill>
                 <a:effectLst/>
                 <a:uLnTx/>
                 <a:uFillTx/>
-                <a:latin typeface="Arial" pitchFamily="34" charset="0"/>
+                <a:latin typeface="TradeGothic"/>
+                <a:ea typeface="+mn-ea"/>
+                <a:cs typeface="+mn-cs"/>
+              </a:rPr>
+              <a:t>@SIH Idea submission- Template</a:t>
+            </a:r>
+          </a:p>
+        </p:txBody>
+      </p:sp>
+    </p:spTree>
+    <p:extLst>
+      <p:ext uri="{BB962C8B-B14F-4D97-AF65-F5344CB8AC3E}">
+        <p14:creationId xmlns:p14="http://schemas.microsoft.com/office/powerpoint/2010/main" val="3753387913"/>
+      </p:ext>
+    </p:extLst>
+  </p:cSld>
+  <p:clrMapOvr>
+    <a:masterClrMapping/>
+  </p:clrMapOvr>
+</p:sld>
+</file>
+
+<file path=ppt/slides/slide5.xml><?xml version="1.0" encoding="utf-8"?>
+<p:sld xmlns:a="http://schemas.openxmlformats.org/drawingml/2006/main" xmlns:r="http://schemas.openxmlformats.org/officeDocument/2006/relationships" xmlns:p="http://schemas.openxmlformats.org/presentationml/2006/main">
+  <p:cSld>
+    <p:spTree>
+      <p:nvGrpSpPr>
+        <p:cNvPr id="1" name="">
+          <a:extLst>
+            <a:ext uri="{FF2B5EF4-FFF2-40B4-BE49-F238E27FC236}">
+              <a16:creationId xmlns:a16="http://schemas.microsoft.com/office/drawing/2014/main" id="{48B09052-50AE-B3C2-6A1C-5CFF37D94A7E}"/>
+            </a:ext>
+          </a:extLst>
+        </p:cNvPr>
+        <p:cNvGrpSpPr/>
+        <p:nvPr/>
+      </p:nvGrpSpPr>
+      <p:grpSpPr>
+        <a:xfrm>
+          <a:off x="0" y="0"/>
+          <a:ext cx="0" cy="0"/>
+          <a:chOff x="0" y="0"/>
+          <a:chExt cx="0" cy="0"/>
+        </a:xfrm>
+      </p:grpSpPr>
+      <p:sp>
+        <p:nvSpPr>
+          <p:cNvPr id="17409" name="Title 1">
+            <a:extLst>
+              <a:ext uri="{FF2B5EF4-FFF2-40B4-BE49-F238E27FC236}">
+                <a16:creationId xmlns:a16="http://schemas.microsoft.com/office/drawing/2014/main" id="{5E03BF1A-7989-5C44-934B-D93E149184A6}"/>
+              </a:ext>
+            </a:extLst>
+          </p:cNvPr>
+          <p:cNvSpPr>
+            <a:spLocks noGrp="1"/>
+          </p:cNvSpPr>
+          <p:nvPr>
+            <p:ph type="title"/>
+          </p:nvPr>
+        </p:nvSpPr>
+        <p:spPr/>
+        <p:txBody>
+          <a:bodyPr/>
+          <a:lstStyle/>
+          <a:p>
+            <a:pPr eaLnBrk="1" hangingPunct="1"/>
+            <a:r>
+              <a:rPr lang="en-US" sz="3600" b="1" dirty="0">
+                <a:latin typeface="Times New Roman" panose="02020603050405020304" pitchFamily="18" charset="0"/>
                 <a:ea typeface="ＭＳ Ｐゴシック" pitchFamily="1" charset="-128"/>
-                <a:cs typeface="Arial" pitchFamily="34" charset="0"/>
-              </a:rPr>
-              <a:t>Per-provider throttling + round-robin turned 43% genuine LLM participation into 98%+; the safety supervisor's clamp+fallback make provider outages a non-issue (a 100%-fallback run completes with identical reliability); two tuning ideas (CO2-gated fan-off, optimal-start pre-heat) were measured and reverted when the data showed no net benefit -- engineering decisions backed by numbers.</a:t>
-            </a:r>
-            <a:endParaRPr kumimoji="0" lang="en-US" sz="2800" b="0" i="0" u="none" strike="noStrike" kern="1200" cap="none" spc="0" normalizeH="0" baseline="0" noProof="0" dirty="0">
+                <a:cs typeface="Times New Roman" panose="02020603050405020304" pitchFamily="18" charset="0"/>
+              </a:rPr>
+              <a:t>ARTIFACTS</a:t>
+            </a:r>
+          </a:p>
+        </p:txBody>
+      </p:sp>
+      <p:sp>
+        <p:nvSpPr>
+          <p:cNvPr id="17410" name="TextBox 8">
+            <a:extLst>
+              <a:ext uri="{FF2B5EF4-FFF2-40B4-BE49-F238E27FC236}">
+                <a16:creationId xmlns:a16="http://schemas.microsoft.com/office/drawing/2014/main" id="{DD0C6F84-D6ED-416D-7179-055149D83FA6}"/>
+              </a:ext>
+            </a:extLst>
+          </p:cNvPr>
+          <p:cNvSpPr txBox="1">
+            <a:spLocks noChangeArrowheads="1"/>
+          </p:cNvSpPr>
+          <p:nvPr/>
+        </p:nvSpPr>
+        <p:spPr bwMode="auto">
+          <a:xfrm>
+            <a:off x="609600" y="863542"/>
+            <a:ext cx="10972800" cy="2308324"/>
+          </a:xfrm>
+          <a:prstGeom prst="rect">
+            <a:avLst/>
+          </a:prstGeom>
+          <a:noFill/>
+          <a:ln w="9525">
+            <a:noFill/>
+            <a:miter lim="800000"/>
+            <a:headEnd/>
+            <a:tailEnd/>
+          </a:ln>
+        </p:spPr>
+        <p:txBody>
+          <a:bodyPr wrap="square">
+            <a:spAutoFit/>
+          </a:bodyPr>
+          <a:lstStyle/>
+          <a:p>
+            <a:pPr marL="342900" lvl="0" indent="-342900">
+              <a:buFont typeface="Arial" panose="020B0604020202020204" pitchFamily="34" charset="0"/>
+              <a:buChar char="•"/>
+              <a:defRPr/>
+            </a:pPr>
+            <a:r>
+              <a:rPr lang="en-US" b="1" dirty="0">
+                <a:solidFill>
+                  <a:prstClr val="black"/>
+                </a:solidFill>
+                <a:latin typeface="Arial" pitchFamily="34" charset="0"/>
+                <a:cs typeface="Arial" pitchFamily="34" charset="0"/>
+              </a:rPr>
+              <a:t>Full source: </a:t>
+            </a:r>
+            <a:r>
+              <a:rPr lang="en-US" dirty="0">
+                <a:solidFill>
+                  <a:prstClr val="black"/>
+                </a:solidFill>
+                <a:latin typeface="Arial" pitchFamily="34" charset="0"/>
+                <a:cs typeface="Arial" pitchFamily="34" charset="0"/>
+                <a:hlinkClick r:id="rId3"/>
+              </a:rPr>
+              <a:t>https://github.com/mahendra-kausik/eco-loop-building-agents</a:t>
+            </a:r>
+            <a:endParaRPr lang="en-US" dirty="0">
+              <a:solidFill>
+                <a:prstClr val="black"/>
+              </a:solidFill>
+              <a:latin typeface="Arial" pitchFamily="34" charset="0"/>
+              <a:cs typeface="Arial" pitchFamily="34" charset="0"/>
+            </a:endParaRPr>
+          </a:p>
+          <a:p>
+            <a:pPr marL="342900" lvl="0" indent="-342900">
+              <a:buFont typeface="Arial" panose="020B0604020202020204" pitchFamily="34" charset="0"/>
+              <a:buChar char="•"/>
+              <a:defRPr/>
+            </a:pPr>
+            <a:r>
+              <a:rPr lang="en-US" b="1" dirty="0">
+                <a:solidFill>
+                  <a:prstClr val="black"/>
+                </a:solidFill>
+                <a:latin typeface="Arial" pitchFamily="34" charset="0"/>
+                <a:cs typeface="Arial" pitchFamily="34" charset="0"/>
+              </a:rPr>
+              <a:t>Architecture doc: </a:t>
+            </a:r>
+            <a:r>
+              <a:rPr lang="en-US" dirty="0">
+                <a:solidFill>
+                  <a:prstClr val="black"/>
+                </a:solidFill>
+                <a:latin typeface="Arial" pitchFamily="34" charset="0"/>
+                <a:cs typeface="Arial" pitchFamily="34" charset="0"/>
+              </a:rPr>
+              <a:t>docs/ARCHITECTURE.md: tool-calling, prompt strategy, latency management, long-log handling</a:t>
+            </a:r>
+          </a:p>
+          <a:p>
+            <a:pPr marL="342900" lvl="0" indent="-342900">
+              <a:buFont typeface="Arial" panose="020B0604020202020204" pitchFamily="34" charset="0"/>
+              <a:buChar char="•"/>
+              <a:defRPr/>
+            </a:pPr>
+            <a:r>
+              <a:rPr lang="en-US" b="1" dirty="0">
+                <a:solidFill>
+                  <a:prstClr val="black"/>
+                </a:solidFill>
+                <a:latin typeface="Arial" pitchFamily="34" charset="0"/>
+                <a:cs typeface="Arial" pitchFamily="34" charset="0"/>
+              </a:rPr>
+              <a:t>Dashboard:</a:t>
+            </a:r>
+            <a:r>
+              <a:rPr lang="en-US" dirty="0">
+                <a:solidFill>
+                  <a:prstClr val="black"/>
+                </a:solidFill>
+                <a:latin typeface="Arial" pitchFamily="34" charset="0"/>
+                <a:cs typeface="Arial" pitchFamily="34" charset="0"/>
+              </a:rPr>
+              <a:t> results/dashboard.html </a:t>
+            </a:r>
+          </a:p>
+          <a:p>
+            <a:pPr marL="342900" lvl="0" indent="-342900">
+              <a:buFont typeface="Arial" panose="020B0604020202020204" pitchFamily="34" charset="0"/>
+              <a:buChar char="•"/>
+              <a:defRPr/>
+            </a:pPr>
+            <a:r>
+              <a:rPr lang="en-US" b="1" dirty="0">
+                <a:solidFill>
+                  <a:prstClr val="black"/>
+                </a:solidFill>
+                <a:latin typeface="Arial" pitchFamily="34" charset="0"/>
+                <a:cs typeface="Arial" pitchFamily="34" charset="0"/>
+              </a:rPr>
+              <a:t>Building models: </a:t>
+            </a:r>
+            <a:r>
+              <a:rPr lang="en-US" dirty="0">
+                <a:solidFill>
+                  <a:prstClr val="black"/>
+                </a:solidFill>
+                <a:latin typeface="Arial" pitchFamily="34" charset="0"/>
+                <a:cs typeface="Arial" pitchFamily="34" charset="0"/>
+              </a:rPr>
+              <a:t>models/</a:t>
+            </a:r>
+            <a:r>
+              <a:rPr lang="en-US" dirty="0" err="1">
+                <a:solidFill>
+                  <a:prstClr val="black"/>
+                </a:solidFill>
+                <a:latin typeface="Arial" pitchFamily="34" charset="0"/>
+                <a:cs typeface="Arial" pitchFamily="34" charset="0"/>
+              </a:rPr>
+              <a:t>baseline.idf</a:t>
+            </a:r>
+            <a:r>
+              <a:rPr lang="en-US" dirty="0">
+                <a:solidFill>
+                  <a:prstClr val="black"/>
+                </a:solidFill>
+                <a:latin typeface="Arial" pitchFamily="34" charset="0"/>
+                <a:cs typeface="Arial" pitchFamily="34" charset="0"/>
+              </a:rPr>
+              <a:t> + </a:t>
+            </a:r>
+            <a:r>
+              <a:rPr lang="en-US" dirty="0" err="1">
+                <a:solidFill>
+                  <a:prstClr val="black"/>
+                </a:solidFill>
+                <a:latin typeface="Arial" pitchFamily="34" charset="0"/>
+                <a:cs typeface="Arial" pitchFamily="34" charset="0"/>
+              </a:rPr>
+              <a:t>agent_llm_runtime.idf</a:t>
+            </a:r>
+            <a:r>
+              <a:rPr lang="en-US" dirty="0">
+                <a:solidFill>
+                  <a:prstClr val="black"/>
+                </a:solidFill>
+                <a:latin typeface="Arial" pitchFamily="34" charset="0"/>
+                <a:cs typeface="Arial" pitchFamily="34" charset="0"/>
+              </a:rPr>
+              <a:t> / </a:t>
+            </a:r>
+            <a:r>
+              <a:rPr lang="en-US" dirty="0" err="1">
+                <a:solidFill>
+                  <a:prstClr val="black"/>
+                </a:solidFill>
+                <a:latin typeface="Arial" pitchFamily="34" charset="0"/>
+                <a:cs typeface="Arial" pitchFamily="34" charset="0"/>
+              </a:rPr>
+              <a:t>agent_fallback_runtime.idf</a:t>
+            </a:r>
+            <a:r>
+              <a:rPr lang="en-US" dirty="0">
+                <a:solidFill>
+                  <a:prstClr val="black"/>
+                </a:solidFill>
+                <a:latin typeface="Arial" pitchFamily="34" charset="0"/>
+                <a:cs typeface="Arial" pitchFamily="34" charset="0"/>
+              </a:rPr>
+              <a:t> (</a:t>
+            </a:r>
+            <a:r>
+              <a:rPr lang="en-GB" dirty="0">
+                <a:solidFill>
+                  <a:prstClr val="black"/>
+                </a:solidFill>
+                <a:latin typeface="Arial" pitchFamily="34" charset="0"/>
+                <a:cs typeface="Arial" pitchFamily="34" charset="0"/>
+              </a:rPr>
+              <a:t>the actual applied hour-by-hour schedules baked into real IDF objects, diffable against baseline)</a:t>
+            </a:r>
+            <a:endParaRPr lang="en-US" dirty="0">
+              <a:solidFill>
+                <a:prstClr val="black"/>
+              </a:solidFill>
+              <a:latin typeface="Arial" pitchFamily="34" charset="0"/>
+              <a:cs typeface="Arial" pitchFamily="34" charset="0"/>
+            </a:endParaRPr>
+          </a:p>
+          <a:p>
+            <a:pPr marL="342900" lvl="0" indent="-342900">
+              <a:buFont typeface="Arial" panose="020B0604020202020204" pitchFamily="34" charset="0"/>
+              <a:buChar char="•"/>
+              <a:defRPr/>
+            </a:pPr>
+            <a:r>
+              <a:rPr lang="en-US" b="1" dirty="0">
+                <a:solidFill>
+                  <a:prstClr val="black"/>
+                </a:solidFill>
+                <a:latin typeface="Arial" pitchFamily="34" charset="0"/>
+                <a:cs typeface="Arial" pitchFamily="34" charset="0"/>
+              </a:rPr>
+              <a:t>Decision log:</a:t>
+            </a:r>
+            <a:r>
+              <a:rPr lang="en-US" dirty="0">
+                <a:solidFill>
+                  <a:prstClr val="black"/>
+                </a:solidFill>
+                <a:latin typeface="Arial" pitchFamily="34" charset="0"/>
+                <a:cs typeface="Arial" pitchFamily="34" charset="0"/>
+              </a:rPr>
+              <a:t> results/</a:t>
+            </a:r>
+            <a:r>
+              <a:rPr lang="en-US" dirty="0" err="1">
+                <a:solidFill>
+                  <a:prstClr val="black"/>
+                </a:solidFill>
+                <a:latin typeface="Arial" pitchFamily="34" charset="0"/>
+                <a:cs typeface="Arial" pitchFamily="34" charset="0"/>
+              </a:rPr>
+              <a:t>decision_log.jsonl</a:t>
+            </a:r>
+            <a:r>
+              <a:rPr lang="en-US" dirty="0">
+                <a:solidFill>
+                  <a:prstClr val="black"/>
+                </a:solidFill>
+                <a:latin typeface="Arial" pitchFamily="34" charset="0"/>
+                <a:cs typeface="Arial" pitchFamily="34" charset="0"/>
+              </a:rPr>
+              <a:t> (168 decisions with the model's own stated reasoning) + </a:t>
+            </a:r>
+            <a:r>
+              <a:rPr lang="en-US" dirty="0" err="1">
+                <a:solidFill>
+                  <a:prstClr val="black"/>
+                </a:solidFill>
+                <a:latin typeface="Arial" pitchFamily="34" charset="0"/>
+                <a:cs typeface="Arial" pitchFamily="34" charset="0"/>
+              </a:rPr>
+              <a:t>decision_log_llm_unreachable.jsonl</a:t>
+            </a:r>
+            <a:r>
+              <a:rPr lang="en-US" dirty="0">
+                <a:solidFill>
+                  <a:prstClr val="black"/>
+                </a:solidFill>
+                <a:latin typeface="Arial" pitchFamily="34" charset="0"/>
+                <a:cs typeface="Arial" pitchFamily="34" charset="0"/>
+              </a:rPr>
+              <a:t> (the 100%-fallback proof run)</a:t>
+            </a:r>
+            <a:endParaRPr kumimoji="0" lang="en-US" b="0" i="0" u="none" strike="noStrike" kern="1200" cap="none" spc="0" normalizeH="0" baseline="0" noProof="0" dirty="0">
               <a:ln>
                 <a:noFill/>
               </a:ln>
@@ -5770,7 +7193,13 @@
       </p:sp>
       <p:sp>
         <p:nvSpPr>
-          <p:cNvPr id="6" name="Slide Number Placeholder 5"/>
+          <p:cNvPr id="6" name="Slide Number Placeholder 5">
+            <a:extLst>
+              <a:ext uri="{FF2B5EF4-FFF2-40B4-BE49-F238E27FC236}">
+                <a16:creationId xmlns:a16="http://schemas.microsoft.com/office/drawing/2014/main" id="{84B14AAA-63FC-5F17-FE74-5405495A1CD3}"/>
+              </a:ext>
+            </a:extLst>
+          </p:cNvPr>
           <p:cNvSpPr>
             <a:spLocks noGrp="1"/>
           </p:cNvSpPr>
@@ -5853,7 +7282,13 @@
       </p:sp>
       <p:sp>
         <p:nvSpPr>
-          <p:cNvPr id="7" name="Footer Placeholder 6"/>
+          <p:cNvPr id="7" name="Footer Placeholder 6">
+            <a:extLst>
+              <a:ext uri="{FF2B5EF4-FFF2-40B4-BE49-F238E27FC236}">
+                <a16:creationId xmlns:a16="http://schemas.microsoft.com/office/drawing/2014/main" id="{34C6332B-BBD9-799D-50C5-6A19BC85E43E}"/>
+              </a:ext>
+            </a:extLst>
+          </p:cNvPr>
           <p:cNvSpPr>
             <a:spLocks noGrp="1"/>
           </p:cNvSpPr>
@@ -5922,10 +7357,642 @@
           </a:p>
         </p:txBody>
       </p:sp>
+      <p:graphicFrame>
+        <p:nvGraphicFramePr>
+          <p:cNvPr id="2" name="Table 1">
+            <a:extLst>
+              <a:ext uri="{FF2B5EF4-FFF2-40B4-BE49-F238E27FC236}">
+                <a16:creationId xmlns:a16="http://schemas.microsoft.com/office/drawing/2014/main" id="{BE634B75-00A7-51A8-B864-E8A2C7315725}"/>
+              </a:ext>
+            </a:extLst>
+          </p:cNvPr>
+          <p:cNvGraphicFramePr>
+            <a:graphicFrameLocks noGrp="1"/>
+          </p:cNvGraphicFramePr>
+          <p:nvPr>
+            <p:extLst>
+              <p:ext uri="{D42A27DB-BD31-4B8C-83A1-F6EECF244321}">
+                <p14:modId xmlns:p14="http://schemas.microsoft.com/office/powerpoint/2010/main" val="3634140663"/>
+              </p:ext>
+            </p:extLst>
+          </p:nvPr>
+        </p:nvGraphicFramePr>
+        <p:xfrm>
+          <a:off x="1442651" y="3171866"/>
+          <a:ext cx="9306697" cy="3645847"/>
+        </p:xfrm>
+        <a:graphic>
+          <a:graphicData uri="http://schemas.openxmlformats.org/drawingml/2006/table">
+            <a:tbl>
+              <a:tblPr firstRow="1" bandRow="1">
+                <a:tableStyleId>{5C22544A-7EE6-4342-B048-85BDC9FD1C3A}</a:tableStyleId>
+              </a:tblPr>
+              <a:tblGrid>
+                <a:gridCol w="3363685">
+                  <a:extLst>
+                    <a:ext uri="{9D8B030D-6E8A-4147-A177-3AD203B41FA5}">
+                      <a16:colId xmlns:a16="http://schemas.microsoft.com/office/drawing/2014/main" val="243089259"/>
+                    </a:ext>
+                  </a:extLst>
+                </a:gridCol>
+                <a:gridCol w="1393372">
+                  <a:extLst>
+                    <a:ext uri="{9D8B030D-6E8A-4147-A177-3AD203B41FA5}">
+                      <a16:colId xmlns:a16="http://schemas.microsoft.com/office/drawing/2014/main" val="2530782598"/>
+                    </a:ext>
+                  </a:extLst>
+                </a:gridCol>
+                <a:gridCol w="1491343">
+                  <a:extLst>
+                    <a:ext uri="{9D8B030D-6E8A-4147-A177-3AD203B41FA5}">
+                      <a16:colId xmlns:a16="http://schemas.microsoft.com/office/drawing/2014/main" val="250388775"/>
+                    </a:ext>
+                  </a:extLst>
+                </a:gridCol>
+                <a:gridCol w="3058297">
+                  <a:extLst>
+                    <a:ext uri="{9D8B030D-6E8A-4147-A177-3AD203B41FA5}">
+                      <a16:colId xmlns:a16="http://schemas.microsoft.com/office/drawing/2014/main" val="1470385253"/>
+                    </a:ext>
+                  </a:extLst>
+                </a:gridCol>
+              </a:tblGrid>
+              <a:tr h="368971">
+                <a:tc>
+                  <a:txBody>
+                    <a:bodyPr/>
+                    <a:lstStyle/>
+                    <a:p>
+                      <a:pPr algn="ctr"/>
+                      <a:r>
+                        <a:rPr lang="en-IN" dirty="0"/>
+                        <a:t>Metric</a:t>
+                      </a:r>
+                    </a:p>
+                  </a:txBody>
+                  <a:tcPr/>
+                </a:tc>
+                <a:tc>
+                  <a:txBody>
+                    <a:bodyPr/>
+                    <a:lstStyle/>
+                    <a:p>
+                      <a:pPr algn="ctr"/>
+                      <a:r>
+                        <a:rPr lang="en-IN" dirty="0"/>
+                        <a:t>Baseline</a:t>
+                      </a:r>
+                    </a:p>
+                  </a:txBody>
+                  <a:tcPr/>
+                </a:tc>
+                <a:tc>
+                  <a:txBody>
+                    <a:bodyPr/>
+                    <a:lstStyle/>
+                    <a:p>
+                      <a:pPr algn="ctr"/>
+                      <a:r>
+                        <a:rPr lang="en-IN" dirty="0"/>
+                        <a:t>AI closed loop</a:t>
+                      </a:r>
+                    </a:p>
+                  </a:txBody>
+                  <a:tcPr/>
+                </a:tc>
+                <a:tc>
+                  <a:txBody>
+                    <a:bodyPr/>
+                    <a:lstStyle/>
+                    <a:p>
+                      <a:pPr algn="ctr"/>
+                      <a:r>
+                        <a:rPr lang="en-IN" dirty="0"/>
+                        <a:t>Result</a:t>
+                      </a:r>
+                    </a:p>
+                  </a:txBody>
+                  <a:tcPr/>
+                </a:tc>
+                <a:extLst>
+                  <a:ext uri="{0D108BD9-81ED-4DB2-BD59-A6C34878D82A}">
+                    <a16:rowId xmlns:a16="http://schemas.microsoft.com/office/drawing/2014/main" val="2506459883"/>
+                  </a:ext>
+                </a:extLst>
+              </a:tr>
+              <a:tr h="374095">
+                <a:tc>
+                  <a:txBody>
+                    <a:bodyPr/>
+                    <a:lstStyle/>
+                    <a:p>
+                      <a:pPr algn="ctr"/>
+                      <a:r>
+                        <a:rPr lang="en-IN" dirty="0"/>
+                        <a:t>Total electricity</a:t>
+                      </a:r>
+                    </a:p>
+                  </a:txBody>
+                  <a:tcPr/>
+                </a:tc>
+                <a:tc>
+                  <a:txBody>
+                    <a:bodyPr/>
+                    <a:lstStyle/>
+                    <a:p>
+                      <a:pPr algn="ctr"/>
+                      <a:r>
+                        <a:rPr lang="en-IN" dirty="0"/>
+                        <a:t> 1100.1 kWh</a:t>
+                      </a:r>
+                    </a:p>
+                  </a:txBody>
+                  <a:tcPr/>
+                </a:tc>
+                <a:tc>
+                  <a:txBody>
+                    <a:bodyPr/>
+                    <a:lstStyle/>
+                    <a:p>
+                      <a:pPr algn="ctr"/>
+                      <a:r>
+                        <a:rPr lang="en-IN" dirty="0"/>
+                        <a:t>1003.6 kWh</a:t>
+                      </a:r>
+                    </a:p>
+                  </a:txBody>
+                  <a:tcPr/>
+                </a:tc>
+                <a:tc>
+                  <a:txBody>
+                    <a:bodyPr/>
+                    <a:lstStyle/>
+                    <a:p>
+                      <a:pPr algn="ctr"/>
+                      <a:r>
+                        <a:rPr lang="en-IN" dirty="0"/>
+                        <a:t> −8.8%</a:t>
+                      </a:r>
+                    </a:p>
+                  </a:txBody>
+                  <a:tcPr/>
+                </a:tc>
+                <a:extLst>
+                  <a:ext uri="{0D108BD9-81ED-4DB2-BD59-A6C34878D82A}">
+                    <a16:rowId xmlns:a16="http://schemas.microsoft.com/office/drawing/2014/main" val="3253220451"/>
+                  </a:ext>
+                </a:extLst>
+              </a:tr>
+              <a:tr h="374095">
+                <a:tc>
+                  <a:txBody>
+                    <a:bodyPr/>
+                    <a:lstStyle/>
+                    <a:p>
+                      <a:pPr algn="ctr"/>
+                      <a:r>
+                        <a:rPr lang="en-IN" dirty="0"/>
+                        <a:t>HVAC-only electricity</a:t>
+                      </a:r>
+                    </a:p>
+                  </a:txBody>
+                  <a:tcPr/>
+                </a:tc>
+                <a:tc>
+                  <a:txBody>
+                    <a:bodyPr/>
+                    <a:lstStyle/>
+                    <a:p>
+                      <a:pPr algn="ctr"/>
+                      <a:r>
+                        <a:rPr lang="en-IN" dirty="0"/>
+                        <a:t>413.7 kWh</a:t>
+                      </a:r>
+                    </a:p>
+                  </a:txBody>
+                  <a:tcPr/>
+                </a:tc>
+                <a:tc>
+                  <a:txBody>
+                    <a:bodyPr/>
+                    <a:lstStyle/>
+                    <a:p>
+                      <a:pPr algn="ctr"/>
+                      <a:r>
+                        <a:rPr lang="en-IN" dirty="0"/>
+                        <a:t>317.3 kWh</a:t>
+                      </a:r>
+                    </a:p>
+                  </a:txBody>
+                  <a:tcPr/>
+                </a:tc>
+                <a:tc>
+                  <a:txBody>
+                    <a:bodyPr/>
+                    <a:lstStyle/>
+                    <a:p>
+                      <a:pPr algn="ctr"/>
+                      <a:r>
+                        <a:rPr lang="en-IN" dirty="0"/>
+                        <a:t> −23.3%</a:t>
+                      </a:r>
+                    </a:p>
+                  </a:txBody>
+                  <a:tcPr/>
+                </a:tc>
+                <a:extLst>
+                  <a:ext uri="{0D108BD9-81ED-4DB2-BD59-A6C34878D82A}">
+                    <a16:rowId xmlns:a16="http://schemas.microsoft.com/office/drawing/2014/main" val="806846436"/>
+                  </a:ext>
+                </a:extLst>
+              </a:tr>
+              <a:tr h="387102">
+                <a:tc>
+                  <a:txBody>
+                    <a:bodyPr/>
+                    <a:lstStyle/>
+                    <a:p>
+                      <a:pPr algn="ctr"/>
+                      <a:r>
+                        <a:rPr lang="en-IN" dirty="0"/>
+                        <a:t>Comfort (PMV in band, occupied)</a:t>
+                      </a:r>
+                    </a:p>
+                  </a:txBody>
+                  <a:tcPr/>
+                </a:tc>
+                <a:tc>
+                  <a:txBody>
+                    <a:bodyPr/>
+                    <a:lstStyle/>
+                    <a:p>
+                      <a:pPr algn="ctr"/>
+                      <a:r>
+                        <a:rPr lang="en-IN" dirty="0"/>
+                        <a:t>80.7%</a:t>
+                      </a:r>
+                    </a:p>
+                  </a:txBody>
+                  <a:tcPr/>
+                </a:tc>
+                <a:tc>
+                  <a:txBody>
+                    <a:bodyPr/>
+                    <a:lstStyle/>
+                    <a:p>
+                      <a:pPr algn="ctr"/>
+                      <a:r>
+                        <a:rPr lang="en-IN" dirty="0"/>
+                        <a:t>93.1%</a:t>
+                      </a:r>
+                    </a:p>
+                  </a:txBody>
+                  <a:tcPr/>
+                </a:tc>
+                <a:tc>
+                  <a:txBody>
+                    <a:bodyPr/>
+                    <a:lstStyle/>
+                    <a:p>
+                      <a:pPr algn="ctr"/>
+                      <a:r>
+                        <a:rPr lang="en-IN" dirty="0"/>
+                        <a:t>+12.4 pts</a:t>
+                      </a:r>
+                    </a:p>
+                  </a:txBody>
+                  <a:tcPr/>
+                </a:tc>
+                <a:extLst>
+                  <a:ext uri="{0D108BD9-81ED-4DB2-BD59-A6C34878D82A}">
+                    <a16:rowId xmlns:a16="http://schemas.microsoft.com/office/drawing/2014/main" val="4115021856"/>
+                  </a:ext>
+                </a:extLst>
+              </a:tr>
+              <a:tr h="374095">
+                <a:tc>
+                  <a:txBody>
+                    <a:bodyPr/>
+                    <a:lstStyle/>
+                    <a:p>
+                      <a:pPr algn="ctr"/>
+                      <a:r>
+                        <a:rPr lang="en-IN" dirty="0"/>
+                        <a:t>Reheat gas</a:t>
+                      </a:r>
+                    </a:p>
+                  </a:txBody>
+                  <a:tcPr/>
+                </a:tc>
+                <a:tc>
+                  <a:txBody>
+                    <a:bodyPr/>
+                    <a:lstStyle/>
+                    <a:p>
+                      <a:pPr algn="ctr"/>
+                      <a:r>
+                        <a:rPr lang="en-IN" dirty="0"/>
+                        <a:t>32.9 kWh</a:t>
+                      </a:r>
+                    </a:p>
+                  </a:txBody>
+                  <a:tcPr/>
+                </a:tc>
+                <a:tc>
+                  <a:txBody>
+                    <a:bodyPr/>
+                    <a:lstStyle/>
+                    <a:p>
+                      <a:pPr algn="ctr"/>
+                      <a:r>
+                        <a:rPr lang="en-IN" dirty="0"/>
+                        <a:t> 3.6 kWh</a:t>
+                      </a:r>
+                    </a:p>
+                  </a:txBody>
+                  <a:tcPr/>
+                </a:tc>
+                <a:tc>
+                  <a:txBody>
+                    <a:bodyPr/>
+                    <a:lstStyle/>
+                    <a:p>
+                      <a:pPr algn="ctr"/>
+                      <a:r>
+                        <a:rPr lang="en-IN" dirty="0"/>
+                        <a:t>−89%</a:t>
+                      </a:r>
+                    </a:p>
+                  </a:txBody>
+                  <a:tcPr/>
+                </a:tc>
+                <a:extLst>
+                  <a:ext uri="{0D108BD9-81ED-4DB2-BD59-A6C34878D82A}">
+                    <a16:rowId xmlns:a16="http://schemas.microsoft.com/office/drawing/2014/main" val="4116193716"/>
+                  </a:ext>
+                </a:extLst>
+              </a:tr>
+              <a:tr h="374095">
+                <a:tc>
+                  <a:txBody>
+                    <a:bodyPr/>
+                    <a:lstStyle/>
+                    <a:p>
+                      <a:pPr algn="ctr"/>
+                      <a:r>
+                        <a:rPr lang="en-IN" dirty="0"/>
+                        <a:t>Peak demand</a:t>
+                      </a:r>
+                    </a:p>
+                  </a:txBody>
+                  <a:tcPr/>
+                </a:tc>
+                <a:tc>
+                  <a:txBody>
+                    <a:bodyPr/>
+                    <a:lstStyle/>
+                    <a:p>
+                      <a:pPr algn="ctr"/>
+                      <a:r>
+                        <a:rPr lang="en-IN" dirty="0"/>
+                        <a:t>19.9 kW</a:t>
+                      </a:r>
+                    </a:p>
+                  </a:txBody>
+                  <a:tcPr/>
+                </a:tc>
+                <a:tc>
+                  <a:txBody>
+                    <a:bodyPr/>
+                    <a:lstStyle/>
+                    <a:p>
+                      <a:pPr algn="ctr"/>
+                      <a:r>
+                        <a:rPr lang="en-IN" dirty="0"/>
+                        <a:t>19.0 kW</a:t>
+                      </a:r>
+                    </a:p>
+                  </a:txBody>
+                  <a:tcPr/>
+                </a:tc>
+                <a:tc>
+                  <a:txBody>
+                    <a:bodyPr/>
+                    <a:lstStyle/>
+                    <a:p>
+                      <a:pPr algn="ctr"/>
+                      <a:r>
+                        <a:rPr lang="en-IN" dirty="0"/>
+                        <a:t>−0.9 kW</a:t>
+                      </a:r>
+                    </a:p>
+                  </a:txBody>
+                  <a:tcPr/>
+                </a:tc>
+                <a:extLst>
+                  <a:ext uri="{0D108BD9-81ED-4DB2-BD59-A6C34878D82A}">
+                    <a16:rowId xmlns:a16="http://schemas.microsoft.com/office/drawing/2014/main" val="2926779529"/>
+                  </a:ext>
+                </a:extLst>
+              </a:tr>
+              <a:tr h="374095">
+                <a:tc>
+                  <a:txBody>
+                    <a:bodyPr/>
+                    <a:lstStyle/>
+                    <a:p>
+                      <a:pPr algn="ctr"/>
+                      <a:r>
+                        <a:rPr lang="en-IN" dirty="0"/>
+                        <a:t> CO₂ (grid-weighted)</a:t>
+                      </a:r>
+                    </a:p>
+                  </a:txBody>
+                  <a:tcPr/>
+                </a:tc>
+                <a:tc>
+                  <a:txBody>
+                    <a:bodyPr/>
+                    <a:lstStyle/>
+                    <a:p>
+                      <a:pPr algn="ctr"/>
+                      <a:r>
+                        <a:rPr lang="en-IN" dirty="0"/>
+                        <a:t>663.8 kg</a:t>
+                      </a:r>
+                    </a:p>
+                  </a:txBody>
+                  <a:tcPr/>
+                </a:tc>
+                <a:tc>
+                  <a:txBody>
+                    <a:bodyPr/>
+                    <a:lstStyle/>
+                    <a:p>
+                      <a:pPr algn="ctr"/>
+                      <a:r>
+                        <a:rPr lang="en-IN" dirty="0"/>
+                        <a:t>602.2 kg</a:t>
+                      </a:r>
+                    </a:p>
+                  </a:txBody>
+                  <a:tcPr/>
+                </a:tc>
+                <a:tc>
+                  <a:txBody>
+                    <a:bodyPr/>
+                    <a:lstStyle/>
+                    <a:p>
+                      <a:pPr algn="ctr"/>
+                      <a:r>
+                        <a:rPr lang="en-IN" dirty="0"/>
+                        <a:t>−61.6 kg</a:t>
+                      </a:r>
+                    </a:p>
+                  </a:txBody>
+                  <a:tcPr/>
+                </a:tc>
+                <a:extLst>
+                  <a:ext uri="{0D108BD9-81ED-4DB2-BD59-A6C34878D82A}">
+                    <a16:rowId xmlns:a16="http://schemas.microsoft.com/office/drawing/2014/main" val="3723107878"/>
+                  </a:ext>
+                </a:extLst>
+              </a:tr>
+              <a:tr h="374095">
+                <a:tc>
+                  <a:txBody>
+                    <a:bodyPr/>
+                    <a:lstStyle/>
+                    <a:p>
+                      <a:pPr algn="ctr"/>
+                      <a:r>
+                        <a:rPr lang="en-IN" dirty="0"/>
+                        <a:t>Cost @ ₹6/kWh</a:t>
+                      </a:r>
+                    </a:p>
+                  </a:txBody>
+                  <a:tcPr/>
+                </a:tc>
+                <a:tc>
+                  <a:txBody>
+                    <a:bodyPr/>
+                    <a:lstStyle/>
+                    <a:p>
+                      <a:pPr algn="ctr"/>
+                      <a:r>
+                        <a:rPr lang="en-IN" dirty="0"/>
+                        <a:t>₹6079</a:t>
+                      </a:r>
+                    </a:p>
+                  </a:txBody>
+                  <a:tcPr/>
+                </a:tc>
+                <a:tc>
+                  <a:txBody>
+                    <a:bodyPr/>
+                    <a:lstStyle/>
+                    <a:p>
+                      <a:pPr algn="ctr"/>
+                      <a:r>
+                        <a:rPr lang="en-IN" dirty="0"/>
+                        <a:t>₹5485</a:t>
+                      </a:r>
+                    </a:p>
+                  </a:txBody>
+                  <a:tcPr/>
+                </a:tc>
+                <a:tc>
+                  <a:txBody>
+                    <a:bodyPr/>
+                    <a:lstStyle/>
+                    <a:p>
+                      <a:pPr algn="ctr"/>
+                      <a:r>
+                        <a:rPr lang="en-IN" dirty="0"/>
+                        <a:t>−₹594</a:t>
+                      </a:r>
+                    </a:p>
+                  </a:txBody>
+                  <a:tcPr/>
+                </a:tc>
+                <a:extLst>
+                  <a:ext uri="{0D108BD9-81ED-4DB2-BD59-A6C34878D82A}">
+                    <a16:rowId xmlns:a16="http://schemas.microsoft.com/office/drawing/2014/main" val="527687370"/>
+                  </a:ext>
+                </a:extLst>
+              </a:tr>
+              <a:tr h="374095">
+                <a:tc>
+                  <a:txBody>
+                    <a:bodyPr/>
+                    <a:lstStyle/>
+                    <a:p>
+                      <a:pPr algn="ctr"/>
+                      <a:r>
+                        <a:rPr lang="en-IN" dirty="0"/>
+                        <a:t>Crash-free horizon</a:t>
+                      </a:r>
+                    </a:p>
+                  </a:txBody>
+                  <a:tcPr/>
+                </a:tc>
+                <a:tc>
+                  <a:txBody>
+                    <a:bodyPr/>
+                    <a:lstStyle/>
+                    <a:p>
+                      <a:pPr algn="ctr"/>
+                      <a:r>
+                        <a:rPr lang="en-GB" dirty="0"/>
+                        <a:t>-</a:t>
+                      </a:r>
+                      <a:endParaRPr lang="en-IN" dirty="0"/>
+                    </a:p>
+                  </a:txBody>
+                  <a:tcPr/>
+                </a:tc>
+                <a:tc>
+                  <a:txBody>
+                    <a:bodyPr/>
+                    <a:lstStyle/>
+                    <a:p>
+                      <a:pPr algn="ctr"/>
+                      <a:r>
+                        <a:rPr lang="en-IN" dirty="0"/>
+                        <a:t>14 sim days</a:t>
+                      </a:r>
+                    </a:p>
+                  </a:txBody>
+                  <a:tcPr/>
+                </a:tc>
+                <a:tc>
+                  <a:txBody>
+                    <a:bodyPr/>
+                    <a:lstStyle/>
+                    <a:p>
+                      <a:pPr algn="ctr"/>
+                      <a:r>
+                        <a:rPr lang="en-IN" dirty="0"/>
+                        <a:t>336/336, 0 errors</a:t>
+                      </a:r>
+                    </a:p>
+                  </a:txBody>
+                  <a:tcPr/>
+                </a:tc>
+                <a:extLst>
+                  <a:ext uri="{0D108BD9-81ED-4DB2-BD59-A6C34878D82A}">
+                    <a16:rowId xmlns:a16="http://schemas.microsoft.com/office/drawing/2014/main" val="2093349669"/>
+                  </a:ext>
+                </a:extLst>
+              </a:tr>
+            </a:tbl>
+          </a:graphicData>
+        </a:graphic>
+      </p:graphicFrame>
     </p:spTree>
     <p:extLst>
       <p:ext uri="{BB962C8B-B14F-4D97-AF65-F5344CB8AC3E}">
-        <p14:creationId xmlns:p14="http://schemas.microsoft.com/office/powerpoint/2010/main" val="3753387913"/>
+        <p14:creationId xmlns:p14="http://schemas.microsoft.com/office/powerpoint/2010/main" val="973447886"/>
       </p:ext>
     </p:extLst>
   </p:cSld>
@@ -5940,13 +8007,7 @@
   <p:cSld>
     <p:spTree>
       <p:nvGrpSpPr>
-        <p:cNvPr id="1" name="">
-          <a:extLst>
-            <a:ext uri="{FF2B5EF4-FFF2-40B4-BE49-F238E27FC236}">
-              <a16:creationId xmlns:a16="http://schemas.microsoft.com/office/drawing/2014/main" id="{48B09052-50AE-B3C2-6A1C-5CFF37D94A7E}"/>
-            </a:ext>
-          </a:extLst>
-        </p:cNvPr>
+        <p:cNvPr id="1" name=""/>
         <p:cNvGrpSpPr/>
         <p:nvPr/>
       </p:nvGrpSpPr>
@@ -5960,13 +8021,7 @@
       </p:grpSpPr>
       <p:sp>
         <p:nvSpPr>
-          <p:cNvPr id="17409" name="Title 1">
-            <a:extLst>
-              <a:ext uri="{FF2B5EF4-FFF2-40B4-BE49-F238E27FC236}">
-                <a16:creationId xmlns:a16="http://schemas.microsoft.com/office/drawing/2014/main" id="{5E03BF1A-7989-5C44-934B-D93E149184A6}"/>
-              </a:ext>
-            </a:extLst>
-          </p:cNvPr>
+          <p:cNvPr id="17409" name="Title 1"/>
           <p:cNvSpPr>
             <a:spLocks noGrp="1"/>
           </p:cNvSpPr>
@@ -5986,20 +8041,14 @@
                 <a:ea typeface="ＭＳ Ｐゴシック" pitchFamily="1" charset="-128"/>
                 <a:cs typeface="Times New Roman" panose="02020603050405020304" pitchFamily="18" charset="0"/>
               </a:rPr>
-              <a:t>ARTIFACTS</a:t>
-            </a:r>
-          </a:p>
-        </p:txBody>
-      </p:sp>
-      <p:sp>
-        <p:nvSpPr>
-          <p:cNvPr id="17410" name="TextBox 8">
-            <a:extLst>
-              <a:ext uri="{FF2B5EF4-FFF2-40B4-BE49-F238E27FC236}">
-                <a16:creationId xmlns:a16="http://schemas.microsoft.com/office/drawing/2014/main" id="{DD0C6F84-D6ED-416D-7179-055149D83FA6}"/>
-              </a:ext>
-            </a:extLst>
-          </p:cNvPr>
+              <a:t>RESEARCH  AND REFERENCES</a:t>
+            </a:r>
+          </a:p>
+        </p:txBody>
+      </p:sp>
+      <p:sp>
+        <p:nvSpPr>
+          <p:cNvPr id="17410" name="TextBox 8"/>
           <p:cNvSpPr txBox="1">
             <a:spLocks noChangeArrowheads="1"/>
           </p:cNvSpPr>
@@ -6007,8 +8056,8 @@
         </p:nvSpPr>
         <p:spPr bwMode="auto">
           <a:xfrm>
-            <a:off x="609600" y="2533653"/>
-            <a:ext cx="9385300" cy="2246769"/>
+            <a:off x="609599" y="1166842"/>
+            <a:ext cx="10972799" cy="4524315"/>
           </a:xfrm>
           <a:prstGeom prst="rect">
             <a:avLst/>
@@ -6027,140 +8076,247 @@
           </a:bodyPr>
           <a:lstStyle/>
           <a:p>
-            <a:pPr marL="342900" marR="0" lvl="0" indent="-342900" algn="just" defTabSz="457200" rtl="0" eaLnBrk="1" fontAlgn="base" latinLnBrk="0" hangingPunct="1">
-              <a:lnSpc>
-                <a:spcPct val="100000"/>
-              </a:lnSpc>
-              <a:spcBef>
-                <a:spcPct val="0"/>
-              </a:spcBef>
-              <a:spcAft>
-                <a:spcPct val="0"/>
-              </a:spcAft>
-              <a:buClrTx/>
-              <a:buSzTx/>
-              <a:buFont typeface="Arial" panose="020B0604020202020204" pitchFamily="34" charset="0"/>
-              <a:buChar char="•"/>
-              <a:tabLst/>
-              <a:defRPr/>
-            </a:pPr>
-            <a:r>
-              <a:rPr lang="en-US" sz="2800" dirty="0">
-                <a:solidFill>
-                  <a:prstClr val="black"/>
-                </a:solidFill>
-                <a:latin typeface="Arial" pitchFamily="34" charset="0"/>
-                <a:cs typeface="Arial" pitchFamily="34" charset="0"/>
-              </a:rPr>
-              <a:t>Relevant artifacts, such as :</a:t>
-            </a:r>
-          </a:p>
-          <a:p>
-            <a:pPr marL="800100" lvl="1" indent="-342900" algn="just">
+            <a:pPr marL="342900" lvl="0" indent="-342900">
               <a:buFont typeface="Arial" panose="020B0604020202020204" pitchFamily="34" charset="0"/>
               <a:buChar char="•"/>
               <a:defRPr/>
             </a:pPr>
             <a:r>
-              <a:rPr lang="en-US" sz="2800" dirty="0">
+              <a:rPr lang="en-US" sz="2400" b="1" dirty="0" err="1">
                 <a:solidFill>
                   <a:prstClr val="black"/>
                 </a:solidFill>
                 <a:latin typeface="Arial" pitchFamily="34" charset="0"/>
                 <a:cs typeface="Arial" pitchFamily="34" charset="0"/>
               </a:rPr>
-              <a:t>Full source: https://github.com/mahendra-kausik/eco-loop-building-agents</a:t>
-            </a:r>
-          </a:p>
-          <a:p>
-            <a:pPr marL="800100" lvl="1" indent="-342900" algn="just">
+              <a:t>EnergyPlus</a:t>
+            </a:r>
+            <a:r>
+              <a:rPr lang="en-US" sz="2400" dirty="0">
+                <a:solidFill>
+                  <a:prstClr val="black"/>
+                </a:solidFill>
+                <a:latin typeface="Arial" pitchFamily="34" charset="0"/>
+                <a:cs typeface="Arial" pitchFamily="34" charset="0"/>
+              </a:rPr>
+              <a:t> documentation &amp; Python Plugin/API guide: energyplus.net (US DOE)</a:t>
+            </a:r>
+          </a:p>
+          <a:p>
+            <a:pPr marL="342900" lvl="0" indent="-342900">
               <a:buFont typeface="Arial" panose="020B0604020202020204" pitchFamily="34" charset="0"/>
               <a:buChar char="•"/>
               <a:defRPr/>
             </a:pPr>
-            <a:r>
-              <a:rPr kumimoji="0" lang="en-US" sz="2800" b="0" i="0" u="none" strike="noStrike" kern="1200" cap="none" spc="0" normalizeH="0" baseline="0" noProof="0" dirty="0">
-                <a:ln>
-                  <a:noFill/>
-                </a:ln>
-                <a:solidFill>
-                  <a:prstClr val="black"/>
-                </a:solidFill>
-                <a:effectLst/>
-                <a:uLnTx/>
-                <a:uFillTx/>
-                <a:latin typeface="Arial" pitchFamily="34" charset="0"/>
-                <a:ea typeface="ＭＳ Ｐゴシック" pitchFamily="1" charset="-128"/>
-                <a:cs typeface="Arial" pitchFamily="34" charset="0"/>
-              </a:rPr>
-              <a:t>Self-contained offline dashboard: results/dashboard.html</a:t>
-            </a:r>
-          </a:p>
-          <a:p>
-            <a:pPr marL="800100" lvl="1" indent="-342900" algn="just">
+            <a:endParaRPr lang="en-US" sz="2400" dirty="0">
+              <a:solidFill>
+                <a:prstClr val="black"/>
+              </a:solidFill>
+              <a:latin typeface="Arial" pitchFamily="34" charset="0"/>
+              <a:cs typeface="Arial" pitchFamily="34" charset="0"/>
+            </a:endParaRPr>
+          </a:p>
+          <a:p>
+            <a:pPr marL="342900" lvl="0" indent="-342900">
               <a:buFont typeface="Arial" panose="020B0604020202020204" pitchFamily="34" charset="0"/>
               <a:buChar char="•"/>
               <a:defRPr/>
             </a:pPr>
             <a:r>
-              <a:rPr lang="en-US" sz="2800" dirty="0">
+              <a:rPr lang="en-US" sz="2400" b="1" dirty="0">
                 <a:solidFill>
                   <a:prstClr val="black"/>
                 </a:solidFill>
                 <a:latin typeface="Arial" pitchFamily="34" charset="0"/>
                 <a:cs typeface="Arial" pitchFamily="34" charset="0"/>
               </a:rPr>
-              <a:t>Headline: 1100 -&gt; 1004 kWh (+8.8%) total; 414 -&gt; 317 kWh (+23.3%) HVAC-only; comfort 80.7% -&gt; 93.1%; peak 19.9 -&gt; 19.0 kW</a:t>
-            </a:r>
-          </a:p>
-          <a:p>
-            <a:pPr marL="342900" marR="0" lvl="0" indent="-342900" algn="just" defTabSz="457200" rtl="0" eaLnBrk="1" fontAlgn="base" latinLnBrk="0" hangingPunct="1">
-              <a:lnSpc>
-                <a:spcPct val="100000"/>
-              </a:lnSpc>
-              <a:spcBef>
-                <a:spcPct val="0"/>
-              </a:spcBef>
-              <a:spcAft>
-                <a:spcPct val="0"/>
-              </a:spcAft>
-              <a:buClrTx/>
-              <a:buSzTx/>
+              <a:t>ASHRAE Standard 55</a:t>
+            </a:r>
+            <a:r>
+              <a:rPr lang="en-US" sz="2400" dirty="0">
+                <a:solidFill>
+                  <a:prstClr val="black"/>
+                </a:solidFill>
+                <a:latin typeface="Arial" pitchFamily="34" charset="0"/>
+                <a:cs typeface="Arial" pitchFamily="34" charset="0"/>
+              </a:rPr>
+              <a:t> / </a:t>
+            </a:r>
+            <a:r>
+              <a:rPr lang="en-US" sz="2400" b="1" dirty="0">
+                <a:solidFill>
+                  <a:prstClr val="black"/>
+                </a:solidFill>
+                <a:latin typeface="Arial" pitchFamily="34" charset="0"/>
+                <a:cs typeface="Arial" pitchFamily="34" charset="0"/>
+              </a:rPr>
+              <a:t>Fanger PMV </a:t>
+            </a:r>
+            <a:r>
+              <a:rPr lang="en-US" sz="2400" dirty="0">
+                <a:solidFill>
+                  <a:prstClr val="black"/>
+                </a:solidFill>
+                <a:latin typeface="Arial" pitchFamily="34" charset="0"/>
+                <a:cs typeface="Arial" pitchFamily="34" charset="0"/>
+              </a:rPr>
+              <a:t>thermal comfort model: the basis of the [−0.5, +0.5] comfort band</a:t>
+            </a:r>
+          </a:p>
+          <a:p>
+            <a:pPr marL="342900" lvl="0" indent="-342900">
               <a:buFont typeface="Arial" panose="020B0604020202020204" pitchFamily="34" charset="0"/>
               <a:buChar char="•"/>
-              <a:tabLst/>
               <a:defRPr/>
             </a:pPr>
-            <a:r>
-              <a:rPr b="0"/>
-              <a:t> [FILL: paste a dashboard screenshot here] -- open eco-loop-building-agents/results/dashboard.html</a:t>
-            </a:r>
-            <a:endParaRPr kumimoji="0" lang="en-US" sz="2800" b="0" i="0" u="none" strike="noStrike" kern="1200" cap="none" spc="0" normalizeH="0" baseline="0" noProof="0" dirty="0">
-              <a:ln>
-                <a:noFill/>
-              </a:ln>
+            <a:endParaRPr lang="en-US" sz="2400" dirty="0">
               <a:solidFill>
                 <a:prstClr val="black"/>
               </a:solidFill>
-              <a:effectLst/>
-              <a:uLnTx/>
-              <a:uFillTx/>
               <a:latin typeface="Arial" pitchFamily="34" charset="0"/>
-              <a:ea typeface="ＭＳ Ｐゴシック" pitchFamily="1" charset="-128"/>
               <a:cs typeface="Arial" pitchFamily="34" charset="0"/>
             </a:endParaRPr>
           </a:p>
-        </p:txBody>
-      </p:sp>
-      <p:sp>
-        <p:nvSpPr>
-          <p:cNvPr id="6" name="Slide Number Placeholder 5">
-            <a:extLst>
-              <a:ext uri="{FF2B5EF4-FFF2-40B4-BE49-F238E27FC236}">
-                <a16:creationId xmlns:a16="http://schemas.microsoft.com/office/drawing/2014/main" id="{84B14AAA-63FC-5F17-FE74-5405495A1CD3}"/>
-              </a:ext>
-            </a:extLst>
-          </p:cNvPr>
+          <a:p>
+            <a:pPr marL="342900" lvl="0" indent="-342900">
+              <a:buFont typeface="Arial" panose="020B0604020202020204" pitchFamily="34" charset="0"/>
+              <a:buChar char="•"/>
+              <a:defRPr/>
+            </a:pPr>
+            <a:r>
+              <a:rPr lang="en-US" sz="2400" b="1" dirty="0">
+                <a:solidFill>
+                  <a:prstClr val="black"/>
+                </a:solidFill>
+                <a:latin typeface="Arial" pitchFamily="34" charset="0"/>
+                <a:cs typeface="Arial" pitchFamily="34" charset="0"/>
+              </a:rPr>
+              <a:t>Model Context Protocol (MCP)</a:t>
+            </a:r>
+            <a:r>
+              <a:rPr lang="en-US" sz="2400" dirty="0">
+                <a:solidFill>
+                  <a:prstClr val="black"/>
+                </a:solidFill>
+                <a:latin typeface="Arial" pitchFamily="34" charset="0"/>
+                <a:cs typeface="Arial" pitchFamily="34" charset="0"/>
+              </a:rPr>
+              <a:t> specification: modelcontextprotocol.io</a:t>
+            </a:r>
+          </a:p>
+          <a:p>
+            <a:pPr marL="342900" lvl="0" indent="-342900">
+              <a:buFont typeface="Arial" panose="020B0604020202020204" pitchFamily="34" charset="0"/>
+              <a:buChar char="•"/>
+              <a:defRPr/>
+            </a:pPr>
+            <a:r>
+              <a:rPr lang="en-US" sz="2400" b="1" dirty="0">
+                <a:solidFill>
+                  <a:prstClr val="black"/>
+                </a:solidFill>
+                <a:latin typeface="Arial" pitchFamily="34" charset="0"/>
+                <a:cs typeface="Arial" pitchFamily="34" charset="0"/>
+              </a:rPr>
+              <a:t>gpt-oss-120b</a:t>
+            </a:r>
+            <a:r>
+              <a:rPr lang="en-US" sz="2400" dirty="0">
+                <a:solidFill>
+                  <a:prstClr val="black"/>
+                </a:solidFill>
+                <a:latin typeface="Arial" pitchFamily="34" charset="0"/>
+                <a:cs typeface="Arial" pitchFamily="34" charset="0"/>
+              </a:rPr>
+              <a:t> (OpenAI open-weight model), served via </a:t>
+            </a:r>
+            <a:r>
+              <a:rPr lang="en-US" sz="2400" b="1" dirty="0">
+                <a:solidFill>
+                  <a:prstClr val="black"/>
+                </a:solidFill>
+                <a:latin typeface="Arial" pitchFamily="34" charset="0"/>
+                <a:cs typeface="Arial" pitchFamily="34" charset="0"/>
+              </a:rPr>
+              <a:t>Cerebras</a:t>
+            </a:r>
+            <a:r>
+              <a:rPr lang="en-US" sz="2400" dirty="0">
+                <a:solidFill>
+                  <a:prstClr val="black"/>
+                </a:solidFill>
+                <a:latin typeface="Arial" pitchFamily="34" charset="0"/>
+                <a:cs typeface="Arial" pitchFamily="34" charset="0"/>
+              </a:rPr>
+              <a:t> and </a:t>
+            </a:r>
+            <a:r>
+              <a:rPr lang="en-US" sz="2400" b="1" dirty="0" err="1">
+                <a:solidFill>
+                  <a:prstClr val="black"/>
+                </a:solidFill>
+                <a:latin typeface="Arial" pitchFamily="34" charset="0"/>
+                <a:cs typeface="Arial" pitchFamily="34" charset="0"/>
+              </a:rPr>
+              <a:t>Groq</a:t>
+            </a:r>
+            <a:r>
+              <a:rPr lang="en-US" sz="2400" dirty="0">
+                <a:solidFill>
+                  <a:prstClr val="black"/>
+                </a:solidFill>
+                <a:latin typeface="Arial" pitchFamily="34" charset="0"/>
+                <a:cs typeface="Arial" pitchFamily="34" charset="0"/>
+              </a:rPr>
+              <a:t> OpenAI-compatible APIs</a:t>
+            </a:r>
+          </a:p>
+          <a:p>
+            <a:pPr marL="342900" lvl="0" indent="-342900">
+              <a:buFont typeface="Arial" panose="020B0604020202020204" pitchFamily="34" charset="0"/>
+              <a:buChar char="•"/>
+              <a:defRPr/>
+            </a:pPr>
+            <a:endParaRPr lang="en-US" sz="2400" dirty="0">
+              <a:solidFill>
+                <a:prstClr val="black"/>
+              </a:solidFill>
+              <a:latin typeface="Arial" pitchFamily="34" charset="0"/>
+              <a:cs typeface="Arial" pitchFamily="34" charset="0"/>
+            </a:endParaRPr>
+          </a:p>
+          <a:p>
+            <a:pPr marL="342900" lvl="0" indent="-342900">
+              <a:buFont typeface="Arial" panose="020B0604020202020204" pitchFamily="34" charset="0"/>
+              <a:buChar char="•"/>
+              <a:defRPr/>
+            </a:pPr>
+            <a:r>
+              <a:rPr lang="en-US" sz="2400" b="1" dirty="0">
+                <a:solidFill>
+                  <a:prstClr val="black"/>
+                </a:solidFill>
+                <a:latin typeface="Arial" pitchFamily="34" charset="0"/>
+                <a:cs typeface="Arial" pitchFamily="34" charset="0"/>
+              </a:rPr>
+              <a:t>ASHRAE Standard 62.1: </a:t>
+            </a:r>
+            <a:r>
+              <a:rPr lang="en-US" sz="2400" dirty="0">
+                <a:solidFill>
+                  <a:prstClr val="black"/>
+                </a:solidFill>
+                <a:latin typeface="Arial" pitchFamily="34" charset="0"/>
+                <a:cs typeface="Arial" pitchFamily="34" charset="0"/>
+              </a:rPr>
+              <a:t>ventilation / CO₂ generation defaults used for the IAQ tracer</a:t>
+            </a:r>
+          </a:p>
+        </p:txBody>
+      </p:sp>
+      <p:sp>
+        <p:nvSpPr>
+          <p:cNvPr id="6" name="Slide Number Placeholder 5"/>
           <p:cNvSpPr>
             <a:spLocks noGrp="1"/>
           </p:cNvSpPr>
@@ -6223,426 +8379,6 @@
                 <a:defRPr/>
               </a:pPr>
               <a:t>6</a:t>
-            </a:fld>
-            <a:endParaRPr kumimoji="0" lang="en-US" sz="1200" b="1" i="0" u="none" strike="noStrike" kern="1200" cap="none" spc="0" normalizeH="0" baseline="0" noProof="0" dirty="0">
-              <a:ln>
-                <a:noFill/>
-              </a:ln>
-              <a:solidFill>
-                <a:prstClr val="white"/>
-              </a:solidFill>
-              <a:effectLst/>
-              <a:uLnTx/>
-              <a:uFillTx/>
-              <a:latin typeface="TradeGothic" pitchFamily="1" charset="0"/>
-              <a:ea typeface="ＭＳ Ｐゴシック" pitchFamily="1" charset="-128"/>
-              <a:cs typeface="+mn-cs"/>
-            </a:endParaRPr>
-          </a:p>
-        </p:txBody>
-      </p:sp>
-      <p:sp>
-        <p:nvSpPr>
-          <p:cNvPr id="7" name="Footer Placeholder 6">
-            <a:extLst>
-              <a:ext uri="{FF2B5EF4-FFF2-40B4-BE49-F238E27FC236}">
-                <a16:creationId xmlns:a16="http://schemas.microsoft.com/office/drawing/2014/main" id="{34C6332B-BBD9-799D-50C5-6A19BC85E43E}"/>
-              </a:ext>
-            </a:extLst>
-          </p:cNvPr>
-          <p:cNvSpPr>
-            <a:spLocks noGrp="1"/>
-          </p:cNvSpPr>
-          <p:nvPr>
-            <p:ph type="ftr" sz="quarter" idx="11"/>
-          </p:nvPr>
-        </p:nvSpPr>
-        <p:spPr>
-          <a:xfrm>
-            <a:off x="4648200" y="6356353"/>
-            <a:ext cx="3204000" cy="365125"/>
-          </a:xfrm>
-        </p:spPr>
-        <p:txBody>
-          <a:bodyPr/>
-          <a:lstStyle/>
-          <a:p>
-            <a:pPr marL="0" marR="0" lvl="0" indent="0" algn="ctr" defTabSz="457200" rtl="0" eaLnBrk="1" fontAlgn="auto" latinLnBrk="0" hangingPunct="1">
-              <a:lnSpc>
-                <a:spcPct val="100000"/>
-              </a:lnSpc>
-              <a:spcBef>
-                <a:spcPts val="0"/>
-              </a:spcBef>
-              <a:spcAft>
-                <a:spcPts val="0"/>
-              </a:spcAft>
-              <a:buClrTx/>
-              <a:buSzTx/>
-              <a:buFontTx/>
-              <a:buNone/>
-              <a:tabLst/>
-              <a:defRPr/>
-            </a:pPr>
-            <a:r>
-              <a:rPr kumimoji="0" lang="en-US" sz="1200" b="0" i="0" u="none" strike="noStrike" kern="1200" cap="none" spc="0" normalizeH="0" baseline="0" noProof="0">
-                <a:ln>
-                  <a:noFill/>
-                </a:ln>
-                <a:solidFill>
-                  <a:prstClr val="white"/>
-                </a:solidFill>
-                <a:effectLst/>
-                <a:uLnTx/>
-                <a:uFillTx/>
-                <a:latin typeface="TradeGothic"/>
-                <a:ea typeface="+mn-ea"/>
-                <a:cs typeface="+mn-cs"/>
-              </a:rPr>
-              <a:t>@SIH Idea submission- Template</a:t>
-            </a:r>
-            <a:endParaRPr kumimoji="0" lang="en-US" sz="1200" b="0" i="0" u="none" strike="noStrike" kern="1200" cap="none" spc="0" normalizeH="0" baseline="0" noProof="0" dirty="0">
-              <a:ln>
-                <a:noFill/>
-              </a:ln>
-              <a:solidFill>
-                <a:prstClr val="white"/>
-              </a:solidFill>
-              <a:effectLst/>
-              <a:uLnTx/>
-              <a:uFillTx/>
-              <a:latin typeface="TradeGothic"/>
-              <a:ea typeface="+mn-ea"/>
-              <a:cs typeface="+mn-cs"/>
-            </a:endParaRPr>
-          </a:p>
-        </p:txBody>
-      </p:sp>
-    </p:spTree>
-    <p:extLst>
-      <p:ext uri="{BB962C8B-B14F-4D97-AF65-F5344CB8AC3E}">
-        <p14:creationId xmlns:p14="http://schemas.microsoft.com/office/powerpoint/2010/main" val="973447886"/>
-      </p:ext>
-    </p:extLst>
-  </p:cSld>
-  <p:clrMapOvr>
-    <a:masterClrMapping/>
-  </p:clrMapOvr>
-</p:sld>
-</file>
-
-<file path=ppt/slides/slide7.xml><?xml version="1.0" encoding="utf-8"?>
-<p:sld xmlns:a="http://schemas.openxmlformats.org/drawingml/2006/main" xmlns:r="http://schemas.openxmlformats.org/officeDocument/2006/relationships" xmlns:p="http://schemas.openxmlformats.org/presentationml/2006/main">
-  <p:cSld>
-    <p:spTree>
-      <p:nvGrpSpPr>
-        <p:cNvPr id="1" name=""/>
-        <p:cNvGrpSpPr/>
-        <p:nvPr/>
-      </p:nvGrpSpPr>
-      <p:grpSpPr>
-        <a:xfrm>
-          <a:off x="0" y="0"/>
-          <a:ext cx="0" cy="0"/>
-          <a:chOff x="0" y="0"/>
-          <a:chExt cx="0" cy="0"/>
-        </a:xfrm>
-      </p:grpSpPr>
-      <p:sp>
-        <p:nvSpPr>
-          <p:cNvPr id="17409" name="Title 1"/>
-          <p:cNvSpPr>
-            <a:spLocks noGrp="1"/>
-          </p:cNvSpPr>
-          <p:nvPr>
-            <p:ph type="title"/>
-          </p:nvPr>
-        </p:nvSpPr>
-        <p:spPr/>
-        <p:txBody>
-          <a:bodyPr/>
-          <a:lstStyle/>
-          <a:p>
-            <a:pPr eaLnBrk="1" hangingPunct="1"/>
-            <a:r>
-              <a:rPr lang="en-US" sz="3600" b="1" dirty="0">
-                <a:latin typeface="Times New Roman" panose="02020603050405020304" pitchFamily="18" charset="0"/>
-                <a:ea typeface="ＭＳ Ｐゴシック" pitchFamily="1" charset="-128"/>
-                <a:cs typeface="Times New Roman" panose="02020603050405020304" pitchFamily="18" charset="0"/>
-              </a:rPr>
-              <a:t>RESEARCH  AND REFERENCES</a:t>
-            </a:r>
-          </a:p>
-        </p:txBody>
-      </p:sp>
-      <p:sp>
-        <p:nvSpPr>
-          <p:cNvPr id="17410" name="TextBox 8"/>
-          <p:cNvSpPr txBox="1">
-            <a:spLocks noChangeArrowheads="1"/>
-          </p:cNvSpPr>
-          <p:nvPr/>
-        </p:nvSpPr>
-        <p:spPr bwMode="auto">
-          <a:xfrm>
-            <a:off x="609600" y="2795263"/>
-            <a:ext cx="9385300" cy="523220"/>
-          </a:xfrm>
-          <a:prstGeom prst="rect">
-            <a:avLst/>
-          </a:prstGeom>
-          <a:noFill/>
-          <a:ln w="9525">
-            <a:noFill/>
-            <a:miter lim="800000"/>
-            <a:headEnd/>
-            <a:tailEnd/>
-          </a:ln>
-        </p:spPr>
-        <p:txBody>
-          <a:bodyPr wrap="square">
-            <a:spAutoFit/>
-          </a:bodyPr>
-          <a:lstStyle/>
-          <a:p>
-            <a:pPr marL="342900" marR="0" lvl="0" indent="-342900" algn="just" defTabSz="457200" rtl="0" eaLnBrk="1" fontAlgn="base" latinLnBrk="0" hangingPunct="1">
-              <a:lnSpc>
-                <a:spcPct val="100000"/>
-              </a:lnSpc>
-              <a:spcBef>
-                <a:spcPct val="0"/>
-              </a:spcBef>
-              <a:spcAft>
-                <a:spcPct val="0"/>
-              </a:spcAft>
-              <a:buClrTx/>
-              <a:buSzTx/>
-              <a:buFont typeface="Arial" panose="020B0604020202020204" pitchFamily="34" charset="0"/>
-              <a:buChar char="•"/>
-              <a:tabLst/>
-              <a:defRPr/>
-            </a:pPr>
-            <a:r>
-              <a:rPr lang="en-US" sz="2800" noProof="0" dirty="0">
-                <a:solidFill>
-                  <a:prstClr val="black"/>
-                </a:solidFill>
-                <a:latin typeface="Arial" pitchFamily="34" charset="0"/>
-                <a:cs typeface="Arial" pitchFamily="34" charset="0"/>
-              </a:rPr>
-              <a:t>EnergyPlus documentation &amp; pyenergyplus API -- energyplus.net</a:t>
-            </a:r>
-            <a:endParaRPr kumimoji="0" lang="en-US" sz="2800" b="0" i="0" u="none" strike="noStrike" kern="1200" cap="none" spc="0" normalizeH="0" baseline="0" noProof="0" dirty="0">
-              <a:ln>
-                <a:noFill/>
-              </a:ln>
-              <a:solidFill>
-                <a:prstClr val="black"/>
-              </a:solidFill>
-              <a:effectLst/>
-              <a:uLnTx/>
-              <a:uFillTx/>
-              <a:latin typeface="Arial" pitchFamily="34" charset="0"/>
-              <a:ea typeface="ＭＳ Ｐゴシック" pitchFamily="1" charset="-128"/>
-              <a:cs typeface="Arial" pitchFamily="34" charset="0"/>
-            </a:endParaRPr>
-          </a:p>
-          <a:p>
-            <a:pPr marL="342900" marR="0" lvl="0" indent="-342900" algn="just" defTabSz="457200" rtl="0" eaLnBrk="1" fontAlgn="base" latinLnBrk="0" hangingPunct="1">
-              <a:lnSpc>
-                <a:spcPct val="100000"/>
-              </a:lnSpc>
-              <a:spcBef>
-                <a:spcPct val="0"/>
-              </a:spcBef>
-              <a:spcAft>
-                <a:spcPct val="0"/>
-              </a:spcAft>
-              <a:buClrTx/>
-              <a:buSzTx/>
-              <a:buFont typeface="Arial" panose="020B0604020202020204" pitchFamily="34" charset="0"/>
-              <a:buChar char="•"/>
-              <a:tabLst/>
-              <a:defRPr/>
-            </a:pPr>
-            <a:r>
-              <a:rPr lang="en-US" sz="2800" noProof="0" dirty="0">
-                <a:solidFill>
-                  <a:prstClr val="black"/>
-                </a:solidFill>
-                <a:latin typeface="Arial" pitchFamily="34" charset="0"/>
-                <a:cs typeface="Arial" pitchFamily="34" charset="0"/>
-              </a:rPr>
-              <a:t>gpt-oss-120b (OpenAI open-weight model) via Cerebras &amp; Groq OpenAI-compatible APIs</a:t>
-            </a:r>
-            <a:endParaRPr kumimoji="0" lang="en-US" sz="2800" b="0" i="0" u="none" strike="noStrike" kern="1200" cap="none" spc="0" normalizeH="0" baseline="0" noProof="0" dirty="0">
-              <a:ln>
-                <a:noFill/>
-              </a:ln>
-              <a:solidFill>
-                <a:prstClr val="black"/>
-              </a:solidFill>
-              <a:effectLst/>
-              <a:uLnTx/>
-              <a:uFillTx/>
-              <a:latin typeface="Arial" pitchFamily="34" charset="0"/>
-              <a:ea typeface="ＭＳ Ｐゴシック" pitchFamily="1" charset="-128"/>
-              <a:cs typeface="Arial" pitchFamily="34" charset="0"/>
-            </a:endParaRPr>
-          </a:p>
-          <a:p>
-            <a:pPr marL="342900" marR="0" lvl="0" indent="-342900" algn="just" defTabSz="457200" rtl="0" eaLnBrk="1" fontAlgn="base" latinLnBrk="0" hangingPunct="1">
-              <a:lnSpc>
-                <a:spcPct val="100000"/>
-              </a:lnSpc>
-              <a:spcBef>
-                <a:spcPct val="0"/>
-              </a:spcBef>
-              <a:spcAft>
-                <a:spcPct val="0"/>
-              </a:spcAft>
-              <a:buClrTx/>
-              <a:buSzTx/>
-              <a:buFont typeface="Arial" panose="020B0604020202020204" pitchFamily="34" charset="0"/>
-              <a:buChar char="•"/>
-              <a:tabLst/>
-              <a:defRPr/>
-            </a:pPr>
-            <a:r>
-              <a:rPr lang="en-US" sz="2800" noProof="0" dirty="0">
-                <a:solidFill>
-                  <a:prstClr val="black"/>
-                </a:solidFill>
-                <a:latin typeface="Arial" pitchFamily="34" charset="0"/>
-                <a:cs typeface="Arial" pitchFamily="34" charset="0"/>
-              </a:rPr>
-              <a:t>Model Context Protocol (MCP) spec -- modelcontextprotocol.io</a:t>
-            </a:r>
-            <a:endParaRPr kumimoji="0" lang="en-US" sz="2800" b="0" i="0" u="none" strike="noStrike" kern="1200" cap="none" spc="0" normalizeH="0" baseline="0" noProof="0" dirty="0">
-              <a:ln>
-                <a:noFill/>
-              </a:ln>
-              <a:solidFill>
-                <a:prstClr val="black"/>
-              </a:solidFill>
-              <a:effectLst/>
-              <a:uLnTx/>
-              <a:uFillTx/>
-              <a:latin typeface="Arial" pitchFamily="34" charset="0"/>
-              <a:ea typeface="ＭＳ Ｐゴシック" pitchFamily="1" charset="-128"/>
-              <a:cs typeface="Arial" pitchFamily="34" charset="0"/>
-            </a:endParaRPr>
-          </a:p>
-          <a:p>
-            <a:pPr marL="342900" marR="0" lvl="0" indent="-342900" algn="just" defTabSz="457200" rtl="0" eaLnBrk="1" fontAlgn="base" latinLnBrk="0" hangingPunct="1">
-              <a:lnSpc>
-                <a:spcPct val="100000"/>
-              </a:lnSpc>
-              <a:spcBef>
-                <a:spcPct val="0"/>
-              </a:spcBef>
-              <a:spcAft>
-                <a:spcPct val="0"/>
-              </a:spcAft>
-              <a:buClrTx/>
-              <a:buSzTx/>
-              <a:buFont typeface="Arial" panose="020B0604020202020204" pitchFamily="34" charset="0"/>
-              <a:buChar char="•"/>
-              <a:tabLst/>
-              <a:defRPr/>
-            </a:pPr>
-            <a:r>
-              <a:rPr lang="en-US" sz="2800" noProof="0" dirty="0">
-                <a:solidFill>
-                  <a:prstClr val="black"/>
-                </a:solidFill>
-                <a:latin typeface="Arial" pitchFamily="34" charset="0"/>
-                <a:cs typeface="Arial" pitchFamily="34" charset="0"/>
-              </a:rPr>
-              <a:t>ASHRAE 55 / Fanger PMV thermal comfort model</a:t>
-            </a:r>
-            <a:endParaRPr kumimoji="0" lang="en-US" sz="2800" b="0" i="0" u="none" strike="noStrike" kern="1200" cap="none" spc="0" normalizeH="0" baseline="0" noProof="0" dirty="0">
-              <a:ln>
-                <a:noFill/>
-              </a:ln>
-              <a:solidFill>
-                <a:prstClr val="black"/>
-              </a:solidFill>
-              <a:effectLst/>
-              <a:uLnTx/>
-              <a:uFillTx/>
-              <a:latin typeface="Arial" pitchFamily="34" charset="0"/>
-              <a:ea typeface="ＭＳ Ｐゴシック" pitchFamily="1" charset="-128"/>
-              <a:cs typeface="Arial" pitchFamily="34" charset="0"/>
-            </a:endParaRPr>
-          </a:p>
-        </p:txBody>
-      </p:sp>
-      <p:sp>
-        <p:nvSpPr>
-          <p:cNvPr id="6" name="Slide Number Placeholder 5"/>
-          <p:cNvSpPr>
-            <a:spLocks noGrp="1"/>
-          </p:cNvSpPr>
-          <p:nvPr>
-            <p:ph type="sldNum" sz="quarter" idx="12"/>
-          </p:nvPr>
-        </p:nvSpPr>
-        <p:spPr/>
-        <p:txBody>
-          <a:bodyPr/>
-          <a:lstStyle/>
-          <a:p>
-            <a:pPr marL="0" marR="0" lvl="0" indent="0" algn="r" defTabSz="457200" rtl="0" eaLnBrk="1" fontAlgn="base" latinLnBrk="0" hangingPunct="1">
-              <a:lnSpc>
-                <a:spcPct val="100000"/>
-              </a:lnSpc>
-              <a:spcBef>
-                <a:spcPct val="0"/>
-              </a:spcBef>
-              <a:spcAft>
-                <a:spcPct val="0"/>
-              </a:spcAft>
-              <a:buClrTx/>
-              <a:buSzTx/>
-              <a:buFontTx/>
-              <a:buNone/>
-              <a:tabLst/>
-              <a:defRPr/>
-            </a:pPr>
-            <a:fld id="{677C3CE7-23F7-4828-823C-E0205DF2CF97}" type="slidenum">
-              <a:rPr kumimoji="0" lang="en-US" sz="1200" b="1" i="0" u="none" strike="noStrike" kern="1200" cap="none" spc="0" normalizeH="0" baseline="0" noProof="0">
-                <a:ln>
-                  <a:noFill/>
-                </a:ln>
-                <a:solidFill>
-                  <a:prstClr val="white"/>
-                </a:solidFill>
-                <a:effectLst/>
-                <a:uLnTx/>
-                <a:uFillTx/>
-                <a:latin typeface="TradeGothic" pitchFamily="1" charset="0"/>
-                <a:ea typeface="ＭＳ Ｐゴシック" pitchFamily="1" charset="-128"/>
-                <a:cs typeface="+mn-cs"/>
-              </a:rPr>
-              <a:pPr marL="0" marR="0" lvl="0" indent="0" algn="r" defTabSz="457200" rtl="0" eaLnBrk="1" fontAlgn="base" latinLnBrk="0" hangingPunct="1">
-                <a:lnSpc>
-                  <a:spcPct val="100000"/>
-                </a:lnSpc>
-                <a:spcBef>
-                  <a:spcPct val="0"/>
-                </a:spcBef>
-                <a:spcAft>
-                  <a:spcPct val="0"/>
-                </a:spcAft>
-                <a:buClrTx/>
-                <a:buSzTx/>
-                <a:buFontTx/>
-                <a:buNone/>
-                <a:tabLst/>
-                <a:defRPr/>
-              </a:pPr>
-              <a:t>7</a:t>
             </a:fld>
             <a:endParaRPr kumimoji="0" lang="en-US" sz="1200" b="1" i="0" u="none" strike="noStrike" kern="1200" cap="none" spc="0" normalizeH="0" baseline="0" noProof="0" dirty="0">
               <a:ln>

--- a/docs/Eco-Loop_Idea_Submission.pptx
+++ b/docs/Eco-Loop_Idea_Submission.pptx
@@ -4993,7 +4993,7 @@
         <p:spPr>
           <a:xfrm>
             <a:off x="397273" y="549199"/>
-            <a:ext cx="11674983" cy="5425331"/>
+            <a:ext cx="11674983" cy="5434180"/>
           </a:xfrm>
           <a:prstGeom prst="rect">
             <a:avLst/>
@@ -5006,7 +5006,10 @@
           </a:bodyPr>
           <a:lstStyle/>
           <a:p>
-            <a:endParaRPr lang="en-US" dirty="0"/>
+            <a:endParaRPr lang="en-US" dirty="0">
+              <a:latin typeface="Arial" panose="020B0604020202020204" pitchFamily="34" charset="0"/>
+              <a:cs typeface="Arial" panose="020B0604020202020204" pitchFamily="34" charset="0"/>
+            </a:endParaRPr>
           </a:p>
           <a:p>
             <a:pPr marL="285750" indent="-285750" algn="just">
@@ -5021,7 +5024,14 @@
                 <a:latin typeface="Arial" panose="020B0604020202020204" pitchFamily="34" charset="0"/>
                 <a:cs typeface="Arial" panose="020B0604020202020204" pitchFamily="34" charset="0"/>
               </a:rPr>
-              <a:t>Problem Statement ID -</a:t>
+              <a:t>Problem Statement ID - </a:t>
+            </a:r>
+            <a:r>
+              <a:rPr lang="en-US" sz="2400" dirty="0">
+                <a:latin typeface="Arial" panose="020B0604020202020204" pitchFamily="34" charset="0"/>
+                <a:cs typeface="Arial" panose="020B0604020202020204" pitchFamily="34" charset="0"/>
+              </a:rPr>
+              <a:t>1</a:t>
             </a:r>
           </a:p>
           <a:p>
@@ -5040,10 +5050,20 @@
               <a:t>Problem Statement Title-</a:t>
             </a:r>
             <a:r>
-              <a:rPr lang="en-GB" sz="2400" dirty="0"/>
-              <a:t> Eco-Loop Building Agents: Autonomous Closed-Loop Building Energy Management</a:t>
-            </a:r>
-            <a:endParaRPr lang="en-US" sz="2400" b="1" dirty="0">
+              <a:rPr lang="en-GB" sz="2400" dirty="0">
+                <a:latin typeface="Arial" panose="020B0604020202020204" pitchFamily="34" charset="0"/>
+                <a:cs typeface="Arial" panose="020B0604020202020204" pitchFamily="34" charset="0"/>
+              </a:rPr>
+              <a:t> Eco-Loop Building Agents: </a:t>
+            </a:r>
+            <a:r>
+              <a:rPr lang="en-IN" sz="2400" dirty="0">
+                <a:latin typeface="Arial" panose="020B0604020202020204" pitchFamily="34" charset="0"/>
+                <a:cs typeface="Arial" panose="020B0604020202020204" pitchFamily="34" charset="0"/>
+              </a:rPr>
+              <a:t>AI-Powered Autonomous Smart Building Optimization Challenge</a:t>
+            </a:r>
+            <a:endParaRPr lang="en-US" sz="2400" dirty="0">
               <a:latin typeface="Arial" panose="020B0604020202020204" pitchFamily="34" charset="0"/>
               <a:cs typeface="Arial" panose="020B0604020202020204" pitchFamily="34" charset="0"/>
             </a:endParaRPr>
@@ -5063,6 +5083,17 @@
               </a:rPr>
               <a:t>Theme- </a:t>
             </a:r>
+            <a:r>
+              <a:rPr lang="en-GB" sz="2400" dirty="0">
+                <a:latin typeface="Arial" panose="020B0604020202020204" pitchFamily="34" charset="0"/>
+                <a:cs typeface="Arial" panose="020B0604020202020204" pitchFamily="34" charset="0"/>
+              </a:rPr>
+              <a:t>Clean &amp; Green Technology  (Smart Automation / Sustainable Energy)</a:t>
+            </a:r>
+            <a:endParaRPr lang="en-US" sz="2400" dirty="0">
+              <a:latin typeface="Arial" panose="020B0604020202020204" pitchFamily="34" charset="0"/>
+              <a:cs typeface="Arial" panose="020B0604020202020204" pitchFamily="34" charset="0"/>
+            </a:endParaRPr>
           </a:p>
           <a:p>
             <a:pPr marL="285750" indent="-285750" algn="just">
@@ -5080,7 +5111,10 @@
               <a:t>PS Category- </a:t>
             </a:r>
             <a:r>
-              <a:rPr lang="en-GB" sz="2400" dirty="0"/>
+              <a:rPr lang="en-GB" sz="2400" dirty="0">
+                <a:latin typeface="Arial" panose="020B0604020202020204" pitchFamily="34" charset="0"/>
+                <a:cs typeface="Arial" panose="020B0604020202020204" pitchFamily="34" charset="0"/>
+              </a:rPr>
               <a:t>Software</a:t>
             </a:r>
             <a:endParaRPr lang="en-US" sz="2400" b="1" dirty="0">
@@ -5104,7 +5138,10 @@
               <a:t>Student Name (Registered on portal)-</a:t>
             </a:r>
             <a:r>
-              <a:rPr lang="en-GB" sz="2400" dirty="0"/>
+              <a:rPr lang="en-GB" sz="2400" dirty="0">
+                <a:latin typeface="Arial" panose="020B0604020202020204" pitchFamily="34" charset="0"/>
+                <a:cs typeface="Arial" panose="020B0604020202020204" pitchFamily="34" charset="0"/>
+              </a:rPr>
               <a:t> Mahendra Kausik Vankadara</a:t>
             </a:r>
             <a:endParaRPr lang="en-US" sz="2400" b="1" dirty="0">
@@ -5128,7 +5165,10 @@
               <a:t>Student ID-</a:t>
             </a:r>
             <a:r>
-              <a:rPr lang="en-GB" sz="2400" dirty="0"/>
+              <a:rPr lang="en-GB" sz="2400" dirty="0">
+                <a:latin typeface="Arial" panose="020B0604020202020204" pitchFamily="34" charset="0"/>
+                <a:cs typeface="Arial" panose="020B0604020202020204" pitchFamily="34" charset="0"/>
+              </a:rPr>
               <a:t> PES1UG23AM163</a:t>
             </a:r>
             <a:endParaRPr lang="en-IN" sz="2400" b="1" dirty="0">
@@ -5681,8 +5721,8 @@
         </p:nvSpPr>
         <p:spPr bwMode="auto">
           <a:xfrm>
-            <a:off x="609600" y="846367"/>
-            <a:ext cx="10972800" cy="3170099"/>
+            <a:off x="152400" y="846367"/>
+            <a:ext cx="11430000" cy="2954655"/>
           </a:xfrm>
           <a:prstGeom prst="rect">
             <a:avLst/>
@@ -5701,51 +5741,246 @@
           </a:bodyPr>
           <a:lstStyle/>
           <a:p>
+            <a:r>
+              <a:rPr lang="en-US" sz="2000" b="1" u="sng" dirty="0">
+                <a:latin typeface="Arial" pitchFamily="34" charset="0"/>
+                <a:cs typeface="Arial" pitchFamily="34" charset="0"/>
+              </a:rPr>
+              <a:t>Technologies Used: </a:t>
+            </a:r>
+          </a:p>
+          <a:p>
             <a:pPr marL="457200" indent="-457200">
               <a:buFont typeface="Arial" panose="020B0604020202020204" pitchFamily="34" charset="0"/>
               <a:buChar char="•"/>
             </a:pPr>
             <a:r>
-              <a:rPr lang="en-US" sz="2000" b="1" dirty="0">
+              <a:rPr lang="en-US" b="1" dirty="0">
                 <a:latin typeface="Arial" pitchFamily="34" charset="0"/>
                 <a:cs typeface="Arial" pitchFamily="34" charset="0"/>
               </a:rPr>
               <a:t>Python 3.11; </a:t>
             </a:r>
             <a:r>
-              <a:rPr lang="en-US" sz="2000" b="1" dirty="0" err="1">
+              <a:rPr lang="en-US" b="1" dirty="0" err="1">
                 <a:latin typeface="Arial" pitchFamily="34" charset="0"/>
                 <a:cs typeface="Arial" pitchFamily="34" charset="0"/>
               </a:rPr>
               <a:t>EnergyPlus</a:t>
             </a:r>
             <a:r>
-              <a:rPr lang="en-US" sz="2000" b="1" dirty="0">
+              <a:rPr lang="en-US" b="1" dirty="0">
                 <a:latin typeface="Arial" pitchFamily="34" charset="0"/>
                 <a:cs typeface="Arial" pitchFamily="34" charset="0"/>
               </a:rPr>
               <a:t> 26.1 </a:t>
             </a:r>
             <a:r>
-              <a:rPr lang="en-US" sz="2000" dirty="0">
+              <a:rPr lang="en-US" dirty="0">
                 <a:latin typeface="Arial" pitchFamily="34" charset="0"/>
                 <a:cs typeface="Arial" pitchFamily="34" charset="0"/>
               </a:rPr>
               <a:t>driven through its bundled </a:t>
             </a:r>
             <a:r>
-              <a:rPr lang="en-US" sz="2000" dirty="0" err="1">
+              <a:rPr lang="en-US" dirty="0" err="1">
                 <a:latin typeface="Arial" pitchFamily="34" charset="0"/>
                 <a:cs typeface="Arial" pitchFamily="34" charset="0"/>
               </a:rPr>
               <a:t>pyenergyplus</a:t>
             </a:r>
             <a:r>
-              <a:rPr lang="en-US" sz="2000" dirty="0">
+              <a:rPr lang="en-US" dirty="0">
                 <a:latin typeface="Arial" pitchFamily="34" charset="0"/>
                 <a:cs typeface="Arial" pitchFamily="34" charset="0"/>
               </a:rPr>
               <a:t> runtime API with in-process callbacks (not file-rewrite-and-rerun, not FMU/BCVTB)</a:t>
+            </a:r>
+          </a:p>
+          <a:p>
+            <a:pPr marL="457200" indent="-457200">
+              <a:buFont typeface="Arial" panose="020B0604020202020204" pitchFamily="34" charset="0"/>
+              <a:buChar char="•"/>
+            </a:pPr>
+            <a:r>
+              <a:rPr lang="en-US" b="1" dirty="0">
+                <a:latin typeface="Arial" pitchFamily="34" charset="0"/>
+                <a:cs typeface="Arial" pitchFamily="34" charset="0"/>
+              </a:rPr>
+              <a:t>gpt-oss-120b</a:t>
+            </a:r>
+            <a:r>
+              <a:rPr lang="en-US" dirty="0">
+                <a:latin typeface="Arial" pitchFamily="34" charset="0"/>
+                <a:cs typeface="Arial" pitchFamily="34" charset="0"/>
+              </a:rPr>
+              <a:t> (OpenAI open-weight), served OpenAI-compatible on </a:t>
+            </a:r>
+            <a:r>
+              <a:rPr lang="en-US" b="1" dirty="0" err="1">
+                <a:latin typeface="Arial" pitchFamily="34" charset="0"/>
+                <a:cs typeface="Arial" pitchFamily="34" charset="0"/>
+              </a:rPr>
+              <a:t>Cerebras+Groq</a:t>
+            </a:r>
+            <a:r>
+              <a:rPr lang="en-US" b="1" dirty="0">
+                <a:latin typeface="Arial" pitchFamily="34" charset="0"/>
+                <a:cs typeface="Arial" pitchFamily="34" charset="0"/>
+              </a:rPr>
+              <a:t>, round </a:t>
+            </a:r>
+            <a:r>
+              <a:rPr lang="en-US" b="1" dirty="0" err="1">
+                <a:latin typeface="Arial" pitchFamily="34" charset="0"/>
+                <a:cs typeface="Arial" pitchFamily="34" charset="0"/>
+              </a:rPr>
+              <a:t>robined</a:t>
+            </a:r>
+            <a:r>
+              <a:rPr lang="en-US" b="1" dirty="0">
+                <a:latin typeface="Arial" pitchFamily="34" charset="0"/>
+                <a:cs typeface="Arial" pitchFamily="34" charset="0"/>
+              </a:rPr>
+              <a:t> </a:t>
+            </a:r>
+            <a:r>
+              <a:rPr lang="en-US" dirty="0">
+                <a:latin typeface="Arial" pitchFamily="34" charset="0"/>
+                <a:cs typeface="Arial" pitchFamily="34" charset="0"/>
+              </a:rPr>
+              <a:t>per call; local </a:t>
+            </a:r>
+            <a:r>
+              <a:rPr lang="en-US" b="1" dirty="0" err="1">
+                <a:latin typeface="Arial" pitchFamily="34" charset="0"/>
+                <a:cs typeface="Arial" pitchFamily="34" charset="0"/>
+              </a:rPr>
+              <a:t>Ollama</a:t>
+            </a:r>
+            <a:r>
+              <a:rPr lang="en-US" dirty="0">
+                <a:latin typeface="Arial" pitchFamily="34" charset="0"/>
+                <a:cs typeface="Arial" pitchFamily="34" charset="0"/>
+              </a:rPr>
+              <a:t> documented as a fully offline option</a:t>
+            </a:r>
+          </a:p>
+          <a:p>
+            <a:pPr marL="457200" indent="-457200">
+              <a:buFont typeface="Arial" panose="020B0604020202020204" pitchFamily="34" charset="0"/>
+              <a:buChar char="•"/>
+            </a:pPr>
+            <a:r>
+              <a:rPr lang="en-US" b="1" dirty="0" err="1">
+                <a:latin typeface="Arial" pitchFamily="34" charset="0"/>
+                <a:cs typeface="Arial" pitchFamily="34" charset="0"/>
+              </a:rPr>
+              <a:t>FastMCP</a:t>
+            </a:r>
+            <a:r>
+              <a:rPr lang="en-US" b="1" dirty="0">
+                <a:latin typeface="Arial" pitchFamily="34" charset="0"/>
+                <a:cs typeface="Arial" pitchFamily="34" charset="0"/>
+              </a:rPr>
+              <a:t>: </a:t>
+            </a:r>
+            <a:r>
+              <a:rPr lang="en-US" dirty="0">
+                <a:latin typeface="Arial" pitchFamily="34" charset="0"/>
+                <a:cs typeface="Arial" pitchFamily="34" charset="0"/>
+              </a:rPr>
+              <a:t>MCP server exposing the same 5 tools; </a:t>
+            </a:r>
+            <a:r>
+              <a:rPr lang="en-US" b="1" dirty="0" err="1">
+                <a:latin typeface="Arial" pitchFamily="34" charset="0"/>
+                <a:cs typeface="Arial" pitchFamily="34" charset="0"/>
+              </a:rPr>
+              <a:t>Pydantic</a:t>
+            </a:r>
+            <a:r>
+              <a:rPr lang="en-US" dirty="0">
+                <a:latin typeface="Arial" pitchFamily="34" charset="0"/>
+                <a:cs typeface="Arial" pitchFamily="34" charset="0"/>
+              </a:rPr>
+              <a:t> for strict-JSON decision validation; </a:t>
+            </a:r>
+            <a:r>
+              <a:rPr lang="en-US" b="1" dirty="0" err="1">
+                <a:latin typeface="Arial" pitchFamily="34" charset="0"/>
+                <a:cs typeface="Arial" pitchFamily="34" charset="0"/>
+              </a:rPr>
+              <a:t>Plotly</a:t>
+            </a:r>
+            <a:r>
+              <a:rPr lang="en-US" dirty="0">
+                <a:latin typeface="Arial" pitchFamily="34" charset="0"/>
+                <a:cs typeface="Arial" pitchFamily="34" charset="0"/>
+              </a:rPr>
+              <a:t> for the self-contained offline dashboard; </a:t>
+            </a:r>
+            <a:r>
+              <a:rPr lang="en-US" b="1" dirty="0">
+                <a:latin typeface="Arial" pitchFamily="34" charset="0"/>
+                <a:cs typeface="Arial" pitchFamily="34" charset="0"/>
+              </a:rPr>
+              <a:t>pandas/</a:t>
+            </a:r>
+            <a:r>
+              <a:rPr lang="en-US" b="1" dirty="0" err="1">
+                <a:latin typeface="Arial" pitchFamily="34" charset="0"/>
+                <a:cs typeface="Arial" pitchFamily="34" charset="0"/>
+              </a:rPr>
+              <a:t>numpy</a:t>
+            </a:r>
+            <a:r>
+              <a:rPr lang="en-US" b="1" dirty="0">
+                <a:latin typeface="Arial" pitchFamily="34" charset="0"/>
+                <a:cs typeface="Arial" pitchFamily="34" charset="0"/>
+              </a:rPr>
+              <a:t> </a:t>
+            </a:r>
+            <a:r>
+              <a:rPr lang="en-US" dirty="0">
+                <a:latin typeface="Arial" pitchFamily="34" charset="0"/>
+                <a:cs typeface="Arial" pitchFamily="34" charset="0"/>
+              </a:rPr>
+              <a:t>for metrics</a:t>
+            </a:r>
+          </a:p>
+          <a:p>
+            <a:pPr marL="457200" indent="-457200">
+              <a:buFont typeface="Arial" panose="020B0604020202020204" pitchFamily="34" charset="0"/>
+              <a:buChar char="•"/>
+            </a:pPr>
+            <a:r>
+              <a:rPr lang="en-US" b="1" dirty="0">
+                <a:latin typeface="Arial" pitchFamily="34" charset="0"/>
+                <a:cs typeface="Arial" pitchFamily="34" charset="0"/>
+              </a:rPr>
+              <a:t>Building model: </a:t>
+            </a:r>
+            <a:r>
+              <a:rPr lang="en-US" dirty="0">
+                <a:latin typeface="Arial" pitchFamily="34" charset="0"/>
+                <a:cs typeface="Arial" pitchFamily="34" charset="0"/>
+              </a:rPr>
+              <a:t>shipped </a:t>
+            </a:r>
+            <a:r>
+              <a:rPr lang="en-US" b="1" dirty="0">
+                <a:latin typeface="Arial" pitchFamily="34" charset="0"/>
+                <a:cs typeface="Arial" pitchFamily="34" charset="0"/>
+              </a:rPr>
+              <a:t>5ZoneAirCooled.idf</a:t>
+            </a:r>
+            <a:r>
+              <a:rPr lang="en-US" dirty="0">
+                <a:latin typeface="Arial" pitchFamily="34" charset="0"/>
+                <a:cs typeface="Arial" pitchFamily="34" charset="0"/>
+              </a:rPr>
+              <a:t>, Chicago TMY3 weather, 15-21 July</a:t>
             </a:r>
           </a:p>
           <a:p>
@@ -5759,202 +5994,12 @@
             </a:endParaRPr>
           </a:p>
           <a:p>
-            <a:pPr marL="457200" indent="-457200">
-              <a:buFont typeface="Arial" panose="020B0604020202020204" pitchFamily="34" charset="0"/>
-              <a:buChar char="•"/>
-            </a:pPr>
-            <a:r>
-              <a:rPr lang="en-US" sz="2000" b="1" dirty="0">
-                <a:latin typeface="Arial" pitchFamily="34" charset="0"/>
-                <a:cs typeface="Arial" pitchFamily="34" charset="0"/>
-              </a:rPr>
-              <a:t>gpt-oss-120b</a:t>
-            </a:r>
-            <a:r>
-              <a:rPr lang="en-US" sz="2000" dirty="0">
-                <a:latin typeface="Arial" pitchFamily="34" charset="0"/>
-                <a:cs typeface="Arial" pitchFamily="34" charset="0"/>
-              </a:rPr>
-              <a:t> (OpenAI open-weight), served OpenAI-compatible on </a:t>
-            </a:r>
-            <a:r>
-              <a:rPr lang="en-US" sz="2000" b="1" dirty="0" err="1">
-                <a:latin typeface="Arial" pitchFamily="34" charset="0"/>
-                <a:cs typeface="Arial" pitchFamily="34" charset="0"/>
-              </a:rPr>
-              <a:t>Cerebras+Groq</a:t>
-            </a:r>
-            <a:r>
-              <a:rPr lang="en-US" sz="2000" b="1" dirty="0">
-                <a:latin typeface="Arial" pitchFamily="34" charset="0"/>
-                <a:cs typeface="Arial" pitchFamily="34" charset="0"/>
-              </a:rPr>
-              <a:t>, round </a:t>
-            </a:r>
-            <a:r>
-              <a:rPr lang="en-US" sz="2000" b="1" dirty="0" err="1">
-                <a:latin typeface="Arial" pitchFamily="34" charset="0"/>
-                <a:cs typeface="Arial" pitchFamily="34" charset="0"/>
-              </a:rPr>
-              <a:t>robined</a:t>
-            </a:r>
-            <a:r>
-              <a:rPr lang="en-US" sz="2000" b="1" dirty="0">
-                <a:latin typeface="Arial" pitchFamily="34" charset="0"/>
-                <a:cs typeface="Arial" pitchFamily="34" charset="0"/>
-              </a:rPr>
-              <a:t> </a:t>
-            </a:r>
-            <a:r>
-              <a:rPr lang="en-US" sz="2000" dirty="0">
-                <a:latin typeface="Arial" pitchFamily="34" charset="0"/>
-                <a:cs typeface="Arial" pitchFamily="34" charset="0"/>
-              </a:rPr>
-              <a:t>per call; local </a:t>
-            </a:r>
-            <a:r>
-              <a:rPr lang="en-US" sz="2000" b="1" dirty="0" err="1">
-                <a:latin typeface="Arial" pitchFamily="34" charset="0"/>
-                <a:cs typeface="Arial" pitchFamily="34" charset="0"/>
-              </a:rPr>
-              <a:t>Ollama</a:t>
-            </a:r>
-            <a:r>
-              <a:rPr lang="en-US" sz="2000" dirty="0">
-                <a:latin typeface="Arial" pitchFamily="34" charset="0"/>
-                <a:cs typeface="Arial" pitchFamily="34" charset="0"/>
-              </a:rPr>
-              <a:t> documented as a fully offline option</a:t>
-            </a:r>
-          </a:p>
-          <a:p>
-            <a:pPr marL="457200" indent="-457200">
-              <a:buFont typeface="Arial" panose="020B0604020202020204" pitchFamily="34" charset="0"/>
-              <a:buChar char="•"/>
-            </a:pPr>
-            <a:endParaRPr lang="en-US" sz="2000" dirty="0">
-              <a:latin typeface="Arial" pitchFamily="34" charset="0"/>
-              <a:cs typeface="Arial" pitchFamily="34" charset="0"/>
-            </a:endParaRPr>
-          </a:p>
-          <a:p>
-            <a:pPr marL="457200" indent="-457200">
-              <a:buFont typeface="Arial" panose="020B0604020202020204" pitchFamily="34" charset="0"/>
-              <a:buChar char="•"/>
-            </a:pPr>
-            <a:r>
-              <a:rPr lang="en-US" sz="2000" b="1" dirty="0" err="1">
-                <a:latin typeface="Arial" pitchFamily="34" charset="0"/>
-                <a:cs typeface="Arial" pitchFamily="34" charset="0"/>
-              </a:rPr>
-              <a:t>FastMCP</a:t>
-            </a:r>
-            <a:r>
-              <a:rPr lang="en-US" sz="2000" b="1" dirty="0">
-                <a:latin typeface="Arial" pitchFamily="34" charset="0"/>
-                <a:cs typeface="Arial" pitchFamily="34" charset="0"/>
-              </a:rPr>
-              <a:t>: </a:t>
-            </a:r>
-            <a:r>
-              <a:rPr lang="en-US" sz="2000" dirty="0">
-                <a:latin typeface="Arial" pitchFamily="34" charset="0"/>
-                <a:cs typeface="Arial" pitchFamily="34" charset="0"/>
-              </a:rPr>
-              <a:t>MCP server exposing the same 5 tools; </a:t>
-            </a:r>
-            <a:r>
-              <a:rPr lang="en-US" sz="2000" b="1" dirty="0" err="1">
-                <a:latin typeface="Arial" pitchFamily="34" charset="0"/>
-                <a:cs typeface="Arial" pitchFamily="34" charset="0"/>
-              </a:rPr>
-              <a:t>Pydantic</a:t>
-            </a:r>
-            <a:r>
-              <a:rPr lang="en-US" sz="2000" dirty="0">
-                <a:latin typeface="Arial" pitchFamily="34" charset="0"/>
-                <a:cs typeface="Arial" pitchFamily="34" charset="0"/>
-              </a:rPr>
-              <a:t> for strict-JSON decision validation; </a:t>
-            </a:r>
-            <a:r>
-              <a:rPr lang="en-US" sz="2000" b="1" dirty="0" err="1">
-                <a:latin typeface="Arial" pitchFamily="34" charset="0"/>
-                <a:cs typeface="Arial" pitchFamily="34" charset="0"/>
-              </a:rPr>
-              <a:t>Plotly</a:t>
-            </a:r>
-            <a:r>
-              <a:rPr lang="en-US" sz="2000" dirty="0">
-                <a:latin typeface="Arial" pitchFamily="34" charset="0"/>
-                <a:cs typeface="Arial" pitchFamily="34" charset="0"/>
-              </a:rPr>
-              <a:t> for the self-contained offline dashboard; </a:t>
-            </a:r>
-            <a:r>
-              <a:rPr lang="en-US" sz="2000" b="1" dirty="0">
-                <a:latin typeface="Arial" pitchFamily="34" charset="0"/>
-                <a:cs typeface="Arial" pitchFamily="34" charset="0"/>
-              </a:rPr>
-              <a:t>pandas/</a:t>
-            </a:r>
-            <a:r>
-              <a:rPr lang="en-US" sz="2000" b="1" dirty="0" err="1">
-                <a:latin typeface="Arial" pitchFamily="34" charset="0"/>
-                <a:cs typeface="Arial" pitchFamily="34" charset="0"/>
-              </a:rPr>
-              <a:t>numpy</a:t>
-            </a:r>
-            <a:r>
-              <a:rPr lang="en-US" sz="2000" b="1" dirty="0">
-                <a:latin typeface="Arial" pitchFamily="34" charset="0"/>
-                <a:cs typeface="Arial" pitchFamily="34" charset="0"/>
-              </a:rPr>
-              <a:t> </a:t>
-            </a:r>
-            <a:r>
-              <a:rPr lang="en-US" sz="2000" dirty="0">
-                <a:latin typeface="Arial" pitchFamily="34" charset="0"/>
-                <a:cs typeface="Arial" pitchFamily="34" charset="0"/>
-              </a:rPr>
-              <a:t>for metrics</a:t>
-            </a:r>
-          </a:p>
-          <a:p>
-            <a:pPr marL="457200" indent="-457200">
-              <a:buFont typeface="Arial" panose="020B0604020202020204" pitchFamily="34" charset="0"/>
-              <a:buChar char="•"/>
-            </a:pPr>
-            <a:endParaRPr lang="en-US" sz="2000" dirty="0">
-              <a:latin typeface="Arial" pitchFamily="34" charset="0"/>
-              <a:cs typeface="Arial" pitchFamily="34" charset="0"/>
-            </a:endParaRPr>
-          </a:p>
-          <a:p>
-            <a:pPr marL="457200" indent="-457200">
-              <a:buFont typeface="Arial" panose="020B0604020202020204" pitchFamily="34" charset="0"/>
-              <a:buChar char="•"/>
-            </a:pPr>
-            <a:r>
-              <a:rPr lang="en-US" sz="2000" dirty="0">
-                <a:latin typeface="Arial" pitchFamily="34" charset="0"/>
-                <a:cs typeface="Arial" pitchFamily="34" charset="0"/>
-              </a:rPr>
-              <a:t>Building model: shipped </a:t>
-            </a:r>
-            <a:r>
-              <a:rPr lang="en-US" sz="2000" b="1" dirty="0">
-                <a:latin typeface="Arial" pitchFamily="34" charset="0"/>
-                <a:cs typeface="Arial" pitchFamily="34" charset="0"/>
-              </a:rPr>
-              <a:t>5ZoneAirCooled.idf</a:t>
-            </a:r>
-            <a:r>
-              <a:rPr lang="en-US" sz="2000" dirty="0">
-                <a:latin typeface="Arial" pitchFamily="34" charset="0"/>
-                <a:cs typeface="Arial" pitchFamily="34" charset="0"/>
-              </a:rPr>
-              <a:t>, Chicago TMY3 weather, 15-21 July</a:t>
+            <a:r>
+              <a:rPr lang="en-US" sz="2000" b="1" u="sng" dirty="0">
+                <a:latin typeface="Arial" pitchFamily="34" charset="0"/>
+                <a:cs typeface="Arial" pitchFamily="34" charset="0"/>
+              </a:rPr>
+              <a:t>Methodology:</a:t>
             </a:r>
           </a:p>
         </p:txBody>
@@ -6052,8 +6097,8 @@
         </p:blipFill>
         <p:spPr>
           <a:xfrm>
-            <a:off x="0" y="4217874"/>
-            <a:ext cx="12192000" cy="2324440"/>
+            <a:off x="337456" y="3916467"/>
+            <a:ext cx="11430000" cy="2614962"/>
           </a:xfrm>
           <a:prstGeom prst="rect">
             <a:avLst/>
@@ -6127,8 +6172,8 @@
         </p:nvSpPr>
         <p:spPr bwMode="auto">
           <a:xfrm>
-            <a:off x="1083128" y="633422"/>
-            <a:ext cx="10025743" cy="6247864"/>
+            <a:off x="713015" y="668130"/>
+            <a:ext cx="10765970" cy="6001643"/>
           </a:xfrm>
           <a:prstGeom prst="rect">
             <a:avLst/>
@@ -6160,7 +6205,7 @@
                 <a:latin typeface="Arial" pitchFamily="34" charset="0"/>
                 <a:cs typeface="Arial" pitchFamily="34" charset="0"/>
               </a:rPr>
-              <a:t>Feasibility: measured, not projected</a:t>
+              <a:t>Feasibility (Measured, not projected):</a:t>
             </a:r>
           </a:p>
           <a:p>
@@ -6234,7 +6279,7 @@
                 <a:latin typeface="Arial" pitchFamily="34" charset="0"/>
                 <a:cs typeface="Arial" pitchFamily="34" charset="0"/>
               </a:rPr>
-              <a:t>Reliability soak: 14 simulated days (2x the required horizon), 336/336 decisions, zero crashes</a:t>
+              <a:t>Reliability soak: 14 simulated days (2× the required horizon) with the LLM live throughout- 336/336 decisions injected, 0/336 fell back to the rule schedule, 0 crashes, </a:t>
             </a:r>
             <a:r>
               <a:rPr lang="en-GB" sz="1600" dirty="0">
@@ -6244,7 +6289,7 @@
                 <a:latin typeface="Arial" pitchFamily="34" charset="0"/>
                 <a:cs typeface="Arial" pitchFamily="34" charset="0"/>
               </a:rPr>
-              <a:t>. </a:t>
+              <a:t>latency p50 693ms / p95 1641ms, and 92.9% occupied comfort held across the full 14 days.</a:t>
             </a:r>
           </a:p>
           <a:p>
@@ -6897,7 +6942,7 @@
         <p:spPr bwMode="auto">
           <a:xfrm>
             <a:off x="609600" y="863542"/>
-            <a:ext cx="10972800" cy="2308324"/>
+            <a:ext cx="10972800" cy="2369880"/>
           </a:xfrm>
           <a:prstGeom prst="rect">
             <a:avLst/>
@@ -6922,7 +6967,7 @@
               <a:defRPr/>
             </a:pPr>
             <a:r>
-              <a:rPr lang="en-US" b="1" dirty="0">
+              <a:rPr lang="en-US" sz="1600" b="1" dirty="0">
                 <a:solidFill>
                   <a:prstClr val="black"/>
                 </a:solidFill>
@@ -6932,7 +6977,7 @@
               <a:t>Full source: </a:t>
             </a:r>
             <a:r>
-              <a:rPr lang="en-US" dirty="0">
+              <a:rPr lang="en-US" sz="1600" dirty="0">
                 <a:solidFill>
                   <a:prstClr val="black"/>
                 </a:solidFill>
@@ -6942,7 +6987,7 @@
               </a:rPr>
               <a:t>https://github.com/mahendra-kausik/eco-loop-building-agents</a:t>
             </a:r>
-            <a:endParaRPr lang="en-US" dirty="0">
+            <a:endParaRPr lang="en-US" sz="1600" dirty="0">
               <a:solidFill>
                 <a:prstClr val="black"/>
               </a:solidFill>
@@ -6957,7 +7002,7 @@
               <a:defRPr/>
             </a:pPr>
             <a:r>
-              <a:rPr lang="en-US" b="1" dirty="0">
+              <a:rPr lang="en-US" sz="1600" b="1" dirty="0">
                 <a:solidFill>
                   <a:prstClr val="black"/>
                 </a:solidFill>
@@ -6967,7 +7012,7 @@
               <a:t>Architecture doc: </a:t>
             </a:r>
             <a:r>
-              <a:rPr lang="en-US" dirty="0">
+              <a:rPr lang="en-US" sz="1600" dirty="0">
                 <a:solidFill>
                   <a:prstClr val="black"/>
                 </a:solidFill>
@@ -6984,7 +7029,7 @@
               <a:defRPr/>
             </a:pPr>
             <a:r>
-              <a:rPr lang="en-US" b="1" dirty="0">
+              <a:rPr lang="en-US" sz="1600" b="1" dirty="0">
                 <a:solidFill>
                   <a:prstClr val="black"/>
                 </a:solidFill>
@@ -6994,7 +7039,7 @@
               <a:t>Dashboard:</a:t>
             </a:r>
             <a:r>
-              <a:rPr lang="en-US" dirty="0">
+              <a:rPr lang="en-US" sz="1600" dirty="0">
                 <a:solidFill>
                   <a:prstClr val="black"/>
                 </a:solidFill>
@@ -7011,7 +7056,7 @@
               <a:defRPr/>
             </a:pPr>
             <a:r>
-              <a:rPr lang="en-US" b="1" dirty="0">
+              <a:rPr lang="en-US" sz="1600" b="1" dirty="0">
                 <a:solidFill>
                   <a:prstClr val="black"/>
                 </a:solidFill>
@@ -7021,7 +7066,7 @@
               <a:t>Building models: </a:t>
             </a:r>
             <a:r>
-              <a:rPr lang="en-US" dirty="0">
+              <a:rPr lang="en-US" sz="1600" dirty="0">
                 <a:solidFill>
                   <a:prstClr val="black"/>
                 </a:solidFill>
@@ -7031,7 +7076,7 @@
               <a:t>models/</a:t>
             </a:r>
             <a:r>
-              <a:rPr lang="en-US" dirty="0" err="1">
+              <a:rPr lang="en-US" sz="1600" dirty="0" err="1">
                 <a:solidFill>
                   <a:prstClr val="black"/>
                 </a:solidFill>
@@ -7041,7 +7086,7 @@
               <a:t>baseline.idf</a:t>
             </a:r>
             <a:r>
-              <a:rPr lang="en-US" dirty="0">
+              <a:rPr lang="en-US" sz="1600" dirty="0">
                 <a:solidFill>
                   <a:prstClr val="black"/>
                 </a:solidFill>
@@ -7051,7 +7096,7 @@
               <a:t> + </a:t>
             </a:r>
             <a:r>
-              <a:rPr lang="en-US" dirty="0" err="1">
+              <a:rPr lang="en-US" sz="1600" dirty="0" err="1">
                 <a:solidFill>
                   <a:prstClr val="black"/>
                 </a:solidFill>
@@ -7061,7 +7106,7 @@
               <a:t>agent_llm_runtime.idf</a:t>
             </a:r>
             <a:r>
-              <a:rPr lang="en-US" dirty="0">
+              <a:rPr lang="en-US" sz="1600" dirty="0">
                 <a:solidFill>
                   <a:prstClr val="black"/>
                 </a:solidFill>
@@ -7071,7 +7116,7 @@
               <a:t> / </a:t>
             </a:r>
             <a:r>
-              <a:rPr lang="en-US" dirty="0" err="1">
+              <a:rPr lang="en-US" sz="1600" dirty="0" err="1">
                 <a:solidFill>
                   <a:prstClr val="black"/>
                 </a:solidFill>
@@ -7081,7 +7126,7 @@
               <a:t>agent_fallback_runtime.idf</a:t>
             </a:r>
             <a:r>
-              <a:rPr lang="en-US" dirty="0">
+              <a:rPr lang="en-US" sz="1600" dirty="0">
                 <a:solidFill>
                   <a:prstClr val="black"/>
                 </a:solidFill>
@@ -7091,7 +7136,7 @@
               <a:t> (</a:t>
             </a:r>
             <a:r>
-              <a:rPr lang="en-GB" dirty="0">
+              <a:rPr lang="en-GB" sz="1600" dirty="0">
                 <a:solidFill>
                   <a:prstClr val="black"/>
                 </a:solidFill>
@@ -7100,7 +7145,7 @@
               </a:rPr>
               <a:t>the actual applied hour-by-hour schedules baked into real IDF objects, diffable against baseline)</a:t>
             </a:r>
-            <a:endParaRPr lang="en-US" dirty="0">
+            <a:endParaRPr lang="en-US" sz="1600" dirty="0">
               <a:solidFill>
                 <a:prstClr val="black"/>
               </a:solidFill>
@@ -7115,7 +7160,7 @@
               <a:defRPr/>
             </a:pPr>
             <a:r>
-              <a:rPr lang="en-US" b="1" dirty="0">
+              <a:rPr lang="en-US" sz="1600" b="1" dirty="0">
                 <a:solidFill>
                   <a:prstClr val="black"/>
                 </a:solidFill>
@@ -7125,7 +7170,7 @@
               <a:t>Decision log:</a:t>
             </a:r>
             <a:r>
-              <a:rPr lang="en-US" dirty="0">
+              <a:rPr lang="en-US" sz="1600" dirty="0">
                 <a:solidFill>
                   <a:prstClr val="black"/>
                 </a:solidFill>
@@ -7135,7 +7180,7 @@
               <a:t> results/</a:t>
             </a:r>
             <a:r>
-              <a:rPr lang="en-US" dirty="0" err="1">
+              <a:rPr lang="en-US" sz="1600" dirty="0" err="1">
                 <a:solidFill>
                   <a:prstClr val="black"/>
                 </a:solidFill>
@@ -7145,7 +7190,7 @@
               <a:t>decision_log.jsonl</a:t>
             </a:r>
             <a:r>
-              <a:rPr lang="en-US" dirty="0">
+              <a:rPr lang="en-US" sz="1600" dirty="0">
                 <a:solidFill>
                   <a:prstClr val="black"/>
                 </a:solidFill>
@@ -7155,7 +7200,7 @@
               <a:t> (168 decisions with the model's own stated reasoning) + </a:t>
             </a:r>
             <a:r>
-              <a:rPr lang="en-US" dirty="0" err="1">
+              <a:rPr lang="en-US" sz="1600" dirty="0" err="1">
                 <a:solidFill>
                   <a:prstClr val="black"/>
                 </a:solidFill>
@@ -7165,7 +7210,7 @@
               <a:t>decision_log_llm_unreachable.jsonl</a:t>
             </a:r>
             <a:r>
-              <a:rPr lang="en-US" dirty="0">
+              <a:rPr lang="en-US" sz="1600" dirty="0">
                 <a:solidFill>
                   <a:prstClr val="black"/>
                 </a:solidFill>
@@ -7174,7 +7219,34 @@
               </a:rPr>
               <a:t> (the 100%-fallback proof run)</a:t>
             </a:r>
-            <a:endParaRPr kumimoji="0" lang="en-US" b="0" i="0" u="none" strike="noStrike" kern="1200" cap="none" spc="0" normalizeH="0" baseline="0" noProof="0" dirty="0">
+          </a:p>
+          <a:p>
+            <a:pPr marL="342900" lvl="0" indent="-342900">
+              <a:buFont typeface="Arial" panose="020B0604020202020204" pitchFamily="34" charset="0"/>
+              <a:buChar char="•"/>
+              <a:defRPr/>
+            </a:pPr>
+            <a:r>
+              <a:rPr lang="en-US" sz="1600" b="1" dirty="0">
+                <a:solidFill>
+                  <a:prstClr val="black"/>
+                </a:solidFill>
+                <a:latin typeface="Arial" pitchFamily="34" charset="0"/>
+                <a:cs typeface="Arial" pitchFamily="34" charset="0"/>
+              </a:rPr>
+              <a:t>Reliability soak log: </a:t>
+            </a:r>
+            <a:r>
+              <a:rPr lang="en-US" sz="1600" dirty="0">
+                <a:solidFill>
+                  <a:prstClr val="black"/>
+                </a:solidFill>
+                <a:latin typeface="Arial" pitchFamily="34" charset="0"/>
+                <a:cs typeface="Arial" pitchFamily="34" charset="0"/>
+              </a:rPr>
+              <a:t>results/decision_log_soak14.jsonl (336 decisions, 14 simulated days, 0 fallbacks) plus the soak strip on results/dashboard.html</a:t>
+            </a:r>
+            <a:endParaRPr kumimoji="0" lang="en-US" sz="1600" b="0" i="0" u="none" strike="noStrike" kern="1200" cap="none" spc="0" normalizeH="0" baseline="0" noProof="0" dirty="0">
               <a:ln>
                 <a:noFill/>
               </a:ln>
@@ -7372,14 +7444,14 @@
           <p:nvPr>
             <p:extLst>
               <p:ext uri="{D42A27DB-BD31-4B8C-83A1-F6EECF244321}">
-                <p14:modId xmlns:p14="http://schemas.microsoft.com/office/powerpoint/2010/main" val="3634140663"/>
+                <p14:modId xmlns:p14="http://schemas.microsoft.com/office/powerpoint/2010/main" val="3208526968"/>
               </p:ext>
             </p:extLst>
           </p:nvPr>
         </p:nvGraphicFramePr>
         <p:xfrm>
-          <a:off x="1442651" y="3171866"/>
-          <a:ext cx="9306697" cy="3645847"/>
+          <a:off x="571500" y="3310500"/>
+          <a:ext cx="11048999" cy="3410978"/>
         </p:xfrm>
         <a:graphic>
           <a:graphicData uri="http://schemas.openxmlformats.org/drawingml/2006/table">
@@ -7388,28 +7460,28 @@
                 <a:tableStyleId>{5C22544A-7EE6-4342-B048-85BDC9FD1C3A}</a:tableStyleId>
               </a:tblPr>
               <a:tblGrid>
-                <a:gridCol w="3363685">
+                <a:gridCol w="3993399">
                   <a:extLst>
                     <a:ext uri="{9D8B030D-6E8A-4147-A177-3AD203B41FA5}">
                       <a16:colId xmlns:a16="http://schemas.microsoft.com/office/drawing/2014/main" val="243089259"/>
                     </a:ext>
                   </a:extLst>
                 </a:gridCol>
-                <a:gridCol w="1393372">
+                <a:gridCol w="1654225">
                   <a:extLst>
                     <a:ext uri="{9D8B030D-6E8A-4147-A177-3AD203B41FA5}">
                       <a16:colId xmlns:a16="http://schemas.microsoft.com/office/drawing/2014/main" val="2530782598"/>
                     </a:ext>
                   </a:extLst>
                 </a:gridCol>
-                <a:gridCol w="1491343">
+                <a:gridCol w="1770536">
                   <a:extLst>
                     <a:ext uri="{9D8B030D-6E8A-4147-A177-3AD203B41FA5}">
                       <a16:colId xmlns:a16="http://schemas.microsoft.com/office/drawing/2014/main" val="250388775"/>
                     </a:ext>
                   </a:extLst>
                 </a:gridCol>
-                <a:gridCol w="3058297">
+                <a:gridCol w="3630839">
                   <a:extLst>
                     <a:ext uri="{9D8B030D-6E8A-4147-A177-3AD203B41FA5}">
                       <a16:colId xmlns:a16="http://schemas.microsoft.com/office/drawing/2014/main" val="1470385253"/>
@@ -7417,7 +7489,7 @@
                   </a:extLst>
                 </a:gridCol>
               </a:tblGrid>
-              <a:tr h="368971">
+              <a:tr h="349665">
                 <a:tc>
                   <a:txBody>
                     <a:bodyPr/>
@@ -7480,7 +7552,7 @@
                   </a:ext>
                 </a:extLst>
               </a:tr>
-              <a:tr h="374095">
+              <a:tr h="456713">
                 <a:tc>
                   <a:txBody>
                     <a:bodyPr/>
@@ -7543,7 +7615,7 @@
                   </a:ext>
                 </a:extLst>
               </a:tr>
-              <a:tr h="374095">
+              <a:tr h="354916">
                 <a:tc>
                   <a:txBody>
                     <a:bodyPr/>
@@ -7606,7 +7678,7 @@
                   </a:ext>
                 </a:extLst>
               </a:tr>
-              <a:tr h="387102">
+              <a:tr h="393945">
                 <a:tc>
                   <a:txBody>
                     <a:bodyPr/>
@@ -7669,7 +7741,7 @@
                   </a:ext>
                 </a:extLst>
               </a:tr>
-              <a:tr h="374095">
+              <a:tr h="354916">
                 <a:tc>
                   <a:txBody>
                     <a:bodyPr/>
@@ -7732,7 +7804,7 @@
                   </a:ext>
                 </a:extLst>
               </a:tr>
-              <a:tr h="374095">
+              <a:tr h="354916">
                 <a:tc>
                   <a:txBody>
                     <a:bodyPr/>
@@ -7795,7 +7867,7 @@
                   </a:ext>
                 </a:extLst>
               </a:tr>
-              <a:tr h="374095">
+              <a:tr h="354916">
                 <a:tc>
                   <a:txBody>
                     <a:bodyPr/>
@@ -7858,7 +7930,7 @@
                   </a:ext>
                 </a:extLst>
               </a:tr>
-              <a:tr h="374095">
+              <a:tr h="354916">
                 <a:tc>
                   <a:txBody>
                     <a:bodyPr/>
@@ -7921,7 +7993,7 @@
                   </a:ext>
                 </a:extLst>
               </a:tr>
-              <a:tr h="374095">
+              <a:tr h="354916">
                 <a:tc>
                   <a:txBody>
                     <a:bodyPr/>
@@ -7973,7 +8045,7 @@
                       <a:pPr algn="ctr"/>
                       <a:r>
                         <a:rPr lang="en-IN" dirty="0"/>
-                        <a:t>336/336, 0 errors</a:t>
+                        <a:t>336/336, 0 fallback</a:t>
                       </a:r>
                     </a:p>
                   </a:txBody>
@@ -8056,7 +8128,7 @@
         </p:nvSpPr>
         <p:spPr bwMode="auto">
           <a:xfrm>
-            <a:off x="609599" y="1166842"/>
+            <a:off x="609601" y="1476662"/>
             <a:ext cx="10972799" cy="4524315"/>
           </a:xfrm>
           <a:prstGeom prst="rect">
